--- a/docs/presentation/Call_Com_Orange_Premiere_Rencontre_5min.pptx
+++ b/docs/presentation/Call_Com_Orange_Premiere_Rencontre_5min.pptx
@@ -510,7 +510,7 @@
           <a:p>
             <a:r>
               <a:rPr lang="en-US" dirty="0"/>
-              <a:t>Ouvrir en disant : « Je ne viens pas vous présenter une idée. Je viens vous montrer un produit qu'un opérateur a déjà exploité avec succès, et vous dire que vous avez déjà la brique technique pour le faire. »</a:t>
+              <a:t>Ouvrir ainsi : « Nous ne venons pas vous présenter une architecture. Nous venons valider une faisabilité de principe, parce que nous ne connaissons pas votre réseau. En 5 minutes : pourquoi c'est intéressant, ce qu'un opérateur a déjà fait, et trois questions. »</a:t>
             </a:r>
             <a:endParaRPr lang="en-US" dirty="0"/>
           </a:p>
@@ -598,7 +598,7 @@
           <a:p>
             <a:r>
               <a:rPr lang="en-US" dirty="0"/>
-              <a:t>Ne pas s'attarder. 45 secondes maximum. L'objectif est juste de poser le cadre avant le slide suivant, qui est le vrai argument.</a:t>
+              <a:t>45 secondes maximum. On pose le cadre, on ne s'attarde pas : le vrai argument est au slide suivant.</a:t>
             </a:r>
             <a:endParaRPr lang="en-US" dirty="0"/>
           </a:p>
@@ -686,7 +686,7 @@
           <a:p>
             <a:r>
               <a:rPr lang="en-US" dirty="0"/>
-              <a:t>C'EST LE SLIDE QUI COMPTE. Prendre son temps. Laisser un silence après avoir cité les marques. Puis enchaîner sur « Yesss! » — le fait que le groupe Orange l'ait déjà fait désamorce la moitié des objections.</a:t>
+              <a:t>LE SLIDE QUI COMPTE. Prendre son temps, laisser un silence après la liste des marques, puis enchaîner sur « Yesss! » : le fait que le groupe Orange l'ait déjà fait désamorce la moitié des objections.</a:t>
             </a:r>
             <a:endParaRPr lang="en-US" dirty="0"/>
           </a:p>
@@ -774,7 +774,7 @@
           <a:p>
             <a:r>
               <a:rPr lang="en-US" dirty="0"/>
-              <a:t>Signaler humblement que la capacité d'affectation par appelant nous vient d'une description publique du service, et que c'est précisément ce que nous venons confirmer. Ne PAS affirmer connaître leur architecture.</a:t>
+              <a:t>C'est la slide qui établit la crédibilité devant des ingénieurs. Le message : nous avons fait le travail, et nous savons où s'arrête notre connaissance. Ne JAMAIS affirmer connaître leur architecture — la troisième colonne est ce qui rend les deux premières crédibles.</a:t>
             </a:r>
             <a:endParaRPr lang="en-US" dirty="0"/>
           </a:p>
@@ -862,7 +862,7 @@
           <a:p>
             <a:r>
               <a:rPr lang="en-US" dirty="0"/>
-              <a:t>C'est le slide qui répond à « pourquoi vous et pas nous ». Insister : Orange n'a ni l'envie ni la structure pour démarcher des centaines de petits commerçants. Call Com oui.</a:t>
+              <a:t>Répond à « pourquoi vous et pas nous ». Noter que la décision de quoi diffuser reste chez Orange dans le scénario que nous proposons : c'est un point qui rassure beaucoup l'équipe réseau.</a:t>
             </a:r>
             <a:endParaRPr lang="en-US" dirty="0"/>
           </a:p>
@@ -950,7 +950,7 @@
           <a:p>
             <a:r>
               <a:rPr lang="en-US" dirty="0"/>
-              <a:t>Énoncer les quatre engagements soi-même, avant qu'on les demande. C'est ce qui fait la différence entre un demandeur et un partenaire. Le quatrième — proposer son propre critère d'arrêt — est celui qui surprend le plus favorablement.</a:t>
+              <a:t>Le changement de posture par rapport à une première version : on NE demande PAS un POC en première réunion. On demande une réunion technique et trois réponses. Le POC est la suite, pas la demande. Énoncer les quatre engagements soi-même, avant qu'on les demande.</a:t>
             </a:r>
             <a:endParaRPr lang="en-US" dirty="0"/>
           </a:p>
@@ -1038,7 +1038,7 @@
           <a:p>
             <a:r>
               <a:rPr lang="en-US" dirty="0"/>
-              <a:t>Finir sur ces deux questions et la demande de réunion technique. Ne PAS dérouler les 22 questions ici : le dire, et s'arrêter. La vraie demande de cette réunion est la réunion suivante.</a:t>
+              <a:t>Finir là et s'arrêter. Ne PAS dérouler la liste longue de questions techniques : la mentionner comme préparée pour la réunion suivante. La vraie demande de ce rendez-vous est le rendez-vous suivant.</a:t>
             </a:r>
             <a:endParaRPr lang="en-US" dirty="0"/>
           </a:p>
@@ -1126,7 +1126,7 @@
           <a:p>
             <a:r>
               <a:rPr lang="en-US" dirty="0"/>
-              <a:t>Slide de réserve : ne sortir que si la discussion devient technique. Le fait de présenter les deux variantes sans imposer la sienne est ce qui crédibilise le plus.</a:t>
+              <a:t>Slide de réserve, à sortir si la discussion devient technique. Présenter les deux variantes sans imposer la sienne est ce qui crédibilise le plus.</a:t>
             </a:r>
             <a:endParaRPr lang="en-US" dirty="0"/>
           </a:p>
@@ -1214,7 +1214,7 @@
           <a:p>
             <a:r>
               <a:rPr lang="en-US" dirty="0"/>
-              <a:t>Slide de réserve. À sortir si on vous demande « concrètement comment ». Le message central est la ligne « latence ajoutée : 0 ms » — c'est ce que l'équipe cœur de réseau veut entendre.</a:t>
+              <a:t>Le message central : nous proposons le scénario le moins intrusif pour vous, pas le plus élégant pour nous. « Latence ajoutée : aucune » est ce que l'équipe cœur de réseau veut entendre.</a:t>
             </a:r>
             <a:endParaRPr lang="en-US" dirty="0"/>
           </a:p>
@@ -1620,7 +1620,7 @@
                 <a:ea typeface="Calibri" pitchFamily="34" charset="-122"/>
                 <a:cs typeface="Calibri" pitchFamily="34" charset="-120"/>
               </a:rPr>
-              <a:t>PROPOSITION DE PARTENARIAT</a:t>
+              <a:t>VALIDATION DE FAISABILITÉ</a:t>
             </a:r>
             <a:endParaRPr lang="en-US" sz="1300" dirty="0"/>
           </a:p>
@@ -1813,7 +1813,7 @@
         <p:spPr>
           <a:xfrm>
             <a:off x="822960" y="5212080"/>
-            <a:ext cx="5486400" cy="320040"/>
+            <a:ext cx="5943600" cy="320040"/>
           </a:xfrm>
           <a:prstGeom prst="rect">
             <a:avLst/>
@@ -1837,7 +1837,7 @@
                 <a:ea typeface="Calibri" pitchFamily="34" charset="-122"/>
                 <a:cs typeface="Calibri" pitchFamily="34" charset="-120"/>
               </a:rPr>
-              <a:t>5 minutes · 2 questions</a:t>
+              <a:t>5 minutes · 3 questions · 1 demande</a:t>
             </a:r>
             <a:endParaRPr lang="en-US" sz="1300" dirty="0"/>
           </a:p>
@@ -1962,23 +1962,23 @@
         <p:spPr>
           <a:xfrm>
             <a:off x="640080" y="384048"/>
-            <a:ext cx="10972800" cy="658368"/>
-          </a:xfrm>
-          <a:prstGeom prst="rect">
-            <a:avLst/>
-          </a:prstGeom>
-          <a:noFill/>
-          <a:ln/>
-        </p:spPr>
-        <p:txBody>
-          <a:bodyPr wrap="square" lIns="0" tIns="0" rIns="0" bIns="0" rtlCol="0" anchor="ctr"/>
-          <a:lstStyle/>
-          <a:p>
-            <a:pPr indent="0" marL="0">
-              <a:buNone/>
-            </a:pPr>
-            <a:r>
-              <a:rPr lang="en-US" sz="3200" b="1" dirty="0">
+            <a:ext cx="10058400" cy="658368"/>
+          </a:xfrm>
+          <a:prstGeom prst="rect">
+            <a:avLst/>
+          </a:prstGeom>
+          <a:noFill/>
+          <a:ln/>
+        </p:spPr>
+        <p:txBody>
+          <a:bodyPr wrap="square" lIns="0" tIns="0" rIns="0" bIns="0" rtlCol="0" anchor="ctr"/>
+          <a:lstStyle/>
+          <a:p>
+            <a:pPr indent="0" marL="0">
+              <a:buNone/>
+            </a:pPr>
+            <a:r>
+              <a:rPr lang="en-US" sz="3100" b="1" dirty="0">
                 <a:solidFill>
                   <a:srgbClr val="065A82"/>
                 </a:solidFill>
@@ -1988,7 +1988,7 @@
               </a:rPr>
               <a:t>Vos abonnés attendent. Personne n'en tire rien.</a:t>
             </a:r>
-            <a:endParaRPr lang="en-US" sz="3200" dirty="0"/>
+            <a:endParaRPr lang="en-US" sz="3100" dirty="0"/>
           </a:p>
         </p:txBody>
       </p:sp>
@@ -2001,7 +2001,7 @@
         <p:spPr>
           <a:xfrm>
             <a:off x="640080" y="1060704"/>
-            <a:ext cx="10972800" cy="411480"/>
+            <a:ext cx="10881360" cy="411480"/>
           </a:xfrm>
           <a:prstGeom prst="rect">
             <a:avLst/>
@@ -2593,23 +2593,23 @@
         <p:spPr>
           <a:xfrm>
             <a:off x="640080" y="384048"/>
-            <a:ext cx="10972800" cy="658368"/>
-          </a:xfrm>
-          <a:prstGeom prst="rect">
-            <a:avLst/>
-          </a:prstGeom>
-          <a:noFill/>
-          <a:ln/>
-        </p:spPr>
-        <p:txBody>
-          <a:bodyPr wrap="square" lIns="0" tIns="0" rIns="0" bIns="0" rtlCol="0" anchor="ctr"/>
-          <a:lstStyle/>
-          <a:p>
-            <a:pPr indent="0" marL="0">
-              <a:buNone/>
-            </a:pPr>
-            <a:r>
-              <a:rPr lang="en-US" sz="3200" b="1" dirty="0">
+            <a:ext cx="10058400" cy="658368"/>
+          </a:xfrm>
+          <a:prstGeom prst="rect">
+            <a:avLst/>
+          </a:prstGeom>
+          <a:noFill/>
+          <a:ln/>
+        </p:spPr>
+        <p:txBody>
+          <a:bodyPr wrap="square" lIns="0" tIns="0" rIns="0" bIns="0" rtlCol="0" anchor="ctr"/>
+          <a:lstStyle/>
+          <a:p>
+            <a:pPr indent="0" marL="0">
+              <a:buNone/>
+            </a:pPr>
+            <a:r>
+              <a:rPr lang="en-US" sz="3100" b="1" dirty="0">
                 <a:solidFill>
                   <a:srgbClr val="065A82"/>
                 </a:solidFill>
@@ -2619,7 +2619,7 @@
               </a:rPr>
               <a:t>Ce n'est pas une idée. C'est un produit déjà exploité.</a:t>
             </a:r>
-            <a:endParaRPr lang="en-US" sz="3200" dirty="0"/>
+            <a:endParaRPr lang="en-US" sz="3100" dirty="0"/>
           </a:p>
         </p:txBody>
       </p:sp>
@@ -2632,7 +2632,7 @@
         <p:spPr>
           <a:xfrm>
             <a:off x="640080" y="1060704"/>
-            <a:ext cx="10972800" cy="411480"/>
+            <a:ext cx="10881360" cy="411480"/>
           </a:xfrm>
           <a:prstGeom prst="rect">
             <a:avLst/>
@@ -3388,23 +3388,23 @@
         <p:spPr>
           <a:xfrm>
             <a:off x="640080" y="384048"/>
-            <a:ext cx="10972800" cy="658368"/>
-          </a:xfrm>
-          <a:prstGeom prst="rect">
-            <a:avLst/>
-          </a:prstGeom>
-          <a:noFill/>
-          <a:ln/>
-        </p:spPr>
-        <p:txBody>
-          <a:bodyPr wrap="square" lIns="0" tIns="0" rIns="0" bIns="0" rtlCol="0" anchor="ctr"/>
-          <a:lstStyle/>
-          <a:p>
-            <a:pPr indent="0" marL="0">
-              <a:buNone/>
-            </a:pPr>
-            <a:r>
-              <a:rPr lang="en-US" sz="3200" b="1" dirty="0">
+            <a:ext cx="10058400" cy="658368"/>
+          </a:xfrm>
+          <a:prstGeom prst="rect">
+            <a:avLst/>
+          </a:prstGeom>
+          <a:noFill/>
+          <a:ln/>
+        </p:spPr>
+        <p:txBody>
+          <a:bodyPr wrap="square" lIns="0" tIns="0" rIns="0" bIns="0" rtlCol="0" anchor="ctr"/>
+          <a:lstStyle/>
+          <a:p>
+            <a:pPr indent="0" marL="0">
+              <a:buNone/>
+            </a:pPr>
+            <a:r>
+              <a:rPr lang="en-US" sz="3100" b="1" dirty="0">
                 <a:solidFill>
                   <a:srgbClr val="065A82"/>
                 </a:solidFill>
@@ -3412,9 +3412,9 @@
                 <a:ea typeface="Cambria" pitchFamily="34" charset="-122"/>
                 <a:cs typeface="Cambria" pitchFamily="34" charset="-120"/>
               </a:rPr>
-              <a:t>Vous avez déjà la brique technique</a:t>
-            </a:r>
-            <a:endParaRPr lang="en-US" sz="3200" dirty="0"/>
+              <a:t>Ce que nous affirmons, et ce que nous ne savons pas</a:t>
+            </a:r>
+            <a:endParaRPr lang="en-US" sz="3100" dirty="0"/>
           </a:p>
         </p:txBody>
       </p:sp>
@@ -3427,7 +3427,7 @@
         <p:spPr>
           <a:xfrm>
             <a:off x="640080" y="1060704"/>
-            <a:ext cx="10972800" cy="411480"/>
+            <a:ext cx="10881360" cy="411480"/>
           </a:xfrm>
           <a:prstGeom prst="rect">
             <a:avLst/>
@@ -3451,7 +3451,7 @@
                 <a:ea typeface="Calibri" pitchFamily="34" charset="-122"/>
                 <a:cs typeface="Calibri" pitchFamily="34" charset="-120"/>
               </a:rPr>
-              <a:t>Nous ne vous demandons pas de construire une plateforme</a:t>
+              <a:t>Nous ne connaissons pas votre réseau, et nous ne ferons pas semblant</a:t>
             </a:r>
             <a:endParaRPr lang="en-US" sz="1500" dirty="0"/>
           </a:p>
@@ -3465,12 +3465,12 @@
         </p:nvSpPr>
         <p:spPr>
           <a:xfrm>
-            <a:off x="640080" y="1874520"/>
-            <a:ext cx="5349240" cy="2377440"/>
+            <a:off x="640080" y="1783080"/>
+            <a:ext cx="3383280" cy="3931920"/>
           </a:xfrm>
           <a:prstGeom prst="roundRect">
             <a:avLst>
-              <a:gd name="adj" fmla="val 2308"/>
+              <a:gd name="adj" fmla="val 1622"/>
             </a:avLst>
           </a:prstGeom>
           <a:solidFill>
@@ -3492,8 +3492,8 @@
         </p:nvSpPr>
         <p:spPr>
           <a:xfrm>
-            <a:off x="914400" y="2212848"/>
-            <a:ext cx="237744" cy="237744"/>
+            <a:off x="868680" y="2011680"/>
+            <a:ext cx="201168" cy="201168"/>
           </a:xfrm>
           <a:prstGeom prst="ellipse">
             <a:avLst/>
@@ -3512,24 +3512,24 @@
         </p:nvSpPr>
         <p:spPr>
           <a:xfrm>
-            <a:off x="1325880" y="2157984"/>
-            <a:ext cx="4389120" cy="347472"/>
-          </a:xfrm>
-          <a:prstGeom prst="rect">
-            <a:avLst/>
-          </a:prstGeom>
-          <a:noFill/>
-          <a:ln/>
-        </p:spPr>
-        <p:txBody>
-          <a:bodyPr wrap="square" lIns="0" tIns="0" rIns="0" bIns="0" rtlCol="0" anchor="ctr"/>
-          <a:lstStyle/>
-          <a:p>
-            <a:pPr indent="0" marL="0">
-              <a:buNone/>
-            </a:pPr>
-            <a:r>
-              <a:rPr lang="en-US" sz="1500" b="1" dirty="0">
+            <a:off x="1188720" y="1947672"/>
+            <a:ext cx="2743200" cy="310896"/>
+          </a:xfrm>
+          <a:prstGeom prst="rect">
+            <a:avLst/>
+          </a:prstGeom>
+          <a:noFill/>
+          <a:ln/>
+        </p:spPr>
+        <p:txBody>
+          <a:bodyPr wrap="square" lIns="0" tIns="0" rIns="0" bIns="0" rtlCol="0" anchor="ctr"/>
+          <a:lstStyle/>
+          <a:p>
+            <a:pPr indent="0" marL="0">
+              <a:buNone/>
+            </a:pPr>
+            <a:r>
+              <a:rPr lang="en-US" sz="1150" b="1" spc="50" kern="0" dirty="0">
                 <a:solidFill>
                   <a:srgbClr val="1F7A5C"/>
                 </a:solidFill>
@@ -3537,9 +3537,9 @@
                 <a:ea typeface="Calibri" pitchFamily="34" charset="-122"/>
                 <a:cs typeface="Calibri" pitchFamily="34" charset="-120"/>
               </a:rPr>
-              <a:t>Ce qui existe chez vous</a:t>
-            </a:r>
-            <a:endParaRPr lang="en-US" sz="1500" dirty="0"/>
+              <a:t>CE QUE NOUS AFFIRMONS</a:t>
+            </a:r>
+            <a:endParaRPr lang="en-US" sz="1150" dirty="0"/>
           </a:p>
         </p:txBody>
       </p:sp>
@@ -3551,120 +3551,34 @@
         </p:nvSpPr>
         <p:spPr>
           <a:xfrm>
-            <a:off x="914400" y="2633472"/>
-            <a:ext cx="4800600" cy="1481328"/>
-          </a:xfrm>
-          <a:prstGeom prst="rect">
-            <a:avLst/>
-          </a:prstGeom>
-          <a:noFill/>
-          <a:ln/>
-        </p:spPr>
-        <p:txBody>
-          <a:bodyPr wrap="square" lIns="0" tIns="0" rIns="0" bIns="0" rtlCol="0" anchor="ctr"/>
-          <a:lstStyle/>
-          <a:p>
-            <a:pPr indent="0" marL="0">
-              <a:lnSpc>
-                <a:spcPts val="1800"/>
-              </a:lnSpc>
-              <a:buNone/>
-            </a:pPr>
-            <a:r>
-              <a:rPr lang="en-US" sz="1300" b="1" dirty="0">
-                <a:solidFill>
-                  <a:srgbClr val="13212B"/>
-                </a:solidFill>
-                <a:latin typeface="Calibri" pitchFamily="34" charset="0"/>
-                <a:ea typeface="Calibri" pitchFamily="34" charset="-122"/>
-                <a:cs typeface="Calibri" pitchFamily="34" charset="-120"/>
-              </a:rPr>
-              <a:t>Tonalité d'attente personnalisée</a:t>
-            </a:r>
-            <a:endParaRPr lang="en-US" sz="1300" dirty="0"/>
-          </a:p>
-          <a:p>
-            <a:pPr indent="0" marL="0">
-              <a:lnSpc>
-                <a:spcPts val="1800"/>
-              </a:lnSpc>
-              <a:buNone/>
-            </a:pPr>
-            <a:r>
-              <a:rPr lang="en-US" sz="1300" dirty="0">
-                <a:solidFill>
-                  <a:srgbClr val="13212B"/>
-                </a:solidFill>
-                <a:latin typeface="Calibri" pitchFamily="34" charset="0"/>
-                <a:ea typeface="Calibri" pitchFamily="34" charset="-122"/>
-                <a:cs typeface="Calibri" pitchFamily="34" charset="-120"/>
-              </a:rPr>
-              <a:t>accessible sur </a:t>
-            </a:r>
-            <a:pPr indent="0" marL="0">
-              <a:lnSpc>
-                <a:spcPts val="1800"/>
-              </a:lnSpc>
-              <a:buNone/>
-            </a:pPr>
-            <a:r>
-              <a:rPr lang="en-US" sz="1300" b="1" dirty="0">
-                <a:solidFill>
-                  <a:srgbClr val="13212B"/>
-                </a:solidFill>
-                <a:latin typeface="Calibri" pitchFamily="34" charset="0"/>
-                <a:ea typeface="Calibri" pitchFamily="34" charset="-122"/>
-                <a:cs typeface="Calibri" pitchFamily="34" charset="-120"/>
-              </a:rPr>
-              <a:t>*144#</a:t>
-            </a:r>
-            <a:pPr indent="0" marL="0">
-              <a:lnSpc>
-                <a:spcPts val="1800"/>
-              </a:lnSpc>
-              <a:buNone/>
-            </a:pPr>
-            <a:r>
-              <a:rPr lang="en-US" sz="1300" dirty="0">
-                <a:solidFill>
-                  <a:srgbClr val="13212B"/>
-                </a:solidFill>
-                <a:latin typeface="Calibri" pitchFamily="34" charset="0"/>
-                <a:ea typeface="Calibri" pitchFamily="34" charset="-122"/>
-                <a:cs typeface="Calibri" pitchFamily="34" charset="-120"/>
-              </a:rPr>
-              <a:t>, avec abonnement mensuel et catalogue de contenus.</a:t>
-            </a:r>
-            <a:endParaRPr lang="en-US" sz="1300" dirty="0"/>
-          </a:p>
-          <a:p>
-            <a:pPr indent="0" marL="0">
-              <a:lnSpc>
-                <a:spcPts val="1800"/>
-              </a:lnSpc>
-              <a:buNone/>
-            </a:pPr>
-            <a:endParaRPr lang="en-US" sz="1300" dirty="0"/>
-          </a:p>
-          <a:p>
-            <a:pPr indent="0" marL="0">
-              <a:lnSpc>
-                <a:spcPts val="1800"/>
-              </a:lnSpc>
-              <a:buNone/>
-            </a:pPr>
-            <a:r>
-              <a:rPr lang="en-US" sz="1300" dirty="0">
-                <a:solidFill>
-                  <a:srgbClr val="13212B"/>
-                </a:solidFill>
-                <a:latin typeface="Calibri" pitchFamily="34" charset="0"/>
-                <a:ea typeface="Calibri" pitchFamily="34" charset="-122"/>
-                <a:cs typeface="Calibri" pitchFamily="34" charset="-120"/>
-              </a:rPr>
-              <a:t>La plateforme sait déjà remplacer la tonalité réseau par un contenu choisi, et l'interrompre au décrochage.</a:t>
-            </a:r>
-            <a:endParaRPr lang="en-US" sz="1300" dirty="0"/>
+            <a:off x="868680" y="2286000"/>
+            <a:ext cx="2926080" cy="256032"/>
+          </a:xfrm>
+          <a:prstGeom prst="rect">
+            <a:avLst/>
+          </a:prstGeom>
+          <a:noFill/>
+          <a:ln/>
+        </p:spPr>
+        <p:txBody>
+          <a:bodyPr wrap="square" lIns="0" tIns="0" rIns="0" bIns="0" rtlCol="0" anchor="ctr"/>
+          <a:lstStyle/>
+          <a:p>
+            <a:pPr indent="0" marL="0">
+              <a:buNone/>
+            </a:pPr>
+            <a:r>
+              <a:rPr lang="en-US" sz="1000" i="1" dirty="0">
+                <a:solidFill>
+                  <a:srgbClr val="5B7180"/>
+                </a:solidFill>
+                <a:latin typeface="Calibri" pitchFamily="34" charset="0"/>
+                <a:ea typeface="Calibri" pitchFamily="34" charset="-122"/>
+                <a:cs typeface="Calibri" pitchFamily="34" charset="-120"/>
+              </a:rPr>
+              <a:t>établi et sourcé</a:t>
+            </a:r>
+            <a:endParaRPr lang="en-US" sz="1000" dirty="0"/>
           </a:p>
         </p:txBody>
       </p:sp>
@@ -3676,12 +3590,260 @@
         </p:nvSpPr>
         <p:spPr>
           <a:xfrm>
-            <a:off x="6263640" y="1874520"/>
-            <a:ext cx="5257800" cy="2377440"/>
+            <a:off x="896112" y="2734056"/>
+            <a:ext cx="109728" cy="109728"/>
+          </a:xfrm>
+          <a:prstGeom prst="ellipse">
+            <a:avLst/>
+          </a:prstGeom>
+          <a:solidFill>
+            <a:srgbClr val="1F7A5C"/>
+          </a:solidFill>
+          <a:ln/>
+        </p:spPr>
+      </p:sp>
+      <p:sp>
+        <p:nvSpPr>
+          <p:cNvPr id="10" name="Text 8"/>
+          <p:cNvSpPr txBox="1"/>
+          <p:nvPr/>
+        </p:nvSpPr>
+        <p:spPr>
+          <a:xfrm>
+            <a:off x="1143000" y="2651760"/>
+            <a:ext cx="2697480" cy="713232"/>
+          </a:xfrm>
+          <a:prstGeom prst="rect">
+            <a:avLst/>
+          </a:prstGeom>
+          <a:noFill/>
+          <a:ln/>
+        </p:spPr>
+        <p:txBody>
+          <a:bodyPr wrap="square" lIns="0" tIns="0" rIns="0" bIns="0" rtlCol="0" anchor="ctr"/>
+          <a:lstStyle/>
+          <a:p>
+            <a:pPr indent="0" marL="0">
+              <a:lnSpc>
+                <a:spcPts val="1350"/>
+              </a:lnSpc>
+              <a:buNone/>
+            </a:pPr>
+            <a:r>
+              <a:rPr lang="en-US" sz="1050" dirty="0">
+                <a:solidFill>
+                  <a:srgbClr val="13212B"/>
+                </a:solidFill>
+                <a:latin typeface="Calibri" pitchFamily="34" charset="0"/>
+                <a:ea typeface="Calibri" pitchFamily="34" charset="-122"/>
+                <a:cs typeface="Calibri" pitchFamily="34" charset="-120"/>
+              </a:rPr>
+              <a:t>Une application mobile ne peut pas diffuser dans un appel — sur aucun système</a:t>
+            </a:r>
+            <a:endParaRPr lang="en-US" sz="1050" dirty="0"/>
+          </a:p>
+        </p:txBody>
+      </p:sp>
+      <p:sp>
+        <p:nvSpPr>
+          <p:cNvPr id="11" name="Shape 9"/>
+          <p:cNvSpPr/>
+          <p:nvPr/>
+        </p:nvSpPr>
+        <p:spPr>
+          <a:xfrm>
+            <a:off x="896112" y="3483864"/>
+            <a:ext cx="109728" cy="109728"/>
+          </a:xfrm>
+          <a:prstGeom prst="ellipse">
+            <a:avLst/>
+          </a:prstGeom>
+          <a:solidFill>
+            <a:srgbClr val="1F7A5C"/>
+          </a:solidFill>
+          <a:ln/>
+        </p:spPr>
+      </p:sp>
+      <p:sp>
+        <p:nvSpPr>
+          <p:cNvPr id="12" name="Text 10"/>
+          <p:cNvSpPr txBox="1"/>
+          <p:nvPr/>
+        </p:nvSpPr>
+        <p:spPr>
+          <a:xfrm>
+            <a:off x="1143000" y="3401568"/>
+            <a:ext cx="2697480" cy="713232"/>
+          </a:xfrm>
+          <a:prstGeom prst="rect">
+            <a:avLst/>
+          </a:prstGeom>
+          <a:noFill/>
+          <a:ln/>
+        </p:spPr>
+        <p:txBody>
+          <a:bodyPr wrap="square" lIns="0" tIns="0" rIns="0" bIns="0" rtlCol="0" anchor="ctr"/>
+          <a:lstStyle/>
+          <a:p>
+            <a:pPr indent="0" marL="0">
+              <a:lnSpc>
+                <a:spcPts val="1350"/>
+              </a:lnSpc>
+              <a:buNone/>
+            </a:pPr>
+            <a:r>
+              <a:rPr lang="en-US" sz="1050" dirty="0">
+                <a:solidFill>
+                  <a:srgbClr val="13212B"/>
+                </a:solidFill>
+                <a:latin typeface="Calibri" pitchFamily="34" charset="0"/>
+                <a:ea typeface="Calibri" pitchFamily="34" charset="-122"/>
+                <a:cs typeface="Calibri" pitchFamily="34" charset="-120"/>
+              </a:rPr>
+              <a:t>Ce que l'appelant entend avant le décrochage est produit par le réseau</a:t>
+            </a:r>
+            <a:endParaRPr lang="en-US" sz="1050" dirty="0"/>
+          </a:p>
+        </p:txBody>
+      </p:sp>
+      <p:sp>
+        <p:nvSpPr>
+          <p:cNvPr id="13" name="Shape 11"/>
+          <p:cNvSpPr/>
+          <p:nvPr/>
+        </p:nvSpPr>
+        <p:spPr>
+          <a:xfrm>
+            <a:off x="896112" y="4233672"/>
+            <a:ext cx="109728" cy="109728"/>
+          </a:xfrm>
+          <a:prstGeom prst="ellipse">
+            <a:avLst/>
+          </a:prstGeom>
+          <a:solidFill>
+            <a:srgbClr val="1F7A5C"/>
+          </a:solidFill>
+          <a:ln/>
+        </p:spPr>
+      </p:sp>
+      <p:sp>
+        <p:nvSpPr>
+          <p:cNvPr id="14" name="Text 12"/>
+          <p:cNvSpPr txBox="1"/>
+          <p:nvPr/>
+        </p:nvSpPr>
+        <p:spPr>
+          <a:xfrm>
+            <a:off x="1143000" y="4151376"/>
+            <a:ext cx="2697480" cy="713232"/>
+          </a:xfrm>
+          <a:prstGeom prst="rect">
+            <a:avLst/>
+          </a:prstGeom>
+          <a:noFill/>
+          <a:ln/>
+        </p:spPr>
+        <p:txBody>
+          <a:bodyPr wrap="square" lIns="0" tIns="0" rIns="0" bIns="0" rtlCol="0" anchor="ctr"/>
+          <a:lstStyle/>
+          <a:p>
+            <a:pPr indent="0" marL="0">
+              <a:lnSpc>
+                <a:spcPts val="1350"/>
+              </a:lnSpc>
+              <a:buNone/>
+            </a:pPr>
+            <a:r>
+              <a:rPr lang="en-US" sz="1050" dirty="0">
+                <a:solidFill>
+                  <a:srgbClr val="13212B"/>
+                </a:solidFill>
+                <a:latin typeface="Calibri" pitchFamily="34" charset="0"/>
+                <a:ea typeface="Calibri" pitchFamily="34" charset="-122"/>
+                <a:cs typeface="Calibri" pitchFamily="34" charset="-120"/>
+              </a:rPr>
+              <a:t>Donc l'insertion se fait dans le réseau, pas ailleurs</a:t>
+            </a:r>
+            <a:endParaRPr lang="en-US" sz="1050" dirty="0"/>
+          </a:p>
+        </p:txBody>
+      </p:sp>
+      <p:sp>
+        <p:nvSpPr>
+          <p:cNvPr id="15" name="Shape 13"/>
+          <p:cNvSpPr/>
+          <p:nvPr/>
+        </p:nvSpPr>
+        <p:spPr>
+          <a:xfrm>
+            <a:off x="896112" y="4983480"/>
+            <a:ext cx="109728" cy="109728"/>
+          </a:xfrm>
+          <a:prstGeom prst="ellipse">
+            <a:avLst/>
+          </a:prstGeom>
+          <a:solidFill>
+            <a:srgbClr val="1F7A5C"/>
+          </a:solidFill>
+          <a:ln/>
+        </p:spPr>
+      </p:sp>
+      <p:sp>
+        <p:nvSpPr>
+          <p:cNvPr id="16" name="Text 14"/>
+          <p:cNvSpPr txBox="1"/>
+          <p:nvPr/>
+        </p:nvSpPr>
+        <p:spPr>
+          <a:xfrm>
+            <a:off x="1143000" y="4901184"/>
+            <a:ext cx="2697480" cy="713232"/>
+          </a:xfrm>
+          <a:prstGeom prst="rect">
+            <a:avLst/>
+          </a:prstGeom>
+          <a:noFill/>
+          <a:ln/>
+        </p:spPr>
+        <p:txBody>
+          <a:bodyPr wrap="square" lIns="0" tIns="0" rIns="0" bIns="0" rtlCol="0" anchor="ctr"/>
+          <a:lstStyle/>
+          <a:p>
+            <a:pPr indent="0" marL="0">
+              <a:lnSpc>
+                <a:spcPts val="1350"/>
+              </a:lnSpc>
+              <a:buNone/>
+            </a:pPr>
+            <a:r>
+              <a:rPr lang="en-US" sz="1050" dirty="0">
+                <a:solidFill>
+                  <a:srgbClr val="13212B"/>
+                </a:solidFill>
+                <a:latin typeface="Calibri" pitchFamily="34" charset="0"/>
+                <a:ea typeface="Calibri" pitchFamily="34" charset="-122"/>
+                <a:cs typeface="Calibri" pitchFamily="34" charset="-120"/>
+              </a:rPr>
+              <a:t>Un opérateur pair l'a exploité commercialement avec succès</a:t>
+            </a:r>
+            <a:endParaRPr lang="en-US" sz="1050" dirty="0"/>
+          </a:p>
+        </p:txBody>
+      </p:sp>
+      <p:sp>
+        <p:nvSpPr>
+          <p:cNvPr id="17" name="Shape 15"/>
+          <p:cNvSpPr/>
+          <p:nvPr/>
+        </p:nvSpPr>
+        <p:spPr>
+          <a:xfrm>
+            <a:off x="4297680" y="1783080"/>
+            <a:ext cx="3383280" cy="3931920"/>
           </a:xfrm>
           <a:prstGeom prst="roundRect">
             <a:avLst>
-              <a:gd name="adj" fmla="val 2308"/>
+              <a:gd name="adj" fmla="val 1622"/>
             </a:avLst>
           </a:prstGeom>
           <a:solidFill>
@@ -3697,14 +3859,14 @@
       </p:sp>
       <p:sp>
         <p:nvSpPr>
-          <p:cNvPr id="10" name="Shape 8"/>
+          <p:cNvPr id="18" name="Shape 16"/>
           <p:cNvSpPr/>
           <p:nvPr/>
         </p:nvSpPr>
         <p:spPr>
           <a:xfrm>
-            <a:off x="6537960" y="2212848"/>
-            <a:ext cx="237744" cy="237744"/>
+            <a:off x="4526280" y="2011680"/>
+            <a:ext cx="201168" cy="201168"/>
           </a:xfrm>
           <a:prstGeom prst="ellipse">
             <a:avLst/>
@@ -3717,30 +3879,30 @@
       </p:sp>
       <p:sp>
         <p:nvSpPr>
-          <p:cNvPr id="11" name="Text 9"/>
-          <p:cNvSpPr txBox="1"/>
-          <p:nvPr/>
-        </p:nvSpPr>
-        <p:spPr>
-          <a:xfrm>
-            <a:off x="6949440" y="2157984"/>
-            <a:ext cx="4297680" cy="347472"/>
-          </a:xfrm>
-          <a:prstGeom prst="rect">
-            <a:avLst/>
-          </a:prstGeom>
-          <a:noFill/>
-          <a:ln/>
-        </p:spPr>
-        <p:txBody>
-          <a:bodyPr wrap="square" lIns="0" tIns="0" rIns="0" bIns="0" rtlCol="0" anchor="ctr"/>
-          <a:lstStyle/>
-          <a:p>
-            <a:pPr indent="0" marL="0">
-              <a:buNone/>
-            </a:pPr>
-            <a:r>
-              <a:rPr lang="en-US" sz="1500" b="1" dirty="0">
+          <p:cNvPr id="19" name="Text 17"/>
+          <p:cNvSpPr txBox="1"/>
+          <p:nvPr/>
+        </p:nvSpPr>
+        <p:spPr>
+          <a:xfrm>
+            <a:off x="4846320" y="1947672"/>
+            <a:ext cx="2743200" cy="310896"/>
+          </a:xfrm>
+          <a:prstGeom prst="rect">
+            <a:avLst/>
+          </a:prstGeom>
+          <a:noFill/>
+          <a:ln/>
+        </p:spPr>
+        <p:txBody>
+          <a:bodyPr wrap="square" lIns="0" tIns="0" rIns="0" bIns="0" rtlCol="0" anchor="ctr"/>
+          <a:lstStyle/>
+          <a:p>
+            <a:pPr indent="0" marL="0">
+              <a:buNone/>
+            </a:pPr>
+            <a:r>
+              <a:rPr lang="en-US" sz="1150" b="1" spc="50" kern="0" dirty="0">
                 <a:solidFill>
                   <a:srgbClr val="9A6B15"/>
                 </a:solidFill>
@@ -3748,22 +3910,81 @@
                 <a:ea typeface="Calibri" pitchFamily="34" charset="-122"/>
                 <a:cs typeface="Calibri" pitchFamily="34" charset="-120"/>
               </a:rPr>
-              <a:t>Ce que nous venons vérifier</a:t>
-            </a:r>
-            <a:endParaRPr lang="en-US" sz="1500" dirty="0"/>
-          </a:p>
-        </p:txBody>
-      </p:sp>
-      <p:sp>
-        <p:nvSpPr>
-          <p:cNvPr id="12" name="Text 10"/>
-          <p:cNvSpPr txBox="1"/>
-          <p:nvPr/>
-        </p:nvSpPr>
-        <p:spPr>
-          <a:xfrm>
-            <a:off x="6537960" y="2633472"/>
-            <a:ext cx="4709160" cy="1481328"/>
+              <a:t>CE QUE NOUS SUPPOSONS</a:t>
+            </a:r>
+            <a:endParaRPr lang="en-US" sz="1150" dirty="0"/>
+          </a:p>
+        </p:txBody>
+      </p:sp>
+      <p:sp>
+        <p:nvSpPr>
+          <p:cNvPr id="20" name="Text 18"/>
+          <p:cNvSpPr txBox="1"/>
+          <p:nvPr/>
+        </p:nvSpPr>
+        <p:spPr>
+          <a:xfrm>
+            <a:off x="4526280" y="2286000"/>
+            <a:ext cx="2926080" cy="256032"/>
+          </a:xfrm>
+          <a:prstGeom prst="rect">
+            <a:avLst/>
+          </a:prstGeom>
+          <a:noFill/>
+          <a:ln/>
+        </p:spPr>
+        <p:txBody>
+          <a:bodyPr wrap="square" lIns="0" tIns="0" rIns="0" bIns="0" rtlCol="0" anchor="ctr"/>
+          <a:lstStyle/>
+          <a:p>
+            <a:pPr indent="0" marL="0">
+              <a:buNone/>
+            </a:pPr>
+            <a:r>
+              <a:rPr lang="en-US" sz="1000" i="1" dirty="0">
+                <a:solidFill>
+                  <a:srgbClr val="5B7180"/>
+                </a:solidFill>
+                <a:latin typeface="Calibri" pitchFamily="34" charset="0"/>
+                <a:ea typeface="Calibri" pitchFamily="34" charset="-122"/>
+                <a:cs typeface="Calibri" pitchFamily="34" charset="-120"/>
+              </a:rPr>
+              <a:t>à confirmer par vous</a:t>
+            </a:r>
+            <a:endParaRPr lang="en-US" sz="1000" dirty="0"/>
+          </a:p>
+        </p:txBody>
+      </p:sp>
+      <p:sp>
+        <p:nvSpPr>
+          <p:cNvPr id="21" name="Shape 19"/>
+          <p:cNvSpPr/>
+          <p:nvPr/>
+        </p:nvSpPr>
+        <p:spPr>
+          <a:xfrm>
+            <a:off x="4553712" y="2734056"/>
+            <a:ext cx="109728" cy="109728"/>
+          </a:xfrm>
+          <a:prstGeom prst="ellipse">
+            <a:avLst/>
+          </a:prstGeom>
+          <a:solidFill>
+            <a:srgbClr val="9A6B15"/>
+          </a:solidFill>
+          <a:ln/>
+        </p:spPr>
+      </p:sp>
+      <p:sp>
+        <p:nvSpPr>
+          <p:cNvPr id="22" name="Text 20"/>
+          <p:cNvSpPr txBox="1"/>
+          <p:nvPr/>
+        </p:nvSpPr>
+        <p:spPr>
+          <a:xfrm>
+            <a:off x="4800600" y="2651760"/>
+            <a:ext cx="2697480" cy="713232"/>
           </a:xfrm>
           <a:prstGeom prst="rect">
             <a:avLst/>
@@ -3777,12 +3998,12 @@
           <a:p>
             <a:pPr indent="0" marL="0">
               <a:lnSpc>
-                <a:spcPts val="1800"/>
+                <a:spcPts val="1350"/>
               </a:lnSpc>
               <a:buNone/>
             </a:pPr>
             <a:r>
-              <a:rPr lang="en-US" sz="1300" b="1" dirty="0">
+              <a:rPr lang="en-US" sz="1050" dirty="0">
                 <a:solidFill>
                   <a:srgbClr val="13212B"/>
                 </a:solidFill>
@@ -3790,16 +4011,61 @@
                 <a:ea typeface="Calibri" pitchFamily="34" charset="-122"/>
                 <a:cs typeface="Calibri" pitchFamily="34" charset="-120"/>
               </a:rPr>
-              <a:t>Cette plateforme peut-elle sélectionner le contenu selon des règles publicitaires</a:t>
-            </a:r>
+              <a:t>Que vous exploitez une plateforme de tonalité d'attente</a:t>
+            </a:r>
+            <a:endParaRPr lang="en-US" sz="1050" dirty="0"/>
+          </a:p>
+        </p:txBody>
+      </p:sp>
+      <p:sp>
+        <p:nvSpPr>
+          <p:cNvPr id="23" name="Shape 21"/>
+          <p:cNvSpPr/>
+          <p:nvPr/>
+        </p:nvSpPr>
+        <p:spPr>
+          <a:xfrm>
+            <a:off x="4553712" y="3483864"/>
+            <a:ext cx="109728" cy="109728"/>
+          </a:xfrm>
+          <a:prstGeom prst="ellipse">
+            <a:avLst/>
+          </a:prstGeom>
+          <a:solidFill>
+            <a:srgbClr val="9A6B15"/>
+          </a:solidFill>
+          <a:ln/>
+        </p:spPr>
+      </p:sp>
+      <p:sp>
+        <p:nvSpPr>
+          <p:cNvPr id="24" name="Text 22"/>
+          <p:cNvSpPr txBox="1"/>
+          <p:nvPr/>
+        </p:nvSpPr>
+        <p:spPr>
+          <a:xfrm>
+            <a:off x="4800600" y="3401568"/>
+            <a:ext cx="2697480" cy="713232"/>
+          </a:xfrm>
+          <a:prstGeom prst="rect">
+            <a:avLst/>
+          </a:prstGeom>
+          <a:noFill/>
+          <a:ln/>
+        </p:spPr>
+        <p:txBody>
+          <a:bodyPr wrap="square" lIns="0" tIns="0" rIns="0" bIns="0" rtlCol="0" anchor="ctr"/>
+          <a:lstStyle/>
+          <a:p>
             <a:pPr indent="0" marL="0">
               <a:lnSpc>
-                <a:spcPts val="1800"/>
+                <a:spcPts val="1350"/>
               </a:lnSpc>
               <a:buNone/>
             </a:pPr>
             <a:r>
-              <a:rPr lang="en-US" sz="1300" dirty="0">
+              <a:rPr lang="en-US" sz="1050" dirty="0">
                 <a:solidFill>
                   <a:srgbClr val="13212B"/>
                 </a:solidFill>
@@ -3807,28 +4073,123 @@
                 <a:ea typeface="Calibri" pitchFamily="34" charset="-122"/>
                 <a:cs typeface="Calibri" pitchFamily="34" charset="-120"/>
               </a:rPr>
-              <a:t> — zone géographique, dates, plages horaires, rotation — plutôt que selon le choix personnel de l'abonné ?</a:t>
-            </a:r>
-            <a:endParaRPr lang="en-US" sz="1300" dirty="0"/>
-          </a:p>
+              <a:t>Qu'elle sait varier le contenu selon l'appelant</a:t>
+            </a:r>
+            <a:endParaRPr lang="en-US" sz="1050" dirty="0"/>
+          </a:p>
+        </p:txBody>
+      </p:sp>
+      <p:sp>
+        <p:nvSpPr>
+          <p:cNvPr id="25" name="Shape 23"/>
+          <p:cNvSpPr/>
+          <p:nvPr/>
+        </p:nvSpPr>
+        <p:spPr>
+          <a:xfrm>
+            <a:off x="4553712" y="4233672"/>
+            <a:ext cx="109728" cy="109728"/>
+          </a:xfrm>
+          <a:prstGeom prst="ellipse">
+            <a:avLst/>
+          </a:prstGeom>
+          <a:solidFill>
+            <a:srgbClr val="9A6B15"/>
+          </a:solidFill>
+          <a:ln/>
+        </p:spPr>
+      </p:sp>
+      <p:sp>
+        <p:nvSpPr>
+          <p:cNvPr id="26" name="Text 24"/>
+          <p:cNvSpPr txBox="1"/>
+          <p:nvPr/>
+        </p:nvSpPr>
+        <p:spPr>
+          <a:xfrm>
+            <a:off x="4800600" y="4151376"/>
+            <a:ext cx="2697480" cy="713232"/>
+          </a:xfrm>
+          <a:prstGeom prst="rect">
+            <a:avLst/>
+          </a:prstGeom>
+          <a:noFill/>
+          <a:ln/>
+        </p:spPr>
+        <p:txBody>
+          <a:bodyPr wrap="square" lIns="0" tIns="0" rIns="0" bIns="0" rtlCol="0" anchor="ctr"/>
+          <a:lstStyle/>
           <a:p>
             <a:pPr indent="0" marL="0">
               <a:lnSpc>
-                <a:spcPts val="1800"/>
+                <a:spcPts val="1350"/>
               </a:lnSpc>
               <a:buNone/>
             </a:pPr>
-            <a:endParaRPr lang="en-US" sz="1300" dirty="0"/>
-          </a:p>
+            <a:r>
+              <a:rPr lang="en-US" sz="1050" dirty="0">
+                <a:solidFill>
+                  <a:srgbClr val="13212B"/>
+                </a:solidFill>
+                <a:latin typeface="Calibri" pitchFamily="34" charset="0"/>
+                <a:ea typeface="Calibri" pitchFamily="34" charset="-122"/>
+                <a:cs typeface="Calibri" pitchFamily="34" charset="-120"/>
+              </a:rPr>
+              <a:t>Qu'elle enregistre la durée pendant laquelle le contenu a été joué</a:t>
+            </a:r>
+            <a:endParaRPr lang="en-US" sz="1050" dirty="0"/>
+          </a:p>
+        </p:txBody>
+      </p:sp>
+      <p:sp>
+        <p:nvSpPr>
+          <p:cNvPr id="27" name="Shape 25"/>
+          <p:cNvSpPr/>
+          <p:nvPr/>
+        </p:nvSpPr>
+        <p:spPr>
+          <a:xfrm>
+            <a:off x="4553712" y="4983480"/>
+            <a:ext cx="109728" cy="109728"/>
+          </a:xfrm>
+          <a:prstGeom prst="ellipse">
+            <a:avLst/>
+          </a:prstGeom>
+          <a:solidFill>
+            <a:srgbClr val="9A6B15"/>
+          </a:solidFill>
+          <a:ln/>
+        </p:spPr>
+      </p:sp>
+      <p:sp>
+        <p:nvSpPr>
+          <p:cNvPr id="28" name="Text 26"/>
+          <p:cNvSpPr txBox="1"/>
+          <p:nvPr/>
+        </p:nvSpPr>
+        <p:spPr>
+          <a:xfrm>
+            <a:off x="4800600" y="4901184"/>
+            <a:ext cx="2697480" cy="713232"/>
+          </a:xfrm>
+          <a:prstGeom prst="rect">
+            <a:avLst/>
+          </a:prstGeom>
+          <a:noFill/>
+          <a:ln/>
+        </p:spPr>
+        <p:txBody>
+          <a:bodyPr wrap="square" lIns="0" tIns="0" rIns="0" bIns="0" rtlCol="0" anchor="ctr"/>
+          <a:lstStyle/>
           <a:p>
             <a:pPr indent="0" marL="0">
               <a:lnSpc>
-                <a:spcPts val="1800"/>
+                <a:spcPts val="1350"/>
               </a:lnSpc>
               <a:buNone/>
             </a:pPr>
             <a:r>
-              <a:rPr lang="en-US" sz="1300" b="1" dirty="0">
+              <a:rPr lang="en-US" sz="1050" dirty="0">
                 <a:solidFill>
                   <a:srgbClr val="13212B"/>
                 </a:solidFill>
@@ -3836,60 +4197,411 @@
                 <a:ea typeface="Calibri" pitchFamily="34" charset="-122"/>
                 <a:cs typeface="Calibri" pitchFamily="34" charset="-120"/>
               </a:rPr>
-              <a:t>Si oui, l'écart à franchir est faible.</a:t>
-            </a:r>
-            <a:endParaRPr lang="en-US" sz="1300" dirty="0"/>
-          </a:p>
-        </p:txBody>
-      </p:sp>
-      <p:sp>
-        <p:nvSpPr>
-          <p:cNvPr id="13" name="Shape 11"/>
+              <a:t>Que vous refuserez une dépendance externe dans le chemin d'appel</a:t>
+            </a:r>
+            <a:endParaRPr lang="en-US" sz="1050" dirty="0"/>
+          </a:p>
+        </p:txBody>
+      </p:sp>
+      <p:sp>
+        <p:nvSpPr>
+          <p:cNvPr id="29" name="Shape 27"/>
           <p:cNvSpPr/>
           <p:nvPr/>
         </p:nvSpPr>
         <p:spPr>
           <a:xfrm>
-            <a:off x="640080" y="4526280"/>
-            <a:ext cx="10881360" cy="1371600"/>
+            <a:off x="7955280" y="1783080"/>
+            <a:ext cx="3383280" cy="3931920"/>
           </a:xfrm>
           <a:prstGeom prst="roundRect">
             <a:avLst>
-              <a:gd name="adj" fmla="val 4000"/>
+              <a:gd name="adj" fmla="val 1622"/>
             </a:avLst>
           </a:prstGeom>
           <a:solidFill>
-            <a:srgbClr val="F1F6F9"/>
+            <a:srgbClr val="EEF1F3"/>
           </a:solidFill>
-          <a:ln/>
-        </p:spPr>
-      </p:sp>
-      <p:sp>
-        <p:nvSpPr>
-          <p:cNvPr id="14" name="Text 12"/>
-          <p:cNvSpPr txBox="1"/>
-          <p:nvPr/>
-        </p:nvSpPr>
-        <p:spPr>
-          <a:xfrm>
-            <a:off x="914400" y="4681728"/>
-            <a:ext cx="4572000" cy="292608"/>
-          </a:xfrm>
-          <a:prstGeom prst="rect">
-            <a:avLst/>
-          </a:prstGeom>
-          <a:noFill/>
-          <a:ln/>
-        </p:spPr>
-        <p:txBody>
-          <a:bodyPr wrap="square" lIns="0" tIns="0" rIns="0" bIns="0" rtlCol="0" anchor="ctr"/>
-          <a:lstStyle/>
-          <a:p>
-            <a:pPr indent="0" marL="0">
-              <a:buNone/>
-            </a:pPr>
-            <a:r>
-              <a:rPr lang="en-US" sz="1400" b="1" dirty="0">
+          <a:ln w="12700">
+            <a:solidFill>
+              <a:srgbClr val="6B7C89"/>
+            </a:solidFill>
+            <a:prstDash val="solid"/>
+          </a:ln>
+        </p:spPr>
+      </p:sp>
+      <p:sp>
+        <p:nvSpPr>
+          <p:cNvPr id="30" name="Shape 28"/>
+          <p:cNvSpPr/>
+          <p:nvPr/>
+        </p:nvSpPr>
+        <p:spPr>
+          <a:xfrm>
+            <a:off x="8183880" y="2011680"/>
+            <a:ext cx="201168" cy="201168"/>
+          </a:xfrm>
+          <a:prstGeom prst="ellipse">
+            <a:avLst/>
+          </a:prstGeom>
+          <a:solidFill>
+            <a:srgbClr val="6B7C89"/>
+          </a:solidFill>
+          <a:ln/>
+        </p:spPr>
+      </p:sp>
+      <p:sp>
+        <p:nvSpPr>
+          <p:cNvPr id="31" name="Text 29"/>
+          <p:cNvSpPr txBox="1"/>
+          <p:nvPr/>
+        </p:nvSpPr>
+        <p:spPr>
+          <a:xfrm>
+            <a:off x="8503920" y="1947672"/>
+            <a:ext cx="2743200" cy="310896"/>
+          </a:xfrm>
+          <a:prstGeom prst="rect">
+            <a:avLst/>
+          </a:prstGeom>
+          <a:noFill/>
+          <a:ln/>
+        </p:spPr>
+        <p:txBody>
+          <a:bodyPr wrap="square" lIns="0" tIns="0" rIns="0" bIns="0" rtlCol="0" anchor="ctr"/>
+          <a:lstStyle/>
+          <a:p>
+            <a:pPr indent="0" marL="0">
+              <a:buNone/>
+            </a:pPr>
+            <a:r>
+              <a:rPr lang="en-US" sz="1150" b="1" spc="50" kern="0" dirty="0">
+                <a:solidFill>
+                  <a:srgbClr val="6B7C89"/>
+                </a:solidFill>
+                <a:latin typeface="Calibri" pitchFamily="34" charset="0"/>
+                <a:ea typeface="Calibri" pitchFamily="34" charset="-122"/>
+                <a:cs typeface="Calibri" pitchFamily="34" charset="-120"/>
+              </a:rPr>
+              <a:t>CE QUE NOUS IGNORONS</a:t>
+            </a:r>
+            <a:endParaRPr lang="en-US" sz="1150" dirty="0"/>
+          </a:p>
+        </p:txBody>
+      </p:sp>
+      <p:sp>
+        <p:nvSpPr>
+          <p:cNvPr id="32" name="Text 30"/>
+          <p:cNvSpPr txBox="1"/>
+          <p:nvPr/>
+        </p:nvSpPr>
+        <p:spPr>
+          <a:xfrm>
+            <a:off x="8183880" y="2286000"/>
+            <a:ext cx="2926080" cy="256032"/>
+          </a:xfrm>
+          <a:prstGeom prst="rect">
+            <a:avLst/>
+          </a:prstGeom>
+          <a:noFill/>
+          <a:ln/>
+        </p:spPr>
+        <p:txBody>
+          <a:bodyPr wrap="square" lIns="0" tIns="0" rIns="0" bIns="0" rtlCol="0" anchor="ctr"/>
+          <a:lstStyle/>
+          <a:p>
+            <a:pPr indent="0" marL="0">
+              <a:buNone/>
+            </a:pPr>
+            <a:r>
+              <a:rPr lang="en-US" sz="1000" i="1" dirty="0">
+                <a:solidFill>
+                  <a:srgbClr val="5B7180"/>
+                </a:solidFill>
+                <a:latin typeface="Calibri" pitchFamily="34" charset="0"/>
+                <a:ea typeface="Calibri" pitchFamily="34" charset="-122"/>
+                <a:cs typeface="Calibri" pitchFamily="34" charset="-120"/>
+              </a:rPr>
+              <a:t>et c'est pourquoi nous sommes là</a:t>
+            </a:r>
+            <a:endParaRPr lang="en-US" sz="1000" dirty="0"/>
+          </a:p>
+        </p:txBody>
+      </p:sp>
+      <p:sp>
+        <p:nvSpPr>
+          <p:cNvPr id="33" name="Shape 31"/>
+          <p:cNvSpPr/>
+          <p:nvPr/>
+        </p:nvSpPr>
+        <p:spPr>
+          <a:xfrm>
+            <a:off x="8211312" y="2734056"/>
+            <a:ext cx="109728" cy="109728"/>
+          </a:xfrm>
+          <a:prstGeom prst="ellipse">
+            <a:avLst/>
+          </a:prstGeom>
+          <a:solidFill>
+            <a:srgbClr val="6B7C89"/>
+          </a:solidFill>
+          <a:ln/>
+        </p:spPr>
+      </p:sp>
+      <p:sp>
+        <p:nvSpPr>
+          <p:cNvPr id="34" name="Text 32"/>
+          <p:cNvSpPr txBox="1"/>
+          <p:nvPr/>
+        </p:nvSpPr>
+        <p:spPr>
+          <a:xfrm>
+            <a:off x="8458200" y="2651760"/>
+            <a:ext cx="2697480" cy="713232"/>
+          </a:xfrm>
+          <a:prstGeom prst="rect">
+            <a:avLst/>
+          </a:prstGeom>
+          <a:noFill/>
+          <a:ln/>
+        </p:spPr>
+        <p:txBody>
+          <a:bodyPr wrap="square" lIns="0" tIns="0" rIns="0" bIns="0" rtlCol="0" anchor="ctr"/>
+          <a:lstStyle/>
+          <a:p>
+            <a:pPr indent="0" marL="0">
+              <a:lnSpc>
+                <a:spcPts val="1350"/>
+              </a:lnSpc>
+              <a:buNone/>
+            </a:pPr>
+            <a:r>
+              <a:rPr lang="en-US" sz="1050" dirty="0">
+                <a:solidFill>
+                  <a:srgbClr val="13212B"/>
+                </a:solidFill>
+                <a:latin typeface="Calibri" pitchFamily="34" charset="0"/>
+                <a:ea typeface="Calibri" pitchFamily="34" charset="-122"/>
+                <a:cs typeface="Calibri" pitchFamily="34" charset="-120"/>
+              </a:rPr>
+              <a:t>Sur quels équipements votre service repose</a:t>
+            </a:r>
+            <a:endParaRPr lang="en-US" sz="1050" dirty="0"/>
+          </a:p>
+        </p:txBody>
+      </p:sp>
+      <p:sp>
+        <p:nvSpPr>
+          <p:cNvPr id="35" name="Shape 33"/>
+          <p:cNvSpPr/>
+          <p:nvPr/>
+        </p:nvSpPr>
+        <p:spPr>
+          <a:xfrm>
+            <a:off x="8211312" y="3483864"/>
+            <a:ext cx="109728" cy="109728"/>
+          </a:xfrm>
+          <a:prstGeom prst="ellipse">
+            <a:avLst/>
+          </a:prstGeom>
+          <a:solidFill>
+            <a:srgbClr val="6B7C89"/>
+          </a:solidFill>
+          <a:ln/>
+        </p:spPr>
+      </p:sp>
+      <p:sp>
+        <p:nvSpPr>
+          <p:cNvPr id="36" name="Text 34"/>
+          <p:cNvSpPr txBox="1"/>
+          <p:nvPr/>
+        </p:nvSpPr>
+        <p:spPr>
+          <a:xfrm>
+            <a:off x="8458200" y="3401568"/>
+            <a:ext cx="2697480" cy="713232"/>
+          </a:xfrm>
+          <a:prstGeom prst="rect">
+            <a:avLst/>
+          </a:prstGeom>
+          <a:noFill/>
+          <a:ln/>
+        </p:spPr>
+        <p:txBody>
+          <a:bodyPr wrap="square" lIns="0" tIns="0" rIns="0" bIns="0" rtlCol="0" anchor="ctr"/>
+          <a:lstStyle/>
+          <a:p>
+            <a:pPr indent="0" marL="0">
+              <a:lnSpc>
+                <a:spcPts val="1350"/>
+              </a:lnSpc>
+              <a:buNone/>
+            </a:pPr>
+            <a:r>
+              <a:rPr lang="en-US" sz="1050" dirty="0">
+                <a:solidFill>
+                  <a:srgbClr val="13212B"/>
+                </a:solidFill>
+                <a:latin typeface="Calibri" pitchFamily="34" charset="0"/>
+                <a:ea typeface="Calibri" pitchFamily="34" charset="-122"/>
+                <a:cs typeface="Calibri" pitchFamily="34" charset="-120"/>
+              </a:rPr>
+              <a:t>Qui l'exploite — vous, ou un éditeur</a:t>
+            </a:r>
+            <a:endParaRPr lang="en-US" sz="1050" dirty="0"/>
+          </a:p>
+        </p:txBody>
+      </p:sp>
+      <p:sp>
+        <p:nvSpPr>
+          <p:cNvPr id="37" name="Shape 35"/>
+          <p:cNvSpPr/>
+          <p:nvPr/>
+        </p:nvSpPr>
+        <p:spPr>
+          <a:xfrm>
+            <a:off x="8211312" y="4233672"/>
+            <a:ext cx="109728" cy="109728"/>
+          </a:xfrm>
+          <a:prstGeom prst="ellipse">
+            <a:avLst/>
+          </a:prstGeom>
+          <a:solidFill>
+            <a:srgbClr val="6B7C89"/>
+          </a:solidFill>
+          <a:ln/>
+        </p:spPr>
+      </p:sp>
+      <p:sp>
+        <p:nvSpPr>
+          <p:cNvPr id="38" name="Text 36"/>
+          <p:cNvSpPr txBox="1"/>
+          <p:nvPr/>
+        </p:nvSpPr>
+        <p:spPr>
+          <a:xfrm>
+            <a:off x="8458200" y="4151376"/>
+            <a:ext cx="2697480" cy="713232"/>
+          </a:xfrm>
+          <a:prstGeom prst="rect">
+            <a:avLst/>
+          </a:prstGeom>
+          <a:noFill/>
+          <a:ln/>
+        </p:spPr>
+        <p:txBody>
+          <a:bodyPr wrap="square" lIns="0" tIns="0" rIns="0" bIns="0" rtlCol="0" anchor="ctr"/>
+          <a:lstStyle/>
+          <a:p>
+            <a:pPr indent="0" marL="0">
+              <a:lnSpc>
+                <a:spcPts val="1350"/>
+              </a:lnSpc>
+              <a:buNone/>
+            </a:pPr>
+            <a:r>
+              <a:rPr lang="en-US" sz="1050" dirty="0">
+                <a:solidFill>
+                  <a:srgbClr val="13212B"/>
+                </a:solidFill>
+                <a:latin typeface="Calibri" pitchFamily="34" charset="0"/>
+                <a:ea typeface="Calibri" pitchFamily="34" charset="-122"/>
+                <a:cs typeface="Calibri" pitchFamily="34" charset="-120"/>
+              </a:rPr>
+              <a:t>Quelles données de diffusion vous pouvez produire</a:t>
+            </a:r>
+            <a:endParaRPr lang="en-US" sz="1050" dirty="0"/>
+          </a:p>
+        </p:txBody>
+      </p:sp>
+      <p:sp>
+        <p:nvSpPr>
+          <p:cNvPr id="39" name="Shape 37"/>
+          <p:cNvSpPr/>
+          <p:nvPr/>
+        </p:nvSpPr>
+        <p:spPr>
+          <a:xfrm>
+            <a:off x="8211312" y="4983480"/>
+            <a:ext cx="109728" cy="109728"/>
+          </a:xfrm>
+          <a:prstGeom prst="ellipse">
+            <a:avLst/>
+          </a:prstGeom>
+          <a:solidFill>
+            <a:srgbClr val="6B7C89"/>
+          </a:solidFill>
+          <a:ln/>
+        </p:spPr>
+      </p:sp>
+      <p:sp>
+        <p:nvSpPr>
+          <p:cNvPr id="40" name="Text 38"/>
+          <p:cNvSpPr txBox="1"/>
+          <p:nvPr/>
+        </p:nvSpPr>
+        <p:spPr>
+          <a:xfrm>
+            <a:off x="8458200" y="4901184"/>
+            <a:ext cx="2697480" cy="713232"/>
+          </a:xfrm>
+          <a:prstGeom prst="rect">
+            <a:avLst/>
+          </a:prstGeom>
+          <a:noFill/>
+          <a:ln/>
+        </p:spPr>
+        <p:txBody>
+          <a:bodyPr wrap="square" lIns="0" tIns="0" rIns="0" bIns="0" rtlCol="0" anchor="ctr"/>
+          <a:lstStyle/>
+          <a:p>
+            <a:pPr indent="0" marL="0">
+              <a:lnSpc>
+                <a:spcPts val="1350"/>
+              </a:lnSpc>
+              <a:buNone/>
+            </a:pPr>
+            <a:r>
+              <a:rPr lang="en-US" sz="1050" dirty="0">
+                <a:solidFill>
+                  <a:srgbClr val="13212B"/>
+                </a:solidFill>
+                <a:latin typeface="Calibri" pitchFamily="34" charset="0"/>
+                <a:ea typeface="Calibri" pitchFamily="34" charset="-122"/>
+                <a:cs typeface="Calibri" pitchFamily="34" charset="-120"/>
+              </a:rPr>
+              <a:t>Quelles contraintes réglementaires vous voyez</a:t>
+            </a:r>
+            <a:endParaRPr lang="en-US" sz="1050" dirty="0"/>
+          </a:p>
+        </p:txBody>
+      </p:sp>
+      <p:sp>
+        <p:nvSpPr>
+          <p:cNvPr id="41" name="Text 39"/>
+          <p:cNvSpPr txBox="1"/>
+          <p:nvPr/>
+        </p:nvSpPr>
+        <p:spPr>
+          <a:xfrm>
+            <a:off x="640080" y="5897880"/>
+            <a:ext cx="10881360" cy="365760"/>
+          </a:xfrm>
+          <a:prstGeom prst="rect">
+            <a:avLst/>
+          </a:prstGeom>
+          <a:noFill/>
+          <a:ln/>
+        </p:spPr>
+        <p:txBody>
+          <a:bodyPr wrap="square" lIns="0" tIns="0" rIns="0" bIns="0" rtlCol="0" anchor="ctr"/>
+          <a:lstStyle/>
+          <a:p>
+            <a:pPr indent="0" marL="0">
+              <a:buNone/>
+            </a:pPr>
+            <a:r>
+              <a:rPr lang="en-US" sz="1250" b="1" dirty="0">
                 <a:solidFill>
                   <a:srgbClr val="065A82"/>
                 </a:solidFill>
@@ -3897,51 +4609,9 @@
                 <a:ea typeface="Calibri" pitchFamily="34" charset="-122"/>
                 <a:cs typeface="Calibri" pitchFamily="34" charset="-120"/>
               </a:rPr>
-              <a:t>Notre position</a:t>
-            </a:r>
-            <a:endParaRPr lang="en-US" sz="1400" dirty="0"/>
-          </a:p>
-        </p:txBody>
-      </p:sp>
-      <p:sp>
-        <p:nvSpPr>
-          <p:cNvPr id="15" name="Text 13"/>
-          <p:cNvSpPr txBox="1"/>
-          <p:nvPr/>
-        </p:nvSpPr>
-        <p:spPr>
-          <a:xfrm>
-            <a:off x="914400" y="5010912"/>
-            <a:ext cx="10332720" cy="777240"/>
-          </a:xfrm>
-          <a:prstGeom prst="rect">
-            <a:avLst/>
-          </a:prstGeom>
-          <a:noFill/>
-          <a:ln/>
-        </p:spPr>
-        <p:txBody>
-          <a:bodyPr wrap="square" lIns="0" tIns="0" rIns="0" bIns="0" rtlCol="0" anchor="ctr"/>
-          <a:lstStyle/>
-          <a:p>
-            <a:pPr indent="0" marL="0">
-              <a:lnSpc>
-                <a:spcPts val="1800"/>
-              </a:lnSpc>
-              <a:buNone/>
-            </a:pPr>
-            <a:r>
-              <a:rPr lang="en-US" sz="1350" dirty="0">
-                <a:solidFill>
-                  <a:srgbClr val="13212B"/>
-                </a:solidFill>
-                <a:latin typeface="Calibri" pitchFamily="34" charset="0"/>
-                <a:ea typeface="Calibri" pitchFamily="34" charset="-122"/>
-                <a:cs typeface="Calibri" pitchFamily="34" charset="-120"/>
-              </a:rPr>
-              <a:t>Sur les neuf capacités nécessaires à ce service — variation par appelant, par zone, par date, par plage horaire, rotation, plafonds, consentement, mesure, facturation — une seule constitue un écart réel : l'origine de la décision. Tout le reste existe déjà ou en est une extension mineure.</a:t>
-            </a:r>
-            <a:endParaRPr lang="en-US" sz="1350" dirty="0"/>
+              <a:t>Notre dossier technique marque chaque affirmation selon ces trois catégories. Nous pouvons vous le laisser.</a:t>
+            </a:r>
+            <a:endParaRPr lang="en-US" sz="1250" dirty="0"/>
           </a:p>
         </p:txBody>
       </p:sp>
@@ -4025,23 +4695,23 @@
         <p:spPr>
           <a:xfrm>
             <a:off x="640080" y="384048"/>
-            <a:ext cx="10972800" cy="658368"/>
-          </a:xfrm>
-          <a:prstGeom prst="rect">
-            <a:avLst/>
-          </a:prstGeom>
-          <a:noFill/>
-          <a:ln/>
-        </p:spPr>
-        <p:txBody>
-          <a:bodyPr wrap="square" lIns="0" tIns="0" rIns="0" bIns="0" rtlCol="0" anchor="ctr"/>
-          <a:lstStyle/>
-          <a:p>
-            <a:pPr indent="0" marL="0">
-              <a:buNone/>
-            </a:pPr>
-            <a:r>
-              <a:rPr lang="en-US" sz="3200" b="1" dirty="0">
+            <a:ext cx="10058400" cy="658368"/>
+          </a:xfrm>
+          <a:prstGeom prst="rect">
+            <a:avLst/>
+          </a:prstGeom>
+          <a:noFill/>
+          <a:ln/>
+        </p:spPr>
+        <p:txBody>
+          <a:bodyPr wrap="square" lIns="0" tIns="0" rIns="0" bIns="0" rtlCol="0" anchor="ctr"/>
+          <a:lstStyle/>
+          <a:p>
+            <a:pPr indent="0" marL="0">
+              <a:buNone/>
+            </a:pPr>
+            <a:r>
+              <a:rPr lang="en-US" sz="3100" b="1" dirty="0">
                 <a:solidFill>
                   <a:srgbClr val="065A82"/>
                 </a:solidFill>
@@ -4049,46 +4719,46 @@
                 <a:ea typeface="Cambria" pitchFamily="34" charset="-122"/>
                 <a:cs typeface="Cambria" pitchFamily="34" charset="-120"/>
               </a:rPr>
+              <a:t>La répartition que nous proposons</a:t>
+            </a:r>
+            <a:endParaRPr lang="en-US" sz="3100" dirty="0"/>
+          </a:p>
+        </p:txBody>
+      </p:sp>
+      <p:sp>
+        <p:nvSpPr>
+          <p:cNvPr id="4" name="Text 2"/>
+          <p:cNvSpPr txBox="1"/>
+          <p:nvPr/>
+        </p:nvSpPr>
+        <p:spPr>
+          <a:xfrm>
+            <a:off x="640080" y="1060704"/>
+            <a:ext cx="10881360" cy="411480"/>
+          </a:xfrm>
+          <a:prstGeom prst="rect">
+            <a:avLst/>
+          </a:prstGeom>
+          <a:noFill/>
+          <a:ln/>
+        </p:spPr>
+        <p:txBody>
+          <a:bodyPr wrap="square" lIns="0" tIns="0" rIns="0" bIns="0" rtlCol="0" anchor="ctr"/>
+          <a:lstStyle/>
+          <a:p>
+            <a:pPr indent="0" marL="0">
+              <a:buNone/>
+            </a:pPr>
+            <a:r>
+              <a:rPr lang="en-US" sz="1500" dirty="0">
+                <a:solidFill>
+                  <a:srgbClr val="5B7180"/>
+                </a:solidFill>
+                <a:latin typeface="Calibri" pitchFamily="34" charset="0"/>
+                <a:ea typeface="Calibri" pitchFamily="34" charset="-122"/>
+                <a:cs typeface="Calibri" pitchFamily="34" charset="-120"/>
+              </a:rPr>
               <a:t>Ce que Call Com apporte, et que vous ne construirez pas</a:t>
-            </a:r>
-            <a:endParaRPr lang="en-US" sz="3200" dirty="0"/>
-          </a:p>
-        </p:txBody>
-      </p:sp>
-      <p:sp>
-        <p:nvSpPr>
-          <p:cNvPr id="4" name="Text 2"/>
-          <p:cNvSpPr txBox="1"/>
-          <p:nvPr/>
-        </p:nvSpPr>
-        <p:spPr>
-          <a:xfrm>
-            <a:off x="640080" y="1060704"/>
-            <a:ext cx="10972800" cy="411480"/>
-          </a:xfrm>
-          <a:prstGeom prst="rect">
-            <a:avLst/>
-          </a:prstGeom>
-          <a:noFill/>
-          <a:ln/>
-        </p:spPr>
-        <p:txBody>
-          <a:bodyPr wrap="square" lIns="0" tIns="0" rIns="0" bIns="0" rtlCol="0" anchor="ctr"/>
-          <a:lstStyle/>
-          <a:p>
-            <a:pPr indent="0" marL="0">
-              <a:buNone/>
-            </a:pPr>
-            <a:r>
-              <a:rPr lang="en-US" sz="1500" dirty="0">
-                <a:solidFill>
-                  <a:srgbClr val="5B7180"/>
-                </a:solidFill>
-                <a:latin typeface="Calibri" pitchFamily="34" charset="0"/>
-                <a:ea typeface="Calibri" pitchFamily="34" charset="-122"/>
-                <a:cs typeface="Calibri" pitchFamily="34" charset="-120"/>
-              </a:rPr>
-              <a:t>La répartition que nous proposons</a:t>
             </a:r>
             <a:endParaRPr lang="en-US" sz="1500" dirty="0"/>
           </a:p>
@@ -4163,8 +4833,8 @@
         </p:nvSpPr>
         <p:spPr>
           <a:xfrm>
-            <a:off x="914400" y="2596896"/>
-            <a:ext cx="128016" cy="128016"/>
+            <a:off x="914400" y="2587752"/>
+            <a:ext cx="118872" cy="118872"/>
           </a:xfrm>
           <a:prstGeom prst="ellipse">
             <a:avLst/>
@@ -4184,23 +4854,23 @@
         <p:spPr>
           <a:xfrm>
             <a:off x="1188720" y="2514600"/>
-            <a:ext cx="4572000" cy="411480"/>
-          </a:xfrm>
-          <a:prstGeom prst="rect">
-            <a:avLst/>
-          </a:prstGeom>
-          <a:noFill/>
-          <a:ln/>
-        </p:spPr>
-        <p:txBody>
-          <a:bodyPr wrap="square" lIns="0" tIns="0" rIns="0" bIns="0" rtlCol="0" anchor="ctr"/>
-          <a:lstStyle/>
-          <a:p>
-            <a:pPr indent="0" marL="0">
-              <a:buNone/>
-            </a:pPr>
-            <a:r>
-              <a:rPr lang="en-US" sz="1300" dirty="0">
+            <a:ext cx="4572000" cy="365760"/>
+          </a:xfrm>
+          <a:prstGeom prst="rect">
+            <a:avLst/>
+          </a:prstGeom>
+          <a:noFill/>
+          <a:ln/>
+        </p:spPr>
+        <p:txBody>
+          <a:bodyPr wrap="square" lIns="0" tIns="0" rIns="0" bIns="0" rtlCol="0" anchor="ctr"/>
+          <a:lstStyle/>
+          <a:p>
+            <a:pPr indent="0" marL="0">
+              <a:buNone/>
+            </a:pPr>
+            <a:r>
+              <a:rPr lang="en-US" sz="1250" dirty="0">
                 <a:solidFill>
                   <a:srgbClr val="13212B"/>
                 </a:solidFill>
@@ -4208,9 +4878,9 @@
                 <a:ea typeface="Calibri" pitchFamily="34" charset="-122"/>
                 <a:cs typeface="Calibri" pitchFamily="34" charset="-120"/>
               </a:rPr>
-              <a:t>Le réseau et la plateforme média</a:t>
-            </a:r>
-            <a:endParaRPr lang="en-US" sz="1300" dirty="0"/>
+              <a:t>Le réseau et le composant média</a:t>
+            </a:r>
+            <a:endParaRPr lang="en-US" sz="1250" dirty="0"/>
           </a:p>
         </p:txBody>
       </p:sp>
@@ -4222,8 +4892,8 @@
         </p:nvSpPr>
         <p:spPr>
           <a:xfrm>
-            <a:off x="914400" y="3127248"/>
-            <a:ext cx="128016" cy="128016"/>
+            <a:off x="914400" y="3026664"/>
+            <a:ext cx="118872" cy="118872"/>
           </a:xfrm>
           <a:prstGeom prst="ellipse">
             <a:avLst/>
@@ -4242,24 +4912,24 @@
         </p:nvSpPr>
         <p:spPr>
           <a:xfrm>
-            <a:off x="1188720" y="3044952"/>
-            <a:ext cx="4572000" cy="411480"/>
-          </a:xfrm>
-          <a:prstGeom prst="rect">
-            <a:avLst/>
-          </a:prstGeom>
-          <a:noFill/>
-          <a:ln/>
-        </p:spPr>
-        <p:txBody>
-          <a:bodyPr wrap="square" lIns="0" tIns="0" rIns="0" bIns="0" rtlCol="0" anchor="ctr"/>
-          <a:lstStyle/>
-          <a:p>
-            <a:pPr indent="0" marL="0">
-              <a:buNone/>
-            </a:pPr>
-            <a:r>
-              <a:rPr lang="en-US" sz="1300" dirty="0">
+            <a:off x="1188720" y="2953512"/>
+            <a:ext cx="4572000" cy="365760"/>
+          </a:xfrm>
+          <a:prstGeom prst="rect">
+            <a:avLst/>
+          </a:prstGeom>
+          <a:noFill/>
+          <a:ln/>
+        </p:spPr>
+        <p:txBody>
+          <a:bodyPr wrap="square" lIns="0" tIns="0" rIns="0" bIns="0" rtlCol="0" anchor="ctr"/>
+          <a:lstStyle/>
+          <a:p>
+            <a:pPr indent="0" marL="0">
+              <a:buNone/>
+            </a:pPr>
+            <a:r>
+              <a:rPr lang="en-US" sz="1250" dirty="0">
                 <a:solidFill>
                   <a:srgbClr val="13212B"/>
                 </a:solidFill>
@@ -4269,7 +4939,7 @@
               </a:rPr>
               <a:t>La base d'abonnés</a:t>
             </a:r>
-            <a:endParaRPr lang="en-US" sz="1300" dirty="0"/>
+            <a:endParaRPr lang="en-US" sz="1250" dirty="0"/>
           </a:p>
         </p:txBody>
       </p:sp>
@@ -4281,8 +4951,8 @@
         </p:nvSpPr>
         <p:spPr>
           <a:xfrm>
-            <a:off x="914400" y="3657600"/>
-            <a:ext cx="128016" cy="128016"/>
+            <a:off x="914400" y="3465576"/>
+            <a:ext cx="118872" cy="118872"/>
           </a:xfrm>
           <a:prstGeom prst="ellipse">
             <a:avLst/>
@@ -4301,24 +4971,24 @@
         </p:nvSpPr>
         <p:spPr>
           <a:xfrm>
-            <a:off x="1188720" y="3575304"/>
-            <a:ext cx="4572000" cy="411480"/>
-          </a:xfrm>
-          <a:prstGeom prst="rect">
-            <a:avLst/>
-          </a:prstGeom>
-          <a:noFill/>
-          <a:ln/>
-        </p:spPr>
-        <p:txBody>
-          <a:bodyPr wrap="square" lIns="0" tIns="0" rIns="0" bIns="0" rtlCol="0" anchor="ctr"/>
-          <a:lstStyle/>
-          <a:p>
-            <a:pPr indent="0" marL="0">
-              <a:buNone/>
-            </a:pPr>
-            <a:r>
-              <a:rPr lang="en-US" sz="1300" dirty="0">
+            <a:off x="1188720" y="3392424"/>
+            <a:ext cx="4572000" cy="365760"/>
+          </a:xfrm>
+          <a:prstGeom prst="rect">
+            <a:avLst/>
+          </a:prstGeom>
+          <a:noFill/>
+          <a:ln/>
+        </p:spPr>
+        <p:txBody>
+          <a:bodyPr wrap="square" lIns="0" tIns="0" rIns="0" bIns="0" rtlCol="0" anchor="ctr"/>
+          <a:lstStyle/>
+          <a:p>
+            <a:pPr indent="0" marL="0">
+              <a:buNone/>
+            </a:pPr>
+            <a:r>
+              <a:rPr lang="en-US" sz="1250" dirty="0">
                 <a:solidFill>
                   <a:srgbClr val="13212B"/>
                 </a:solidFill>
@@ -4328,7 +4998,7 @@
               </a:rPr>
               <a:t>Le consentement et la facturation</a:t>
             </a:r>
-            <a:endParaRPr lang="en-US" sz="1300" dirty="0"/>
+            <a:endParaRPr lang="en-US" sz="1250" dirty="0"/>
           </a:p>
         </p:txBody>
       </p:sp>
@@ -4340,8 +5010,8 @@
         </p:nvSpPr>
         <p:spPr>
           <a:xfrm>
-            <a:off x="914400" y="4187952"/>
-            <a:ext cx="128016" cy="128016"/>
+            <a:off x="914400" y="3904488"/>
+            <a:ext cx="118872" cy="118872"/>
           </a:xfrm>
           <a:prstGeom prst="ellipse">
             <a:avLst/>
@@ -4360,24 +5030,24 @@
         </p:nvSpPr>
         <p:spPr>
           <a:xfrm>
-            <a:off x="1188720" y="4105656"/>
-            <a:ext cx="4572000" cy="411480"/>
-          </a:xfrm>
-          <a:prstGeom prst="rect">
-            <a:avLst/>
-          </a:prstGeom>
-          <a:noFill/>
-          <a:ln/>
-        </p:spPr>
-        <p:txBody>
-          <a:bodyPr wrap="square" lIns="0" tIns="0" rIns="0" bIns="0" rtlCol="0" anchor="ctr"/>
-          <a:lstStyle/>
-          <a:p>
-            <a:pPr indent="0" marL="0">
-              <a:buNone/>
-            </a:pPr>
-            <a:r>
-              <a:rPr lang="en-US" sz="1300" dirty="0">
+            <a:off x="1188720" y="3831336"/>
+            <a:ext cx="4572000" cy="365760"/>
+          </a:xfrm>
+          <a:prstGeom prst="rect">
+            <a:avLst/>
+          </a:prstGeom>
+          <a:noFill/>
+          <a:ln/>
+        </p:spPr>
+        <p:txBody>
+          <a:bodyPr wrap="square" lIns="0" tIns="0" rIns="0" bIns="0" rtlCol="0" anchor="ctr"/>
+          <a:lstStyle/>
+          <a:p>
+            <a:pPr indent="0" marL="0">
+              <a:buNone/>
+            </a:pPr>
+            <a:r>
+              <a:rPr lang="en-US" sz="1250" dirty="0">
                 <a:solidFill>
                   <a:srgbClr val="13212B"/>
                 </a:solidFill>
@@ -4387,7 +5057,7 @@
               </a:rPr>
               <a:t>La conformité réglementaire</a:t>
             </a:r>
-            <a:endParaRPr lang="en-US" sz="1300" dirty="0"/>
+            <a:endParaRPr lang="en-US" sz="1250" dirty="0"/>
           </a:p>
         </p:txBody>
       </p:sp>
@@ -4399,8 +5069,8 @@
         </p:nvSpPr>
         <p:spPr>
           <a:xfrm>
-            <a:off x="914400" y="4718304"/>
-            <a:ext cx="128016" cy="128016"/>
+            <a:off x="914400" y="4343400"/>
+            <a:ext cx="118872" cy="118872"/>
           </a:xfrm>
           <a:prstGeom prst="ellipse">
             <a:avLst/>
@@ -4419,24 +5089,24 @@
         </p:nvSpPr>
         <p:spPr>
           <a:xfrm>
-            <a:off x="1188720" y="4636008"/>
-            <a:ext cx="4572000" cy="411480"/>
-          </a:xfrm>
-          <a:prstGeom prst="rect">
-            <a:avLst/>
-          </a:prstGeom>
-          <a:noFill/>
-          <a:ln/>
-        </p:spPr>
-        <p:txBody>
-          <a:bodyPr wrap="square" lIns="0" tIns="0" rIns="0" bIns="0" rtlCol="0" anchor="ctr"/>
-          <a:lstStyle/>
-          <a:p>
-            <a:pPr indent="0" marL="0">
-              <a:buNone/>
-            </a:pPr>
-            <a:r>
-              <a:rPr lang="en-US" sz="1300" dirty="0">
+            <a:off x="1188720" y="4270248"/>
+            <a:ext cx="4572000" cy="365760"/>
+          </a:xfrm>
+          <a:prstGeom prst="rect">
+            <a:avLst/>
+          </a:prstGeom>
+          <a:noFill/>
+          <a:ln/>
+        </p:spPr>
+        <p:txBody>
+          <a:bodyPr wrap="square" lIns="0" tIns="0" rIns="0" bIns="0" rtlCol="0" anchor="ctr"/>
+          <a:lstStyle/>
+          <a:p>
+            <a:pPr indent="0" marL="0">
+              <a:buNone/>
+            </a:pPr>
+            <a:r>
+              <a:rPr lang="en-US" sz="1250" dirty="0">
                 <a:solidFill>
                   <a:srgbClr val="13212B"/>
                 </a:solidFill>
@@ -4446,13 +5116,72 @@
               </a:rPr>
               <a:t>Les données d'abonnés — jamais exportées</a:t>
             </a:r>
-            <a:endParaRPr lang="en-US" sz="1300" dirty="0"/>
+            <a:endParaRPr lang="en-US" sz="1250" dirty="0"/>
           </a:p>
         </p:txBody>
       </p:sp>
       <p:sp>
         <p:nvSpPr>
           <p:cNvPr id="17" name="Shape 15"/>
+          <p:cNvSpPr/>
+          <p:nvPr/>
+        </p:nvSpPr>
+        <p:spPr>
+          <a:xfrm>
+            <a:off x="914400" y="4782312"/>
+            <a:ext cx="118872" cy="118872"/>
+          </a:xfrm>
+          <a:prstGeom prst="ellipse">
+            <a:avLst/>
+          </a:prstGeom>
+          <a:solidFill>
+            <a:srgbClr val="065A82"/>
+          </a:solidFill>
+          <a:ln/>
+        </p:spPr>
+      </p:sp>
+      <p:sp>
+        <p:nvSpPr>
+          <p:cNvPr id="18" name="Text 16"/>
+          <p:cNvSpPr txBox="1"/>
+          <p:nvPr/>
+        </p:nvSpPr>
+        <p:spPr>
+          <a:xfrm>
+            <a:off x="1188720" y="4709160"/>
+            <a:ext cx="4572000" cy="365760"/>
+          </a:xfrm>
+          <a:prstGeom prst="rect">
+            <a:avLst/>
+          </a:prstGeom>
+          <a:noFill/>
+          <a:ln/>
+        </p:spPr>
+        <p:txBody>
+          <a:bodyPr wrap="square" lIns="0" tIns="0" rIns="0" bIns="0" rtlCol="0" anchor="ctr"/>
+          <a:lstStyle/>
+          <a:p>
+            <a:pPr indent="0" marL="0">
+              <a:buNone/>
+            </a:pPr>
+            <a:r>
+              <a:rPr lang="en-US" sz="1250" dirty="0">
+                <a:solidFill>
+                  <a:srgbClr val="13212B"/>
+                </a:solidFill>
+                <a:latin typeface="Calibri" pitchFamily="34" charset="0"/>
+                <a:ea typeface="Calibri" pitchFamily="34" charset="-122"/>
+                <a:cs typeface="Calibri" pitchFamily="34" charset="-120"/>
+              </a:rPr>
+              <a:t>La décision de quoi diffuser</a:t>
+            </a:r>
+            <a:endParaRPr lang="en-US" sz="1250" dirty="0"/>
+          </a:p>
+        </p:txBody>
+      </p:sp>
+      <p:sp>
+        <p:nvSpPr>
+          <p:cNvPr id="19" name="Shape 17"/>
           <p:cNvSpPr/>
           <p:nvPr/>
         </p:nvSpPr>
@@ -4474,7 +5203,7 @@
       </p:sp>
       <p:sp>
         <p:nvSpPr>
-          <p:cNvPr id="18" name="Text 16"/>
+          <p:cNvPr id="20" name="Text 18"/>
           <p:cNvSpPr txBox="1"/>
           <p:nvPr/>
         </p:nvSpPr>
@@ -4513,7 +5242,7 @@
       </p:sp>
       <p:sp>
         <p:nvSpPr>
-          <p:cNvPr id="19" name="Shape 17"/>
+          <p:cNvPr id="21" name="Shape 19"/>
           <p:cNvSpPr/>
           <p:nvPr/>
         </p:nvSpPr>
@@ -4533,7 +5262,7 @@
       </p:sp>
       <p:sp>
         <p:nvSpPr>
-          <p:cNvPr id="20" name="Text 18"/>
+          <p:cNvPr id="22" name="Text 20"/>
           <p:cNvSpPr txBox="1"/>
           <p:nvPr/>
         </p:nvSpPr>
@@ -4572,7 +5301,7 @@
       </p:sp>
       <p:sp>
         <p:nvSpPr>
-          <p:cNvPr id="21" name="Text 19"/>
+          <p:cNvPr id="23" name="Text 21"/>
           <p:cNvSpPr txBox="1"/>
           <p:nvPr/>
         </p:nvSpPr>
@@ -4614,7 +5343,7 @@
       </p:sp>
       <p:sp>
         <p:nvSpPr>
-          <p:cNvPr id="22" name="Shape 20"/>
+          <p:cNvPr id="24" name="Shape 22"/>
           <p:cNvSpPr/>
           <p:nvPr/>
         </p:nvSpPr>
@@ -4634,7 +5363,7 @@
       </p:sp>
       <p:sp>
         <p:nvSpPr>
-          <p:cNvPr id="23" name="Text 21"/>
+          <p:cNvPr id="25" name="Text 23"/>
           <p:cNvSpPr txBox="1"/>
           <p:nvPr/>
         </p:nvSpPr>
@@ -4673,7 +5402,7 @@
       </p:sp>
       <p:sp>
         <p:nvSpPr>
-          <p:cNvPr id="24" name="Shape 22"/>
+          <p:cNvPr id="26" name="Shape 24"/>
           <p:cNvSpPr/>
           <p:nvPr/>
         </p:nvSpPr>
@@ -4693,7 +5422,7 @@
       </p:sp>
       <p:sp>
         <p:nvSpPr>
-          <p:cNvPr id="25" name="Text 23"/>
+          <p:cNvPr id="27" name="Text 25"/>
           <p:cNvSpPr txBox="1"/>
           <p:nvPr/>
         </p:nvSpPr>
@@ -4732,7 +5461,7 @@
       </p:sp>
       <p:sp>
         <p:nvSpPr>
-          <p:cNvPr id="26" name="Shape 24"/>
+          <p:cNvPr id="28" name="Shape 26"/>
           <p:cNvSpPr/>
           <p:nvPr/>
         </p:nvSpPr>
@@ -4752,7 +5481,7 @@
       </p:sp>
       <p:sp>
         <p:nvSpPr>
-          <p:cNvPr id="27" name="Text 25"/>
+          <p:cNvPr id="29" name="Text 27"/>
           <p:cNvSpPr txBox="1"/>
           <p:nvPr/>
         </p:nvSpPr>
@@ -4791,7 +5520,7 @@
       </p:sp>
       <p:sp>
         <p:nvSpPr>
-          <p:cNvPr id="28" name="Text 26"/>
+          <p:cNvPr id="30" name="Text 28"/>
           <p:cNvSpPr txBox="1"/>
           <p:nvPr/>
         </p:nvSpPr>
@@ -4908,23 +5637,23 @@
         <p:spPr>
           <a:xfrm>
             <a:off x="640080" y="384048"/>
-            <a:ext cx="10972800" cy="658368"/>
-          </a:xfrm>
-          <a:prstGeom prst="rect">
-            <a:avLst/>
-          </a:prstGeom>
-          <a:noFill/>
-          <a:ln/>
-        </p:spPr>
-        <p:txBody>
-          <a:bodyPr wrap="square" lIns="0" tIns="0" rIns="0" bIns="0" rtlCol="0" anchor="ctr"/>
-          <a:lstStyle/>
-          <a:p>
-            <a:pPr indent="0" marL="0">
-              <a:buNone/>
-            </a:pPr>
-            <a:r>
-              <a:rPr lang="en-US" sz="3200" b="1" dirty="0">
+            <a:ext cx="10058400" cy="658368"/>
+          </a:xfrm>
+          <a:prstGeom prst="rect">
+            <a:avLst/>
+          </a:prstGeom>
+          <a:noFill/>
+          <a:ln/>
+        </p:spPr>
+        <p:txBody>
+          <a:bodyPr wrap="square" lIns="0" tIns="0" rIns="0" bIns="0" rtlCol="0" anchor="ctr"/>
+          <a:lstStyle/>
+          <a:p>
+            <a:pPr indent="0" marL="0">
+              <a:buNone/>
+            </a:pPr>
+            <a:r>
+              <a:rPr lang="en-US" sz="3100" b="1" dirty="0">
                 <a:solidFill>
                   <a:srgbClr val="065A82"/>
                 </a:solidFill>
@@ -4932,9 +5661,9 @@
                 <a:ea typeface="Cambria" pitchFamily="34" charset="-122"/>
                 <a:cs typeface="Cambria" pitchFamily="34" charset="-120"/>
               </a:rPr>
-              <a:t>Notre demande est précise, et petite</a:t>
-            </a:r>
-            <a:endParaRPr lang="en-US" sz="3200" dirty="0"/>
+              <a:t>Notre demande aujourd'hui est petite</a:t>
+            </a:r>
+            <a:endParaRPr lang="en-US" sz="3100" dirty="0"/>
           </a:p>
         </p:txBody>
       </p:sp>
@@ -4947,7 +5676,7 @@
         <p:spPr>
           <a:xfrm>
             <a:off x="640080" y="1060704"/>
-            <a:ext cx="10972800" cy="411480"/>
+            <a:ext cx="10881360" cy="411480"/>
           </a:xfrm>
           <a:prstGeom prst="rect">
             <a:avLst/>
@@ -4971,7 +5700,7 @@
                 <a:ea typeface="Calibri" pitchFamily="34" charset="-122"/>
                 <a:cs typeface="Calibri" pitchFamily="34" charset="-120"/>
               </a:rPr>
-              <a:t>Un POC, sans développement de votre côté</a:t>
+              <a:t>Nous ne demandons pas un projet. Nous demandons une validation de principe.</a:t>
             </a:r>
             <a:endParaRPr lang="en-US" sz="1500" dirty="0"/>
           </a:p>
@@ -4985,12 +5714,12 @@
         </p:nvSpPr>
         <p:spPr>
           <a:xfrm>
-            <a:off x="640080" y="1874520"/>
-            <a:ext cx="10881360" cy="1234440"/>
+            <a:off x="640080" y="1783080"/>
+            <a:ext cx="10881360" cy="1143000"/>
           </a:xfrm>
           <a:prstGeom prst="roundRect">
             <a:avLst>
-              <a:gd name="adj" fmla="val 4444"/>
+              <a:gd name="adj" fmla="val 4800"/>
             </a:avLst>
           </a:prstGeom>
           <a:solidFill>
@@ -5007,7 +5736,7 @@
         </p:nvSpPr>
         <p:spPr>
           <a:xfrm>
-            <a:off x="914400" y="2148840"/>
+            <a:off x="914400" y="2011680"/>
             <a:ext cx="10332720" cy="411480"/>
           </a:xfrm>
           <a:prstGeom prst="rect">
@@ -5032,7 +5761,7 @@
                 <a:ea typeface="Cambria" pitchFamily="34" charset="-122"/>
                 <a:cs typeface="Cambria" pitchFamily="34" charset="-120"/>
               </a:rPr>
-              <a:t>Un POC sur 10 à 20 lignes de test, en pré-provisionnement</a:t>
+              <a:t>Une réunion avec votre équipe voix, et trois réponses</a:t>
             </a:r>
             <a:endParaRPr lang="en-US" sz="2400" dirty="0"/>
           </a:p>
@@ -5046,7 +5775,7 @@
         </p:nvSpPr>
         <p:spPr>
           <a:xfrm>
-            <a:off x="914400" y="2606040"/>
+            <a:off x="914400" y="2450592"/>
             <a:ext cx="10332720" cy="365760"/>
           </a:xfrm>
           <a:prstGeom prst="rect">
@@ -5071,7 +5800,7 @@
                 <a:ea typeface="Calibri" pitchFamily="34" charset="-122"/>
                 <a:cs typeface="Calibri" pitchFamily="34" charset="-120"/>
               </a:rPr>
-              <a:t>Nous poussons les contenus et les règles à l'avance. Votre plateforme décide localement. Vous nous remontez les diffusions.</a:t>
+              <a:t>C'est tout ce dont nous avons besoin pour savoir si ce projet a un avenir chez vous.</a:t>
             </a:r>
             <a:endParaRPr lang="en-US" sz="1350" dirty="0"/>
           </a:p>
@@ -5079,18 +5808,57 @@
       </p:sp>
       <p:sp>
         <p:nvSpPr>
-          <p:cNvPr id="8" name="Shape 6"/>
+          <p:cNvPr id="8" name="Text 6"/>
+          <p:cNvSpPr txBox="1"/>
+          <p:nvPr/>
+        </p:nvSpPr>
+        <p:spPr>
+          <a:xfrm>
+            <a:off x="640080" y="3127248"/>
+            <a:ext cx="10881360" cy="320040"/>
+          </a:xfrm>
+          <a:prstGeom prst="rect">
+            <a:avLst/>
+          </a:prstGeom>
+          <a:noFill/>
+          <a:ln/>
+        </p:spPr>
+        <p:txBody>
+          <a:bodyPr wrap="square" lIns="0" tIns="0" rIns="0" bIns="0" rtlCol="0" anchor="ctr"/>
+          <a:lstStyle/>
+          <a:p>
+            <a:pPr indent="0" marL="0">
+              <a:buNone/>
+            </a:pPr>
+            <a:r>
+              <a:rPr lang="en-US" sz="1400" b="1" dirty="0">
+                <a:solidFill>
+                  <a:srgbClr val="065A82"/>
+                </a:solidFill>
+                <a:latin typeface="Calibri" pitchFamily="34" charset="0"/>
+                <a:ea typeface="Calibri" pitchFamily="34" charset="-122"/>
+                <a:cs typeface="Calibri" pitchFamily="34" charset="-120"/>
+              </a:rPr>
+              <a:t>Et quatre engagements que nous prenons dès maintenant</a:t>
+            </a:r>
+            <a:endParaRPr lang="en-US" sz="1400" dirty="0"/>
+          </a:p>
+        </p:txBody>
+      </p:sp>
+      <p:sp>
+        <p:nvSpPr>
+          <p:cNvPr id="9" name="Shape 7"/>
           <p:cNvSpPr/>
           <p:nvPr/>
         </p:nvSpPr>
         <p:spPr>
           <a:xfrm>
-            <a:off x="640080" y="3337560"/>
-            <a:ext cx="5349240" cy="1188720"/>
+            <a:off x="640080" y="3520440"/>
+            <a:ext cx="5349240" cy="1097280"/>
           </a:xfrm>
           <a:prstGeom prst="roundRect">
             <a:avLst>
-              <a:gd name="adj" fmla="val 4615"/>
+              <a:gd name="adj" fmla="val 5000"/>
             </a:avLst>
           </a:prstGeom>
           <a:solidFill>
@@ -5101,14 +5869,14 @@
       </p:sp>
       <p:sp>
         <p:nvSpPr>
-          <p:cNvPr id="9" name="Shape 7"/>
+          <p:cNvPr id="10" name="Shape 8"/>
           <p:cNvSpPr/>
           <p:nvPr/>
         </p:nvSpPr>
         <p:spPr>
           <a:xfrm>
-            <a:off x="868680" y="3538728"/>
-            <a:ext cx="347472" cy="347472"/>
+            <a:off x="868680" y="3703320"/>
+            <a:ext cx="329184" cy="329184"/>
           </a:xfrm>
           <a:prstGeom prst="ellipse">
             <a:avLst/>
@@ -5121,14 +5889,14 @@
       </p:sp>
       <p:sp>
         <p:nvSpPr>
-          <p:cNvPr id="10" name="Text 8"/>
-          <p:cNvSpPr txBox="1"/>
-          <p:nvPr/>
-        </p:nvSpPr>
-        <p:spPr>
-          <a:xfrm>
-            <a:off x="868680" y="3538728"/>
-            <a:ext cx="347472" cy="347472"/>
+          <p:cNvPr id="11" name="Text 9"/>
+          <p:cNvSpPr txBox="1"/>
+          <p:nvPr/>
+        </p:nvSpPr>
+        <p:spPr>
+          <a:xfrm>
+            <a:off x="868680" y="3703320"/>
+            <a:ext cx="329184" cy="329184"/>
           </a:xfrm>
           <a:prstGeom prst="rect">
             <a:avLst/>
@@ -5160,30 +5928,30 @@
       </p:sp>
       <p:sp>
         <p:nvSpPr>
-          <p:cNvPr id="11" name="Text 9"/>
-          <p:cNvSpPr txBox="1"/>
-          <p:nvPr/>
-        </p:nvSpPr>
-        <p:spPr>
-          <a:xfrm>
-            <a:off x="1325880" y="3502152"/>
-            <a:ext cx="4480560" cy="292608"/>
-          </a:xfrm>
-          <a:prstGeom prst="rect">
-            <a:avLst/>
-          </a:prstGeom>
-          <a:noFill/>
-          <a:ln/>
-        </p:spPr>
-        <p:txBody>
-          <a:bodyPr wrap="square" lIns="0" tIns="0" rIns="0" bIns="0" rtlCol="0" anchor="ctr"/>
-          <a:lstStyle/>
-          <a:p>
-            <a:pPr indent="0" marL="0">
-              <a:buNone/>
-            </a:pPr>
-            <a:r>
-              <a:rPr lang="en-US" sz="1350" b="1" dirty="0">
+          <p:cNvPr id="12" name="Text 10"/>
+          <p:cNvSpPr txBox="1"/>
+          <p:nvPr/>
+        </p:nvSpPr>
+        <p:spPr>
+          <a:xfrm>
+            <a:off x="1298448" y="3657600"/>
+            <a:ext cx="4526280" cy="274320"/>
+          </a:xfrm>
+          <a:prstGeom prst="rect">
+            <a:avLst/>
+          </a:prstGeom>
+          <a:noFill/>
+          <a:ln/>
+        </p:spPr>
+        <p:txBody>
+          <a:bodyPr wrap="square" lIns="0" tIns="0" rIns="0" bIns="0" rtlCol="0" anchor="ctr"/>
+          <a:lstStyle/>
+          <a:p>
+            <a:pPr indent="0" marL="0">
+              <a:buNone/>
+            </a:pPr>
+            <a:r>
+              <a:rPr lang="en-US" sz="1300" b="1" dirty="0">
                 <a:solidFill>
                   <a:srgbClr val="065A82"/>
                 </a:solidFill>
@@ -5193,20 +5961,20 @@
               </a:rPr>
               <a:t>Aucune dépendance</a:t>
             </a:r>
-            <a:endParaRPr lang="en-US" sz="1350" dirty="0"/>
-          </a:p>
-        </p:txBody>
-      </p:sp>
-      <p:sp>
-        <p:nvSpPr>
-          <p:cNvPr id="12" name="Text 10"/>
-          <p:cNvSpPr txBox="1"/>
-          <p:nvPr/>
-        </p:nvSpPr>
-        <p:spPr>
-          <a:xfrm>
-            <a:off x="1325880" y="3794760"/>
-            <a:ext cx="4480560" cy="621792"/>
+            <a:endParaRPr lang="en-US" sz="1300" dirty="0"/>
+          </a:p>
+        </p:txBody>
+      </p:sp>
+      <p:sp>
+        <p:nvSpPr>
+          <p:cNvPr id="13" name="Text 11"/>
+          <p:cNvSpPr txBox="1"/>
+          <p:nvPr/>
+        </p:nvSpPr>
+        <p:spPr>
+          <a:xfrm>
+            <a:off x="1298448" y="3922776"/>
+            <a:ext cx="4526280" cy="621792"/>
           </a:xfrm>
           <a:prstGeom prst="rect">
             <a:avLst/>
@@ -5220,12 +5988,12 @@
           <a:p>
             <a:pPr indent="0" marL="0">
               <a:lnSpc>
-                <a:spcPts val="1450"/>
+                <a:spcPts val="1400"/>
               </a:lnSpc>
               <a:buNone/>
             </a:pPr>
             <a:r>
-              <a:rPr lang="en-US" sz="1150" dirty="0">
+              <a:rPr lang="en-US" sz="1100" dirty="0">
                 <a:solidFill>
                   <a:srgbClr val="13212B"/>
                 </a:solidFill>
@@ -5233,26 +6001,26 @@
                 <a:ea typeface="Calibri" pitchFamily="34" charset="-122"/>
                 <a:cs typeface="Calibri" pitchFamily="34" charset="-120"/>
               </a:rPr>
-              <a:t>Votre réseau ne dépend jamais de nos systèmes. Le repli est votre tonalité normale, déclenché par un délai de garde de votre côté.</a:t>
-            </a:r>
-            <a:endParaRPr lang="en-US" sz="1150" dirty="0"/>
-          </a:p>
-        </p:txBody>
-      </p:sp>
-      <p:sp>
-        <p:nvSpPr>
-          <p:cNvPr id="13" name="Shape 11"/>
+              <a:t>Votre réseau ne dépendra jamais de nos systèmes. Le repli est votre tonalité normale, déclenché par un délai de garde de votre côté.</a:t>
+            </a:r>
+            <a:endParaRPr lang="en-US" sz="1100" dirty="0"/>
+          </a:p>
+        </p:txBody>
+      </p:sp>
+      <p:sp>
+        <p:nvSpPr>
+          <p:cNvPr id="14" name="Shape 12"/>
           <p:cNvSpPr/>
           <p:nvPr/>
         </p:nvSpPr>
         <p:spPr>
           <a:xfrm>
-            <a:off x="6172200" y="3337560"/>
-            <a:ext cx="5349240" cy="1188720"/>
+            <a:off x="6172200" y="3520440"/>
+            <a:ext cx="5349240" cy="1097280"/>
           </a:xfrm>
           <a:prstGeom prst="roundRect">
             <a:avLst>
-              <a:gd name="adj" fmla="val 4615"/>
+              <a:gd name="adj" fmla="val 5000"/>
             </a:avLst>
           </a:prstGeom>
           <a:solidFill>
@@ -5263,14 +6031,14 @@
       </p:sp>
       <p:sp>
         <p:nvSpPr>
-          <p:cNvPr id="14" name="Shape 12"/>
+          <p:cNvPr id="15" name="Shape 13"/>
           <p:cNvSpPr/>
           <p:nvPr/>
         </p:nvSpPr>
         <p:spPr>
           <a:xfrm>
-            <a:off x="6400800" y="3538728"/>
-            <a:ext cx="347472" cy="347472"/>
+            <a:off x="6400800" y="3703320"/>
+            <a:ext cx="329184" cy="329184"/>
           </a:xfrm>
           <a:prstGeom prst="ellipse">
             <a:avLst/>
@@ -5283,14 +6051,14 @@
       </p:sp>
       <p:sp>
         <p:nvSpPr>
-          <p:cNvPr id="15" name="Text 13"/>
-          <p:cNvSpPr txBox="1"/>
-          <p:nvPr/>
-        </p:nvSpPr>
-        <p:spPr>
-          <a:xfrm>
-            <a:off x="6400800" y="3538728"/>
-            <a:ext cx="347472" cy="347472"/>
+          <p:cNvPr id="16" name="Text 14"/>
+          <p:cNvSpPr txBox="1"/>
+          <p:nvPr/>
+        </p:nvSpPr>
+        <p:spPr>
+          <a:xfrm>
+            <a:off x="6400800" y="3703320"/>
+            <a:ext cx="329184" cy="329184"/>
           </a:xfrm>
           <a:prstGeom prst="rect">
             <a:avLst/>
@@ -5322,30 +6090,30 @@
       </p:sp>
       <p:sp>
         <p:nvSpPr>
-          <p:cNvPr id="16" name="Text 14"/>
-          <p:cNvSpPr txBox="1"/>
-          <p:nvPr/>
-        </p:nvSpPr>
-        <p:spPr>
-          <a:xfrm>
-            <a:off x="6858000" y="3502152"/>
-            <a:ext cx="4480560" cy="292608"/>
-          </a:xfrm>
-          <a:prstGeom prst="rect">
-            <a:avLst/>
-          </a:prstGeom>
-          <a:noFill/>
-          <a:ln/>
-        </p:spPr>
-        <p:txBody>
-          <a:bodyPr wrap="square" lIns="0" tIns="0" rIns="0" bIns="0" rtlCol="0" anchor="ctr"/>
-          <a:lstStyle/>
-          <a:p>
-            <a:pPr indent="0" marL="0">
-              <a:buNone/>
-            </a:pPr>
-            <a:r>
-              <a:rPr lang="en-US" sz="1350" b="1" dirty="0">
+          <p:cNvPr id="17" name="Text 15"/>
+          <p:cNvSpPr txBox="1"/>
+          <p:nvPr/>
+        </p:nvSpPr>
+        <p:spPr>
+          <a:xfrm>
+            <a:off x="6830568" y="3657600"/>
+            <a:ext cx="4526280" cy="274320"/>
+          </a:xfrm>
+          <a:prstGeom prst="rect">
+            <a:avLst/>
+          </a:prstGeom>
+          <a:noFill/>
+          <a:ln/>
+        </p:spPr>
+        <p:txBody>
+          <a:bodyPr wrap="square" lIns="0" tIns="0" rIns="0" bIns="0" rtlCol="0" anchor="ctr"/>
+          <a:lstStyle/>
+          <a:p>
+            <a:pPr indent="0" marL="0">
+              <a:buNone/>
+            </a:pPr>
+            <a:r>
+              <a:rPr lang="en-US" sz="1300" b="1" dirty="0">
                 <a:solidFill>
                   <a:srgbClr val="065A82"/>
                 </a:solidFill>
@@ -5355,20 +6123,20 @@
               </a:rPr>
               <a:t>Le kill-switch est chez vous</a:t>
             </a:r>
-            <a:endParaRPr lang="en-US" sz="1350" dirty="0"/>
-          </a:p>
-        </p:txBody>
-      </p:sp>
-      <p:sp>
-        <p:nvSpPr>
-          <p:cNvPr id="17" name="Text 15"/>
-          <p:cNvSpPr txBox="1"/>
-          <p:nvPr/>
-        </p:nvSpPr>
-        <p:spPr>
-          <a:xfrm>
-            <a:off x="6858000" y="3794760"/>
-            <a:ext cx="4480560" cy="621792"/>
+            <a:endParaRPr lang="en-US" sz="1300" dirty="0"/>
+          </a:p>
+        </p:txBody>
+      </p:sp>
+      <p:sp>
+        <p:nvSpPr>
+          <p:cNvPr id="18" name="Text 16"/>
+          <p:cNvSpPr txBox="1"/>
+          <p:nvPr/>
+        </p:nvSpPr>
+        <p:spPr>
+          <a:xfrm>
+            <a:off x="6830568" y="3922776"/>
+            <a:ext cx="4526280" cy="621792"/>
           </a:xfrm>
           <a:prstGeom prst="rect">
             <a:avLst/>
@@ -5382,12 +6150,12 @@
           <a:p>
             <a:pPr indent="0" marL="0">
               <a:lnSpc>
-                <a:spcPts val="1450"/>
+                <a:spcPts val="1400"/>
               </a:lnSpc>
               <a:buNone/>
             </a:pPr>
             <a:r>
-              <a:rPr lang="en-US" sz="1150" dirty="0">
+              <a:rPr lang="en-US" sz="1100" dirty="0">
                 <a:solidFill>
                   <a:srgbClr val="13212B"/>
                 </a:solidFill>
@@ -5395,26 +6163,26 @@
                 <a:ea typeface="Calibri" pitchFamily="34" charset="-122"/>
                 <a:cs typeface="Calibri" pitchFamily="34" charset="-120"/>
               </a:rPr>
-              <a:t>Vous pouvez couper le service unilatéralement et immédiatement, sans nous consulter.</a:t>
-            </a:r>
-            <a:endParaRPr lang="en-US" sz="1150" dirty="0"/>
-          </a:p>
-        </p:txBody>
-      </p:sp>
-      <p:sp>
-        <p:nvSpPr>
-          <p:cNvPr id="18" name="Shape 16"/>
+              <a:t>Vous pourrez couper le service unilatéralement et immédiatement, sans nous consulter.</a:t>
+            </a:r>
+            <a:endParaRPr lang="en-US" sz="1100" dirty="0"/>
+          </a:p>
+        </p:txBody>
+      </p:sp>
+      <p:sp>
+        <p:nvSpPr>
+          <p:cNvPr id="19" name="Shape 17"/>
           <p:cNvSpPr/>
           <p:nvPr/>
         </p:nvSpPr>
         <p:spPr>
           <a:xfrm>
-            <a:off x="640080" y="4663440"/>
-            <a:ext cx="5349240" cy="1188720"/>
+            <a:off x="640080" y="4754880"/>
+            <a:ext cx="5349240" cy="1097280"/>
           </a:xfrm>
           <a:prstGeom prst="roundRect">
             <a:avLst>
-              <a:gd name="adj" fmla="val 4615"/>
+              <a:gd name="adj" fmla="val 5000"/>
             </a:avLst>
           </a:prstGeom>
           <a:solidFill>
@@ -5425,14 +6193,14 @@
       </p:sp>
       <p:sp>
         <p:nvSpPr>
-          <p:cNvPr id="19" name="Shape 17"/>
+          <p:cNvPr id="20" name="Shape 18"/>
           <p:cNvSpPr/>
           <p:nvPr/>
         </p:nvSpPr>
         <p:spPr>
           <a:xfrm>
-            <a:off x="868680" y="4864608"/>
-            <a:ext cx="347472" cy="347472"/>
+            <a:off x="868680" y="4937760"/>
+            <a:ext cx="329184" cy="329184"/>
           </a:xfrm>
           <a:prstGeom prst="ellipse">
             <a:avLst/>
@@ -5445,14 +6213,14 @@
       </p:sp>
       <p:sp>
         <p:nvSpPr>
-          <p:cNvPr id="20" name="Text 18"/>
-          <p:cNvSpPr txBox="1"/>
-          <p:nvPr/>
-        </p:nvSpPr>
-        <p:spPr>
-          <a:xfrm>
-            <a:off x="868680" y="4864608"/>
-            <a:ext cx="347472" cy="347472"/>
+          <p:cNvPr id="21" name="Text 19"/>
+          <p:cNvSpPr txBox="1"/>
+          <p:nvPr/>
+        </p:nvSpPr>
+        <p:spPr>
+          <a:xfrm>
+            <a:off x="868680" y="4937760"/>
+            <a:ext cx="329184" cy="329184"/>
           </a:xfrm>
           <a:prstGeom prst="rect">
             <a:avLst/>
@@ -5484,30 +6252,30 @@
       </p:sp>
       <p:sp>
         <p:nvSpPr>
-          <p:cNvPr id="21" name="Text 19"/>
-          <p:cNvSpPr txBox="1"/>
-          <p:nvPr/>
-        </p:nvSpPr>
-        <p:spPr>
-          <a:xfrm>
-            <a:off x="1325880" y="4828032"/>
-            <a:ext cx="4480560" cy="292608"/>
-          </a:xfrm>
-          <a:prstGeom prst="rect">
-            <a:avLst/>
-          </a:prstGeom>
-          <a:noFill/>
-          <a:ln/>
-        </p:spPr>
-        <p:txBody>
-          <a:bodyPr wrap="square" lIns="0" tIns="0" rIns="0" bIns="0" rtlCol="0" anchor="ctr"/>
-          <a:lstStyle/>
-          <a:p>
-            <a:pPr indent="0" marL="0">
-              <a:buNone/>
-            </a:pPr>
-            <a:r>
-              <a:rPr lang="en-US" sz="1350" b="1" dirty="0">
+          <p:cNvPr id="22" name="Text 20"/>
+          <p:cNvSpPr txBox="1"/>
+          <p:nvPr/>
+        </p:nvSpPr>
+        <p:spPr>
+          <a:xfrm>
+            <a:off x="1298448" y="4892040"/>
+            <a:ext cx="4526280" cy="274320"/>
+          </a:xfrm>
+          <a:prstGeom prst="rect">
+            <a:avLst/>
+          </a:prstGeom>
+          <a:noFill/>
+          <a:ln/>
+        </p:spPr>
+        <p:txBody>
+          <a:bodyPr wrap="square" lIns="0" tIns="0" rIns="0" bIns="0" rtlCol="0" anchor="ctr"/>
+          <a:lstStyle/>
+          <a:p>
+            <a:pPr indent="0" marL="0">
+              <a:buNone/>
+            </a:pPr>
+            <a:r>
+              <a:rPr lang="en-US" sz="1300" b="1" dirty="0">
                 <a:solidFill>
                   <a:srgbClr val="065A82"/>
                 </a:solidFill>
@@ -5517,20 +6285,20 @@
               </a:rPr>
               <a:t>Aucune donnée personnelle</a:t>
             </a:r>
-            <a:endParaRPr lang="en-US" sz="1350" dirty="0"/>
-          </a:p>
-        </p:txBody>
-      </p:sp>
-      <p:sp>
-        <p:nvSpPr>
-          <p:cNvPr id="22" name="Text 20"/>
-          <p:cNvSpPr txBox="1"/>
-          <p:nvPr/>
-        </p:nvSpPr>
-        <p:spPr>
-          <a:xfrm>
-            <a:off x="1325880" y="5120640"/>
-            <a:ext cx="4480560" cy="621792"/>
+            <a:endParaRPr lang="en-US" sz="1300" dirty="0"/>
+          </a:p>
+        </p:txBody>
+      </p:sp>
+      <p:sp>
+        <p:nvSpPr>
+          <p:cNvPr id="23" name="Text 21"/>
+          <p:cNvSpPr txBox="1"/>
+          <p:nvPr/>
+        </p:nvSpPr>
+        <p:spPr>
+          <a:xfrm>
+            <a:off x="1298448" y="5157216"/>
+            <a:ext cx="4526280" cy="621792"/>
           </a:xfrm>
           <a:prstGeom prst="rect">
             <a:avLst/>
@@ -5544,12 +6312,12 @@
           <a:p>
             <a:pPr indent="0" marL="0">
               <a:lnSpc>
-                <a:spcPts val="1450"/>
+                <a:spcPts val="1400"/>
               </a:lnSpc>
               <a:buNone/>
             </a:pPr>
             <a:r>
-              <a:rPr lang="en-US" sz="1150" dirty="0">
+              <a:rPr lang="en-US" sz="1100" dirty="0">
                 <a:solidFill>
                   <a:srgbClr val="13212B"/>
                 </a:solidFill>
@@ -5559,24 +6327,24 @@
               </a:rPr>
               <a:t>Nous ne demandons aucune donnée d'abonné. Un pseudonyme non réversible suffit pour créditer les récompenses.</a:t>
             </a:r>
-            <a:endParaRPr lang="en-US" sz="1150" dirty="0"/>
-          </a:p>
-        </p:txBody>
-      </p:sp>
-      <p:sp>
-        <p:nvSpPr>
-          <p:cNvPr id="23" name="Shape 21"/>
+            <a:endParaRPr lang="en-US" sz="1100" dirty="0"/>
+          </a:p>
+        </p:txBody>
+      </p:sp>
+      <p:sp>
+        <p:nvSpPr>
+          <p:cNvPr id="24" name="Shape 22"/>
           <p:cNvSpPr/>
           <p:nvPr/>
         </p:nvSpPr>
         <p:spPr>
           <a:xfrm>
-            <a:off x="6172200" y="4663440"/>
-            <a:ext cx="5349240" cy="1188720"/>
+            <a:off x="6172200" y="4754880"/>
+            <a:ext cx="5349240" cy="1097280"/>
           </a:xfrm>
           <a:prstGeom prst="roundRect">
             <a:avLst>
-              <a:gd name="adj" fmla="val 4615"/>
+              <a:gd name="adj" fmla="val 5000"/>
             </a:avLst>
           </a:prstGeom>
           <a:solidFill>
@@ -5587,14 +6355,14 @@
       </p:sp>
       <p:sp>
         <p:nvSpPr>
-          <p:cNvPr id="24" name="Shape 22"/>
+          <p:cNvPr id="25" name="Shape 23"/>
           <p:cNvSpPr/>
           <p:nvPr/>
         </p:nvSpPr>
         <p:spPr>
           <a:xfrm>
-            <a:off x="6400800" y="4864608"/>
-            <a:ext cx="347472" cy="347472"/>
+            <a:off x="6400800" y="4937760"/>
+            <a:ext cx="329184" cy="329184"/>
           </a:xfrm>
           <a:prstGeom prst="ellipse">
             <a:avLst/>
@@ -5607,14 +6375,14 @@
       </p:sp>
       <p:sp>
         <p:nvSpPr>
-          <p:cNvPr id="25" name="Text 23"/>
-          <p:cNvSpPr txBox="1"/>
-          <p:nvPr/>
-        </p:nvSpPr>
-        <p:spPr>
-          <a:xfrm>
-            <a:off x="6400800" y="4864608"/>
-            <a:ext cx="347472" cy="347472"/>
+          <p:cNvPr id="26" name="Text 24"/>
+          <p:cNvSpPr txBox="1"/>
+          <p:nvPr/>
+        </p:nvSpPr>
+        <p:spPr>
+          <a:xfrm>
+            <a:off x="6400800" y="4937760"/>
+            <a:ext cx="329184" cy="329184"/>
           </a:xfrm>
           <a:prstGeom prst="rect">
             <a:avLst/>
@@ -5646,30 +6414,30 @@
       </p:sp>
       <p:sp>
         <p:nvSpPr>
-          <p:cNvPr id="26" name="Text 24"/>
-          <p:cNvSpPr txBox="1"/>
-          <p:nvPr/>
-        </p:nvSpPr>
-        <p:spPr>
-          <a:xfrm>
-            <a:off x="6858000" y="4828032"/>
-            <a:ext cx="4480560" cy="292608"/>
-          </a:xfrm>
-          <a:prstGeom prst="rect">
-            <a:avLst/>
-          </a:prstGeom>
-          <a:noFill/>
-          <a:ln/>
-        </p:spPr>
-        <p:txBody>
-          <a:bodyPr wrap="square" lIns="0" tIns="0" rIns="0" bIns="0" rtlCol="0" anchor="ctr"/>
-          <a:lstStyle/>
-          <a:p>
-            <a:pPr indent="0" marL="0">
-              <a:buNone/>
-            </a:pPr>
-            <a:r>
-              <a:rPr lang="en-US" sz="1350" b="1" dirty="0">
+          <p:cNvPr id="27" name="Text 25"/>
+          <p:cNvSpPr txBox="1"/>
+          <p:nvPr/>
+        </p:nvSpPr>
+        <p:spPr>
+          <a:xfrm>
+            <a:off x="6830568" y="4892040"/>
+            <a:ext cx="4526280" cy="274320"/>
+          </a:xfrm>
+          <a:prstGeom prst="rect">
+            <a:avLst/>
+          </a:prstGeom>
+          <a:noFill/>
+          <a:ln/>
+        </p:spPr>
+        <p:txBody>
+          <a:bodyPr wrap="square" lIns="0" tIns="0" rIns="0" bIns="0" rtlCol="0" anchor="ctr"/>
+          <a:lstStyle/>
+          <a:p>
+            <a:pPr indent="0" marL="0">
+              <a:buNone/>
+            </a:pPr>
+            <a:r>
+              <a:rPr lang="en-US" sz="1300" b="1" dirty="0">
                 <a:solidFill>
                   <a:srgbClr val="065A82"/>
                 </a:solidFill>
@@ -5679,20 +6447,20 @@
               </a:rPr>
               <a:t>Un critère d'arrêt que nous proposons</a:t>
             </a:r>
-            <a:endParaRPr lang="en-US" sz="1350" dirty="0"/>
-          </a:p>
-        </p:txBody>
-      </p:sp>
-      <p:sp>
-        <p:nvSpPr>
-          <p:cNvPr id="27" name="Text 25"/>
-          <p:cNvSpPr txBox="1"/>
-          <p:nvPr/>
-        </p:nvSpPr>
-        <p:spPr>
-          <a:xfrm>
-            <a:off x="6858000" y="5120640"/>
-            <a:ext cx="4480560" cy="621792"/>
+            <a:endParaRPr lang="en-US" sz="1300" dirty="0"/>
+          </a:p>
+        </p:txBody>
+      </p:sp>
+      <p:sp>
+        <p:nvSpPr>
+          <p:cNvPr id="28" name="Text 26"/>
+          <p:cNvSpPr txBox="1"/>
+          <p:nvPr/>
+        </p:nvSpPr>
+        <p:spPr>
+          <a:xfrm>
+            <a:off x="6830568" y="5157216"/>
+            <a:ext cx="4526280" cy="621792"/>
           </a:xfrm>
           <a:prstGeom prst="rect">
             <a:avLst/>
@@ -5706,12 +6474,12 @@
           <a:p>
             <a:pPr indent="0" marL="0">
               <a:lnSpc>
-                <a:spcPts val="1450"/>
+                <a:spcPts val="1400"/>
               </a:lnSpc>
               <a:buNone/>
             </a:pPr>
             <a:r>
-              <a:rPr lang="en-US" sz="1150" dirty="0">
+              <a:rPr lang="en-US" sz="1100" dirty="0">
                 <a:solidFill>
                   <a:srgbClr val="13212B"/>
                 </a:solidFill>
@@ -5721,19 +6489,19 @@
               </a:rPr>
               <a:t>Nous mesurerons le taux de décrochage avec et sans annonce. Si les appelants raccrochent davantage, nous arrêtons.</a:t>
             </a:r>
-            <a:endParaRPr lang="en-US" sz="1150" dirty="0"/>
-          </a:p>
-        </p:txBody>
-      </p:sp>
-      <p:sp>
-        <p:nvSpPr>
-          <p:cNvPr id="28" name="Text 26"/>
-          <p:cNvSpPr txBox="1"/>
-          <p:nvPr/>
-        </p:nvSpPr>
-        <p:spPr>
-          <a:xfrm>
-            <a:off x="640080" y="6080760"/>
+            <a:endParaRPr lang="en-US" sz="1100" dirty="0"/>
+          </a:p>
+        </p:txBody>
+      </p:sp>
+      <p:sp>
+        <p:nvSpPr>
+          <p:cNvPr id="29" name="Text 27"/>
+          <p:cNvSpPr txBox="1"/>
+          <p:nvPr/>
+        </p:nvSpPr>
+        <p:spPr>
+          <a:xfrm>
+            <a:off x="640080" y="6035040"/>
             <a:ext cx="10881360" cy="320040"/>
           </a:xfrm>
           <a:prstGeom prst="rect">
@@ -5750,7 +6518,7 @@
               <a:buNone/>
             </a:pPr>
             <a:r>
-              <a:rPr lang="en-US" sz="1250" i="1" dirty="0">
+              <a:rPr lang="en-US" sz="1200" i="1" dirty="0">
                 <a:solidFill>
                   <a:srgbClr val="5B7180"/>
                 </a:solidFill>
@@ -5758,9 +6526,9 @@
                 <a:ea typeface="Calibri" pitchFamily="34" charset="-122"/>
                 <a:cs typeface="Calibri" pitchFamily="34" charset="-120"/>
               </a:rPr>
-              <a:t>Ces quatre engagements sont pris avant que vous ne les demandiez.</a:t>
-            </a:r>
-            <a:endParaRPr lang="en-US" sz="1250" dirty="0"/>
+              <a:t>Un POC sur quelques lignes de test viendra ensuite — pas aujourd'hui.</a:t>
+            </a:r>
+            <a:endParaRPr lang="en-US" sz="1200" dirty="0"/>
           </a:p>
         </p:txBody>
       </p:sp>
@@ -5843,7 +6611,7 @@
         </p:nvSpPr>
         <p:spPr>
           <a:xfrm>
-            <a:off x="822960" y="777240"/>
+            <a:off x="822960" y="731520"/>
             <a:ext cx="10515600" cy="566928"/>
           </a:xfrm>
           <a:prstGeom prst="rect">
@@ -5868,7 +6636,7 @@
                 <a:ea typeface="Cambria" pitchFamily="34" charset="-122"/>
                 <a:cs typeface="Cambria" pitchFamily="34" charset="-120"/>
               </a:rPr>
-              <a:t>Deux questions pour avancer</a:t>
+              <a:t>Trois questions</a:t>
             </a:r>
             <a:endParaRPr lang="en-US" sz="3400" dirty="0"/>
           </a:p>
@@ -5882,7 +6650,7 @@
         </p:nvSpPr>
         <p:spPr>
           <a:xfrm>
-            <a:off x="822960" y="1389888"/>
+            <a:off x="822960" y="1344168"/>
             <a:ext cx="10515600" cy="365760"/>
           </a:xfrm>
           <a:prstGeom prst="rect">
@@ -5907,7 +6675,7 @@
                 <a:ea typeface="Calibri" pitchFamily="34" charset="-122"/>
                 <a:cs typeface="Calibri" pitchFamily="34" charset="-120"/>
               </a:rPr>
-              <a:t>Les réponses déterminent entièrement la suite</a:t>
+              <a:t>Les réponses déterminent s'il y a un projet, et lequel</a:t>
             </a:r>
             <a:endParaRPr lang="en-US" sz="1500" dirty="0"/>
           </a:p>
@@ -5921,12 +6689,12 @@
         </p:nvSpPr>
         <p:spPr>
           <a:xfrm>
-            <a:off x="822960" y="2057400"/>
-            <a:ext cx="10515600" cy="1463040"/>
+            <a:off x="822960" y="1965960"/>
+            <a:ext cx="10515600" cy="1170432"/>
           </a:xfrm>
           <a:prstGeom prst="roundRect">
             <a:avLst>
-              <a:gd name="adj" fmla="val 3750"/>
+              <a:gd name="adj" fmla="val 4688"/>
             </a:avLst>
           </a:prstGeom>
           <a:solidFill>
@@ -5943,8 +6711,8 @@
         </p:nvSpPr>
         <p:spPr>
           <a:xfrm>
-            <a:off x="1143000" y="2514600"/>
-            <a:ext cx="548640" cy="548640"/>
+            <a:off x="1115568" y="2295144"/>
+            <a:ext cx="502920" cy="502920"/>
           </a:xfrm>
           <a:prstGeom prst="ellipse">
             <a:avLst/>
@@ -5963,8 +6731,8 @@
         </p:nvSpPr>
         <p:spPr>
           <a:xfrm>
-            <a:off x="1143000" y="2514600"/>
-            <a:ext cx="548640" cy="548640"/>
+            <a:off x="1115568" y="2295144"/>
+            <a:ext cx="502920" cy="502920"/>
           </a:xfrm>
           <a:prstGeom prst="rect">
             <a:avLst/>
@@ -5980,7 +6748,7 @@
               <a:buNone/>
             </a:pPr>
             <a:r>
-              <a:rPr lang="en-US" sz="2200" b="1" dirty="0">
+              <a:rPr lang="en-US" sz="2000" b="1" dirty="0">
                 <a:solidFill>
                   <a:srgbClr val="16233D"/>
                 </a:solidFill>
@@ -5990,7 +6758,7 @@
               </a:rPr>
               <a:t>1</a:t>
             </a:r>
-            <a:endParaRPr lang="en-US" sz="2200" dirty="0"/>
+            <a:endParaRPr lang="en-US" sz="2000" dirty="0"/>
           </a:p>
         </p:txBody>
       </p:sp>
@@ -6002,24 +6770,24 @@
         </p:nvSpPr>
         <p:spPr>
           <a:xfrm>
-            <a:off x="1920240" y="2313432"/>
-            <a:ext cx="9144000" cy="411480"/>
-          </a:xfrm>
-          <a:prstGeom prst="rect">
-            <a:avLst/>
-          </a:prstGeom>
-          <a:noFill/>
-          <a:ln/>
-        </p:spPr>
-        <p:txBody>
-          <a:bodyPr wrap="square" lIns="0" tIns="0" rIns="0" bIns="0" rtlCol="0" anchor="ctr"/>
-          <a:lstStyle/>
-          <a:p>
-            <a:pPr indent="0" marL="0">
-              <a:buNone/>
-            </a:pPr>
-            <a:r>
-              <a:rPr lang="en-US" sz="1800" b="1" dirty="0">
+            <a:off x="1847088" y="2148840"/>
+            <a:ext cx="9235440" cy="365760"/>
+          </a:xfrm>
+          <a:prstGeom prst="rect">
+            <a:avLst/>
+          </a:prstGeom>
+          <a:noFill/>
+          <a:ln/>
+        </p:spPr>
+        <p:txBody>
+          <a:bodyPr wrap="square" lIns="0" tIns="0" rIns="0" bIns="0" rtlCol="0" anchor="ctr"/>
+          <a:lstStyle/>
+          <a:p>
+            <a:pPr indent="0" marL="0">
+              <a:buNone/>
+            </a:pPr>
+            <a:r>
+              <a:rPr lang="en-US" sz="1650" b="1" dirty="0">
                 <a:solidFill>
                   <a:srgbClr val="FFFFFF"/>
                 </a:solidFill>
@@ -6027,9 +6795,9 @@
                 <a:ea typeface="Calibri" pitchFamily="34" charset="-122"/>
                 <a:cs typeface="Calibri" pitchFamily="34" charset="-120"/>
               </a:rPr>
-              <a:t>Êtes-vous en VoLTE / IMS en production ?</a:t>
-            </a:r>
-            <a:endParaRPr lang="en-US" sz="1800" dirty="0"/>
+              <a:t>Votre plateforme peut-elle varier le contenu selon l'appelant et selon la zone ?</a:t>
+            </a:r>
+            <a:endParaRPr lang="en-US" sz="1650" dirty="0"/>
           </a:p>
         </p:txBody>
       </p:sp>
@@ -6041,8 +6809,8 @@
         </p:nvSpPr>
         <p:spPr>
           <a:xfrm>
-            <a:off x="1920240" y="2770632"/>
-            <a:ext cx="9144000" cy="594360"/>
+            <a:off x="1847088" y="2532888"/>
+            <a:ext cx="9235440" cy="502920"/>
           </a:xfrm>
           <a:prstGeom prst="rect">
             <a:avLst/>
@@ -6056,12 +6824,12 @@
           <a:p>
             <a:pPr indent="0" marL="0">
               <a:lnSpc>
-                <a:spcPts val="1650"/>
+                <a:spcPts val="1500"/>
               </a:lnSpc>
               <a:buNone/>
             </a:pPr>
             <a:r>
-              <a:rPr lang="en-US" sz="1250" dirty="0">
+              <a:rPr lang="en-US" sz="1150" dirty="0">
                 <a:solidFill>
                   <a:srgbClr val="D9E9F0"/>
                 </a:solidFill>
@@ -6069,9 +6837,9 @@
                 <a:ea typeface="Calibri" pitchFamily="34" charset="-122"/>
                 <a:cs typeface="Calibri" pitchFamily="34" charset="-120"/>
               </a:rPr>
-              <a:t>Cela détermine si l'intégration se fait sur un serveur d'application IMS ou par déclenchement CAMEL. L'effort n'est pas du même ordre.</a:t>
-            </a:r>
-            <a:endParaRPr lang="en-US" sz="1250" dirty="0"/>
+              <a:t>C'est ce qui rend le ciblage publicitaire possible. Si la réponse est non, nous partons sur une campagne nationale — le projet existe toujours.</a:t>
+            </a:r>
+            <a:endParaRPr lang="en-US" sz="1150" dirty="0"/>
           </a:p>
         </p:txBody>
       </p:sp>
@@ -6083,12 +6851,12 @@
         </p:nvSpPr>
         <p:spPr>
           <a:xfrm>
-            <a:off x="822960" y="3749040"/>
-            <a:ext cx="10515600" cy="1463040"/>
+            <a:off x="822960" y="3264408"/>
+            <a:ext cx="10515600" cy="1170432"/>
           </a:xfrm>
           <a:prstGeom prst="roundRect">
             <a:avLst>
-              <a:gd name="adj" fmla="val 3750"/>
+              <a:gd name="adj" fmla="val 4688"/>
             </a:avLst>
           </a:prstGeom>
           <a:solidFill>
@@ -6105,8 +6873,8 @@
         </p:nvSpPr>
         <p:spPr>
           <a:xfrm>
-            <a:off x="1143000" y="4206240"/>
-            <a:ext cx="548640" cy="548640"/>
+            <a:off x="1115568" y="3593592"/>
+            <a:ext cx="502920" cy="502920"/>
           </a:xfrm>
           <a:prstGeom prst="ellipse">
             <a:avLst/>
@@ -6125,8 +6893,8 @@
         </p:nvSpPr>
         <p:spPr>
           <a:xfrm>
-            <a:off x="1143000" y="4206240"/>
-            <a:ext cx="548640" cy="548640"/>
+            <a:off x="1115568" y="3593592"/>
+            <a:ext cx="502920" cy="502920"/>
           </a:xfrm>
           <a:prstGeom prst="rect">
             <a:avLst/>
@@ -6142,7 +6910,7 @@
               <a:buNone/>
             </a:pPr>
             <a:r>
-              <a:rPr lang="en-US" sz="2200" b="1" dirty="0">
+              <a:rPr lang="en-US" sz="2000" b="1" dirty="0">
                 <a:solidFill>
                   <a:srgbClr val="16233D"/>
                 </a:solidFill>
@@ -6152,7 +6920,7 @@
               </a:rPr>
               <a:t>2</a:t>
             </a:r>
-            <a:endParaRPr lang="en-US" sz="2200" dirty="0"/>
+            <a:endParaRPr lang="en-US" sz="2000" dirty="0"/>
           </a:p>
         </p:txBody>
       </p:sp>
@@ -6164,24 +6932,24 @@
         </p:nvSpPr>
         <p:spPr>
           <a:xfrm>
-            <a:off x="1920240" y="4005072"/>
-            <a:ext cx="9144000" cy="411480"/>
-          </a:xfrm>
-          <a:prstGeom prst="rect">
-            <a:avLst/>
-          </a:prstGeom>
-          <a:noFill/>
-          <a:ln/>
-        </p:spPr>
-        <p:txBody>
-          <a:bodyPr wrap="square" lIns="0" tIns="0" rIns="0" bIns="0" rtlCol="0" anchor="ctr"/>
-          <a:lstStyle/>
-          <a:p>
-            <a:pPr indent="0" marL="0">
-              <a:buNone/>
-            </a:pPr>
-            <a:r>
-              <a:rPr lang="en-US" sz="1800" b="1" dirty="0">
+            <a:off x="1847088" y="3447288"/>
+            <a:ext cx="9235440" cy="365760"/>
+          </a:xfrm>
+          <a:prstGeom prst="rect">
+            <a:avLst/>
+          </a:prstGeom>
+          <a:noFill/>
+          <a:ln/>
+        </p:spPr>
+        <p:txBody>
+          <a:bodyPr wrap="square" lIns="0" tIns="0" rIns="0" bIns="0" rtlCol="0" anchor="ctr"/>
+          <a:lstStyle/>
+          <a:p>
+            <a:pPr indent="0" marL="0">
+              <a:buNone/>
+            </a:pPr>
+            <a:r>
+              <a:rPr lang="en-US" sz="1650" b="1" dirty="0">
                 <a:solidFill>
                   <a:srgbClr val="FFFFFF"/>
                 </a:solidFill>
@@ -6189,22 +6957,184 @@
                 <a:ea typeface="Calibri" pitchFamily="34" charset="-122"/>
                 <a:cs typeface="Calibri" pitchFamily="34" charset="-120"/>
               </a:rPr>
+              <a:t>Pouvez-vous diffuser à votre propre abonné pendant qu'il attend ?</a:t>
+            </a:r>
+            <a:endParaRPr lang="en-US" sz="1650" dirty="0"/>
+          </a:p>
+        </p:txBody>
+      </p:sp>
+      <p:sp>
+        <p:nvSpPr>
+          <p:cNvPr id="14" name="Text 12"/>
+          <p:cNvSpPr txBox="1"/>
+          <p:nvPr/>
+        </p:nvSpPr>
+        <p:spPr>
+          <a:xfrm>
+            <a:off x="1847088" y="3831336"/>
+            <a:ext cx="9235440" cy="502920"/>
+          </a:xfrm>
+          <a:prstGeom prst="rect">
+            <a:avLst/>
+          </a:prstGeom>
+          <a:noFill/>
+          <a:ln/>
+        </p:spPr>
+        <p:txBody>
+          <a:bodyPr wrap="square" lIns="0" tIns="0" rIns="0" bIns="0" rtlCol="0" anchor="ctr"/>
+          <a:lstStyle/>
+          <a:p>
+            <a:pPr indent="0" marL="0">
+              <a:lnSpc>
+                <a:spcPts val="1500"/>
+              </a:lnSpc>
+              <a:buNone/>
+            </a:pPr>
+            <a:r>
+              <a:rPr lang="en-US" sz="1150" dirty="0">
+                <a:solidFill>
+                  <a:srgbClr val="D9E9F0"/>
+                </a:solidFill>
+                <a:latin typeface="Calibri" pitchFamily="34" charset="0"/>
+                <a:ea typeface="Calibri" pitchFamily="34" charset="-122"/>
+                <a:cs typeface="Calibri" pitchFamily="34" charset="-120"/>
+              </a:rPr>
+              <a:t>Et pas seulement à ses appelants. Cette variante résout d'un coup le consentement, le ciblage et la dépendance à l'interconnexion.</a:t>
+            </a:r>
+            <a:endParaRPr lang="en-US" sz="1150" dirty="0"/>
+          </a:p>
+        </p:txBody>
+      </p:sp>
+      <p:sp>
+        <p:nvSpPr>
+          <p:cNvPr id="15" name="Shape 13"/>
+          <p:cNvSpPr/>
+          <p:nvPr/>
+        </p:nvSpPr>
+        <p:spPr>
+          <a:xfrm>
+            <a:off x="822960" y="4562856"/>
+            <a:ext cx="10515600" cy="1170432"/>
+          </a:xfrm>
+          <a:prstGeom prst="roundRect">
+            <a:avLst>
+              <a:gd name="adj" fmla="val 4688"/>
+            </a:avLst>
+          </a:prstGeom>
+          <a:solidFill>
+            <a:srgbClr val="1E2C4A"/>
+          </a:solidFill>
+          <a:ln/>
+        </p:spPr>
+      </p:sp>
+      <p:sp>
+        <p:nvSpPr>
+          <p:cNvPr id="16" name="Shape 14"/>
+          <p:cNvSpPr/>
+          <p:nvPr/>
+        </p:nvSpPr>
+        <p:spPr>
+          <a:xfrm>
+            <a:off x="1115568" y="4892040"/>
+            <a:ext cx="502920" cy="502920"/>
+          </a:xfrm>
+          <a:prstGeom prst="ellipse">
+            <a:avLst/>
+          </a:prstGeom>
+          <a:solidFill>
+            <a:srgbClr val="D9E9F0"/>
+          </a:solidFill>
+          <a:ln/>
+        </p:spPr>
+      </p:sp>
+      <p:sp>
+        <p:nvSpPr>
+          <p:cNvPr id="17" name="Text 15"/>
+          <p:cNvSpPr txBox="1"/>
+          <p:nvPr/>
+        </p:nvSpPr>
+        <p:spPr>
+          <a:xfrm>
+            <a:off x="1115568" y="4892040"/>
+            <a:ext cx="502920" cy="502920"/>
+          </a:xfrm>
+          <a:prstGeom prst="rect">
+            <a:avLst/>
+          </a:prstGeom>
+          <a:noFill/>
+          <a:ln/>
+        </p:spPr>
+        <p:txBody>
+          <a:bodyPr wrap="square" lIns="0" tIns="0" rIns="0" bIns="0" rtlCol="0" anchor="ctr"/>
+          <a:lstStyle/>
+          <a:p>
+            <a:pPr algn="ctr" indent="0" marL="0">
+              <a:buNone/>
+            </a:pPr>
+            <a:r>
+              <a:rPr lang="en-US" sz="2000" b="1" dirty="0">
+                <a:solidFill>
+                  <a:srgbClr val="16233D"/>
+                </a:solidFill>
+                <a:latin typeface="Calibri" pitchFamily="34" charset="0"/>
+                <a:ea typeface="Calibri" pitchFamily="34" charset="-122"/>
+                <a:cs typeface="Calibri" pitchFamily="34" charset="-120"/>
+              </a:rPr>
+              <a:t>3</a:t>
+            </a:r>
+            <a:endParaRPr lang="en-US" sz="2000" dirty="0"/>
+          </a:p>
+        </p:txBody>
+      </p:sp>
+      <p:sp>
+        <p:nvSpPr>
+          <p:cNvPr id="18" name="Text 16"/>
+          <p:cNvSpPr txBox="1"/>
+          <p:nvPr/>
+        </p:nvSpPr>
+        <p:spPr>
+          <a:xfrm>
+            <a:off x="1847088" y="4745736"/>
+            <a:ext cx="9235440" cy="365760"/>
+          </a:xfrm>
+          <a:prstGeom prst="rect">
+            <a:avLst/>
+          </a:prstGeom>
+          <a:noFill/>
+          <a:ln/>
+        </p:spPr>
+        <p:txBody>
+          <a:bodyPr wrap="square" lIns="0" tIns="0" rIns="0" bIns="0" rtlCol="0" anchor="ctr"/>
+          <a:lstStyle/>
+          <a:p>
+            <a:pPr indent="0" marL="0">
+              <a:buNone/>
+            </a:pPr>
+            <a:r>
+              <a:rPr lang="en-US" sz="1650" b="1" dirty="0">
+                <a:solidFill>
+                  <a:srgbClr val="FFFFFF"/>
+                </a:solidFill>
+                <a:latin typeface="Calibri" pitchFamily="34" charset="0"/>
+                <a:ea typeface="Calibri" pitchFamily="34" charset="-122"/>
+                <a:cs typeface="Calibri" pitchFamily="34" charset="-120"/>
+              </a:rPr>
               <a:t>Vos enregistrements contiennent-ils la durée réellement écoutée ?</a:t>
             </a:r>
-            <a:endParaRPr lang="en-US" sz="1800" dirty="0"/>
-          </a:p>
-        </p:txBody>
-      </p:sp>
-      <p:sp>
-        <p:nvSpPr>
-          <p:cNvPr id="14" name="Text 12"/>
-          <p:cNvSpPr txBox="1"/>
-          <p:nvPr/>
-        </p:nvSpPr>
-        <p:spPr>
-          <a:xfrm>
-            <a:off x="1920240" y="4462272"/>
-            <a:ext cx="9144000" cy="594360"/>
+            <a:endParaRPr lang="en-US" sz="1650" dirty="0"/>
+          </a:p>
+        </p:txBody>
+      </p:sp>
+      <p:sp>
+        <p:nvSpPr>
+          <p:cNvPr id="19" name="Text 17"/>
+          <p:cNvSpPr txBox="1"/>
+          <p:nvPr/>
+        </p:nvSpPr>
+        <p:spPr>
+          <a:xfrm>
+            <a:off x="1847088" y="5129784"/>
+            <a:ext cx="9235440" cy="502920"/>
           </a:xfrm>
           <a:prstGeom prst="rect">
             <a:avLst/>
@@ -6218,12 +7148,12 @@
           <a:p>
             <a:pPr indent="0" marL="0">
               <a:lnSpc>
-                <a:spcPts val="1650"/>
+                <a:spcPts val="1500"/>
               </a:lnSpc>
               <a:buNone/>
             </a:pPr>
             <a:r>
-              <a:rPr lang="en-US" sz="1250" dirty="0">
+              <a:rPr lang="en-US" sz="1150" dirty="0">
                 <a:solidFill>
                   <a:srgbClr val="D9E9F0"/>
                 </a:solidFill>
@@ -6231,22 +7161,22 @@
                 <a:ea typeface="Calibri" pitchFamily="34" charset="-122"/>
                 <a:cs typeface="Calibri" pitchFamily="34" charset="-120"/>
               </a:rPr>
-              <a:t>C'est ce qui permet de ne facturer que les annonces effectivement entendues. Sans cela, nous ne pouvons pas vendre un tarif défendable à un annonceur.</a:t>
-            </a:r>
-            <a:endParaRPr lang="en-US" sz="1250" dirty="0"/>
-          </a:p>
-        </p:txBody>
-      </p:sp>
-      <p:sp>
-        <p:nvSpPr>
-          <p:cNvPr id="15" name="Text 13"/>
-          <p:cNvSpPr txBox="1"/>
-          <p:nvPr/>
-        </p:nvSpPr>
-        <p:spPr>
-          <a:xfrm>
-            <a:off x="822960" y="5577840"/>
-            <a:ext cx="10515600" cy="411480"/>
+              <a:t>C'est ce qui permet de ne facturer que les annonces entendues. Sans cela, nous ne pouvons pas vendre un tarif défendable à un annonceur.</a:t>
+            </a:r>
+            <a:endParaRPr lang="en-US" sz="1150" dirty="0"/>
+          </a:p>
+        </p:txBody>
+      </p:sp>
+      <p:sp>
+        <p:nvSpPr>
+          <p:cNvPr id="20" name="Text 18"/>
+          <p:cNvSpPr txBox="1"/>
+          <p:nvPr/>
+        </p:nvSpPr>
+        <p:spPr>
+          <a:xfrm>
+            <a:off x="822960" y="5897880"/>
+            <a:ext cx="10515600" cy="384048"/>
           </a:xfrm>
           <a:prstGeom prst="rect">
             <a:avLst/>
@@ -6270,48 +7200,9 @@
                 <a:ea typeface="Cambria" pitchFamily="34" charset="-122"/>
                 <a:cs typeface="Cambria" pitchFamily="34" charset="-120"/>
               </a:rPr>
-              <a:t>Et une demande : pouvons-nous avoir une réunion avec votre équipe voix ?</a:t>
+              <a:t>Et une demande : une réunion avec votre équipe voix.</a:t>
             </a:r>
             <a:endParaRPr lang="en-US" sz="1900" dirty="0"/>
-          </a:p>
-        </p:txBody>
-      </p:sp>
-      <p:sp>
-        <p:nvSpPr>
-          <p:cNvPr id="16" name="Text 14"/>
-          <p:cNvSpPr txBox="1"/>
-          <p:nvPr/>
-        </p:nvSpPr>
-        <p:spPr>
-          <a:xfrm>
-            <a:off x="822960" y="6053328"/>
-            <a:ext cx="10515600" cy="292608"/>
-          </a:xfrm>
-          <a:prstGeom prst="rect">
-            <a:avLst/>
-          </a:prstGeom>
-          <a:noFill/>
-          <a:ln/>
-        </p:spPr>
-        <p:txBody>
-          <a:bodyPr wrap="square" lIns="0" tIns="0" rIns="0" bIns="0" rtlCol="0" anchor="ctr"/>
-          <a:lstStyle/>
-          <a:p>
-            <a:pPr indent="0" marL="0">
-              <a:buNone/>
-            </a:pPr>
-            <a:r>
-              <a:rPr lang="en-US" sz="1200" i="1" dirty="0">
-                <a:solidFill>
-                  <a:srgbClr val="8FA3B5"/>
-                </a:solidFill>
-                <a:latin typeface="Calibri" pitchFamily="34" charset="0"/>
-                <a:ea typeface="Calibri" pitchFamily="34" charset="-122"/>
-                <a:cs typeface="Calibri" pitchFamily="34" charset="-120"/>
-              </a:rPr>
-              <a:t>Nous avons préparé 22 questions techniques. Nous ne vous les posons pas aujourd'hui.</a:t>
-            </a:r>
-            <a:endParaRPr lang="en-US" sz="1200" dirty="0"/>
           </a:p>
         </p:txBody>
       </p:sp>
@@ -6395,23 +7286,23 @@
         <p:spPr>
           <a:xfrm>
             <a:off x="640080" y="384048"/>
-            <a:ext cx="10972800" cy="658368"/>
-          </a:xfrm>
-          <a:prstGeom prst="rect">
-            <a:avLst/>
-          </a:prstGeom>
-          <a:noFill/>
-          <a:ln/>
-        </p:spPr>
-        <p:txBody>
-          <a:bodyPr wrap="square" lIns="0" tIns="0" rIns="0" bIns="0" rtlCol="0" anchor="ctr"/>
-          <a:lstStyle/>
-          <a:p>
-            <a:pPr indent="0" marL="0">
-              <a:buNone/>
-            </a:pPr>
-            <a:r>
-              <a:rPr lang="en-US" sz="3200" b="1" dirty="0">
+            <a:ext cx="10058400" cy="658368"/>
+          </a:xfrm>
+          <a:prstGeom prst="rect">
+            <a:avLst/>
+          </a:prstGeom>
+          <a:noFill/>
+          <a:ln/>
+        </p:spPr>
+        <p:txBody>
+          <a:bodyPr wrap="square" lIns="0" tIns="0" rIns="0" bIns="0" rtlCol="0" anchor="ctr"/>
+          <a:lstStyle/>
+          <a:p>
+            <a:pPr indent="0" marL="0">
+              <a:buNone/>
+            </a:pPr>
+            <a:r>
+              <a:rPr lang="en-US" sz="3100" b="1" dirty="0">
                 <a:solidFill>
                   <a:srgbClr val="065A82"/>
                 </a:solidFill>
@@ -6419,9 +7310,9 @@
                 <a:ea typeface="Cambria" pitchFamily="34" charset="-122"/>
                 <a:cs typeface="Cambria" pitchFamily="34" charset="-120"/>
               </a:rPr>
-              <a:t>Réserve — deux variantes possibles</a:t>
-            </a:r>
-            <a:endParaRPr lang="en-US" sz="3200" dirty="0"/>
+              <a:t>Réserve — deux moments possibles pour l'annonce</a:t>
+            </a:r>
+            <a:endParaRPr lang="en-US" sz="3100" dirty="0"/>
           </a:p>
         </p:txBody>
       </p:sp>
@@ -6434,7 +7325,7 @@
         <p:spPr>
           <a:xfrm>
             <a:off x="640080" y="1060704"/>
-            <a:ext cx="10972800" cy="411480"/>
+            <a:ext cx="10881360" cy="411480"/>
           </a:xfrm>
           <a:prstGeom prst="rect">
             <a:avLst/>
@@ -6458,7 +7349,7 @@
                 <a:ea typeface="Calibri" pitchFamily="34" charset="-122"/>
                 <a:cs typeface="Calibri" pitchFamily="34" charset="-120"/>
               </a:rPr>
-              <a:t>Nous ne savons pas laquelle est la plus simple chez vous. Vous, oui.</a:t>
+              <a:t>Nous ne savons pas lequel est le plus simple chez vous. Vous, oui.</a:t>
             </a:r>
             <a:endParaRPr lang="en-US" sz="1500" dirty="0"/>
           </a:p>
@@ -7053,7 +7944,7 @@
                 <a:ea typeface="Calibri" pitchFamily="34" charset="-122"/>
                 <a:cs typeface="Calibri" pitchFamily="34" charset="-120"/>
               </a:rPr>
-              <a:t>Impossible si l'appelant est hors réseau</a:t>
+              <a:t>Seulement si l'appelant est chez vous</a:t>
             </a:r>
             <a:endParaRPr lang="en-US" sz="1150" dirty="0"/>
           </a:p>
@@ -7131,7 +8022,7 @@
                 <a:ea typeface="Calibri" pitchFamily="34" charset="-122"/>
                 <a:cs typeface="Calibri" pitchFamily="34" charset="-120"/>
               </a:rPr>
-              <a:t>Dépend de l'interconnexion</a:t>
+              <a:t>Dépend du réseau d'en face</a:t>
             </a:r>
             <a:endParaRPr lang="en-US" sz="1150" dirty="0"/>
           </a:p>
@@ -7591,23 +8482,23 @@
         <p:spPr>
           <a:xfrm>
             <a:off x="640080" y="384048"/>
-            <a:ext cx="10972800" cy="658368"/>
-          </a:xfrm>
-          <a:prstGeom prst="rect">
-            <a:avLst/>
-          </a:prstGeom>
-          <a:noFill/>
-          <a:ln/>
-        </p:spPr>
-        <p:txBody>
-          <a:bodyPr wrap="square" lIns="0" tIns="0" rIns="0" bIns="0" rtlCol="0" anchor="ctr"/>
-          <a:lstStyle/>
-          <a:p>
-            <a:pPr indent="0" marL="0">
-              <a:buNone/>
-            </a:pPr>
-            <a:r>
-              <a:rPr lang="en-US" sz="3200" b="1" dirty="0">
+            <a:ext cx="10058400" cy="658368"/>
+          </a:xfrm>
+          <a:prstGeom prst="rect">
+            <a:avLst/>
+          </a:prstGeom>
+          <a:noFill/>
+          <a:ln/>
+        </p:spPr>
+        <p:txBody>
+          <a:bodyPr wrap="square" lIns="0" tIns="0" rIns="0" bIns="0" rtlCol="0" anchor="ctr"/>
+          <a:lstStyle/>
+          <a:p>
+            <a:pPr indent="0" marL="0">
+              <a:buNone/>
+            </a:pPr>
+            <a:r>
+              <a:rPr lang="en-US" sz="3100" b="1" dirty="0">
                 <a:solidFill>
                   <a:srgbClr val="065A82"/>
                 </a:solidFill>
@@ -7615,9 +8506,9 @@
                 <a:ea typeface="Cambria" pitchFamily="34" charset="-122"/>
                 <a:cs typeface="Cambria" pitchFamily="34" charset="-120"/>
               </a:rPr>
-              <a:t>Réserve — l'architecture que nous proposons</a:t>
-            </a:r>
-            <a:endParaRPr lang="en-US" sz="3200" dirty="0"/>
+              <a:t>Réserve — trois scénarios d'intégration possibles</a:t>
+            </a:r>
+            <a:endParaRPr lang="en-US" sz="3100" dirty="0"/>
           </a:p>
         </p:txBody>
       </p:sp>
@@ -7630,7 +8521,7 @@
         <p:spPr>
           <a:xfrm>
             <a:off x="640080" y="1060704"/>
-            <a:ext cx="10972800" cy="411480"/>
+            <a:ext cx="10881360" cy="411480"/>
           </a:xfrm>
           <a:prstGeom prst="rect">
             <a:avLst/>
@@ -7654,7 +8545,7 @@
                 <a:ea typeface="Calibri" pitchFamily="34" charset="-122"/>
                 <a:cs typeface="Calibri" pitchFamily="34" charset="-120"/>
               </a:rPr>
-              <a:t>Pré-provisionnement : aucune dépendance de votre réseau à nos systèmes</a:t>
+              <a:t>Nous proposons le premier. Les deux autres n'existent que si vous les préférez.</a:t>
             </a:r>
             <a:endParaRPr lang="en-US" sz="1500" dirty="0"/>
           </a:p>
@@ -7668,12 +8559,404 @@
         </p:nvSpPr>
         <p:spPr>
           <a:xfrm>
-            <a:off x="640080" y="1874520"/>
-            <a:ext cx="3108960" cy="1371600"/>
+            <a:off x="640080" y="1783080"/>
+            <a:ext cx="3383280" cy="3977640"/>
           </a:xfrm>
           <a:prstGeom prst="roundRect">
             <a:avLst>
-              <a:gd name="adj" fmla="val 4000"/>
+              <a:gd name="adj" fmla="val 1622"/>
+            </a:avLst>
+          </a:prstGeom>
+          <a:solidFill>
+            <a:srgbClr val="E9F4F0"/>
+          </a:solidFill>
+          <a:ln w="12700">
+            <a:solidFill>
+              <a:srgbClr val="1F7A5C"/>
+            </a:solidFill>
+            <a:prstDash val="solid"/>
+          </a:ln>
+        </p:spPr>
+      </p:sp>
+      <p:sp>
+        <p:nvSpPr>
+          <p:cNvPr id="6" name="Shape 4"/>
+          <p:cNvSpPr/>
+          <p:nvPr/>
+        </p:nvSpPr>
+        <p:spPr>
+          <a:xfrm>
+            <a:off x="868680" y="1993392"/>
+            <a:ext cx="402336" cy="402336"/>
+          </a:xfrm>
+          <a:prstGeom prst="ellipse">
+            <a:avLst/>
+          </a:prstGeom>
+          <a:solidFill>
+            <a:srgbClr val="1F7A5C"/>
+          </a:solidFill>
+          <a:ln/>
+        </p:spPr>
+      </p:sp>
+      <p:sp>
+        <p:nvSpPr>
+          <p:cNvPr id="7" name="Text 5"/>
+          <p:cNvSpPr txBox="1"/>
+          <p:nvPr/>
+        </p:nvSpPr>
+        <p:spPr>
+          <a:xfrm>
+            <a:off x="868680" y="1993392"/>
+            <a:ext cx="402336" cy="402336"/>
+          </a:xfrm>
+          <a:prstGeom prst="rect">
+            <a:avLst/>
+          </a:prstGeom>
+          <a:noFill/>
+          <a:ln/>
+        </p:spPr>
+        <p:txBody>
+          <a:bodyPr wrap="square" lIns="0" tIns="0" rIns="0" bIns="0" rtlCol="0" anchor="ctr"/>
+          <a:lstStyle/>
+          <a:p>
+            <a:pPr algn="ctr" indent="0" marL="0">
+              <a:buNone/>
+            </a:pPr>
+            <a:r>
+              <a:rPr lang="en-US" sz="1600" b="1" dirty="0">
+                <a:solidFill>
+                  <a:srgbClr val="FFFFFF"/>
+                </a:solidFill>
+                <a:latin typeface="Calibri" pitchFamily="34" charset="0"/>
+                <a:ea typeface="Calibri" pitchFamily="34" charset="-122"/>
+                <a:cs typeface="Calibri" pitchFamily="34" charset="-120"/>
+              </a:rPr>
+              <a:t>1</a:t>
+            </a:r>
+            <a:endParaRPr lang="en-US" sz="1600" dirty="0"/>
+          </a:p>
+        </p:txBody>
+      </p:sp>
+      <p:sp>
+        <p:nvSpPr>
+          <p:cNvPr id="8" name="Text 6"/>
+          <p:cNvSpPr txBox="1"/>
+          <p:nvPr/>
+        </p:nvSpPr>
+        <p:spPr>
+          <a:xfrm>
+            <a:off x="1371600" y="2011680"/>
+            <a:ext cx="2560320" cy="219456"/>
+          </a:xfrm>
+          <a:prstGeom prst="rect">
+            <a:avLst/>
+          </a:prstGeom>
+          <a:noFill/>
+          <a:ln/>
+        </p:spPr>
+        <p:txBody>
+          <a:bodyPr wrap="square" lIns="0" tIns="0" rIns="0" bIns="0" rtlCol="0" anchor="ctr"/>
+          <a:lstStyle/>
+          <a:p>
+            <a:pPr indent="0" marL="0">
+              <a:buNone/>
+            </a:pPr>
+            <a:r>
+              <a:rPr lang="en-US" sz="900" b="1" spc="100" kern="0" dirty="0">
+                <a:solidFill>
+                  <a:srgbClr val="1F7A5C"/>
+                </a:solidFill>
+                <a:latin typeface="Calibri" pitchFamily="34" charset="0"/>
+                <a:ea typeface="Calibri" pitchFamily="34" charset="-122"/>
+                <a:cs typeface="Calibri" pitchFamily="34" charset="-120"/>
+              </a:rPr>
+              <a:t>CE QUE NOUS PROPOSONS</a:t>
+            </a:r>
+            <a:endParaRPr lang="en-US" sz="900" dirty="0"/>
+          </a:p>
+        </p:txBody>
+      </p:sp>
+      <p:sp>
+        <p:nvSpPr>
+          <p:cNvPr id="9" name="Text 7"/>
+          <p:cNvSpPr txBox="1"/>
+          <p:nvPr/>
+        </p:nvSpPr>
+        <p:spPr>
+          <a:xfrm>
+            <a:off x="1371600" y="2212848"/>
+            <a:ext cx="2560320" cy="274320"/>
+          </a:xfrm>
+          <a:prstGeom prst="rect">
+            <a:avLst/>
+          </a:prstGeom>
+          <a:noFill/>
+          <a:ln/>
+        </p:spPr>
+        <p:txBody>
+          <a:bodyPr wrap="square" lIns="0" tIns="0" rIns="0" bIns="0" rtlCol="0" anchor="ctr"/>
+          <a:lstStyle/>
+          <a:p>
+            <a:pPr indent="0" marL="0">
+              <a:buNone/>
+            </a:pPr>
+            <a:r>
+              <a:rPr lang="en-US" sz="1400" b="1" dirty="0">
+                <a:solidFill>
+                  <a:srgbClr val="1F7A5C"/>
+                </a:solidFill>
+                <a:latin typeface="Cambria" pitchFamily="34" charset="0"/>
+                <a:ea typeface="Cambria" pitchFamily="34" charset="-122"/>
+                <a:cs typeface="Cambria" pitchFamily="34" charset="-120"/>
+              </a:rPr>
+              <a:t>Pré-provisionnement</a:t>
+            </a:r>
+            <a:endParaRPr lang="en-US" sz="1400" dirty="0"/>
+          </a:p>
+        </p:txBody>
+      </p:sp>
+      <p:sp>
+        <p:nvSpPr>
+          <p:cNvPr id="10" name="Text 8"/>
+          <p:cNvSpPr txBox="1"/>
+          <p:nvPr/>
+        </p:nvSpPr>
+        <p:spPr>
+          <a:xfrm>
+            <a:off x="868680" y="2606040"/>
+            <a:ext cx="2926080" cy="1005840"/>
+          </a:xfrm>
+          <a:prstGeom prst="rect">
+            <a:avLst/>
+          </a:prstGeom>
+          <a:noFill/>
+          <a:ln/>
+        </p:spPr>
+        <p:txBody>
+          <a:bodyPr wrap="square" lIns="0" tIns="0" rIns="0" bIns="0" rtlCol="0" anchor="ctr"/>
+          <a:lstStyle/>
+          <a:p>
+            <a:pPr indent="0" marL="0">
+              <a:lnSpc>
+                <a:spcPts val="1400"/>
+              </a:lnSpc>
+              <a:buNone/>
+            </a:pPr>
+            <a:r>
+              <a:rPr lang="en-US" sz="1050" dirty="0">
+                <a:solidFill>
+                  <a:srgbClr val="13212B"/>
+                </a:solidFill>
+                <a:latin typeface="Calibri" pitchFamily="34" charset="0"/>
+                <a:ea typeface="Calibri" pitchFamily="34" charset="-122"/>
+                <a:cs typeface="Calibri" pitchFamily="34" charset="-120"/>
+              </a:rPr>
+              <a:t>Nous déposons contenus et règles à l'avance. Votre plateforme décide localement. Vous nous remontez les diffusions en différé.</a:t>
+            </a:r>
+            <a:endParaRPr lang="en-US" sz="1050" dirty="0"/>
+          </a:p>
+        </p:txBody>
+      </p:sp>
+      <p:sp>
+        <p:nvSpPr>
+          <p:cNvPr id="11" name="Shape 9"/>
+          <p:cNvSpPr/>
+          <p:nvPr/>
+        </p:nvSpPr>
+        <p:spPr>
+          <a:xfrm>
+            <a:off x="896112" y="3776472"/>
+            <a:ext cx="100584" cy="100584"/>
+          </a:xfrm>
+          <a:prstGeom prst="ellipse">
+            <a:avLst/>
+          </a:prstGeom>
+          <a:solidFill>
+            <a:srgbClr val="1F7A5C"/>
+          </a:solidFill>
+          <a:ln/>
+        </p:spPr>
+      </p:sp>
+      <p:sp>
+        <p:nvSpPr>
+          <p:cNvPr id="12" name="Text 10"/>
+          <p:cNvSpPr txBox="1"/>
+          <p:nvPr/>
+        </p:nvSpPr>
+        <p:spPr>
+          <a:xfrm>
+            <a:off x="1124712" y="3703320"/>
+            <a:ext cx="2697480" cy="530352"/>
+          </a:xfrm>
+          <a:prstGeom prst="rect">
+            <a:avLst/>
+          </a:prstGeom>
+          <a:noFill/>
+          <a:ln/>
+        </p:spPr>
+        <p:txBody>
+          <a:bodyPr wrap="square" lIns="0" tIns="0" rIns="0" bIns="0" rtlCol="0" anchor="ctr"/>
+          <a:lstStyle/>
+          <a:p>
+            <a:pPr indent="0" marL="0">
+              <a:lnSpc>
+                <a:spcPts val="1300"/>
+              </a:lnSpc>
+              <a:buNone/>
+            </a:pPr>
+            <a:r>
+              <a:rPr lang="en-US" sz="1000" dirty="0">
+                <a:solidFill>
+                  <a:srgbClr val="5B7180"/>
+                </a:solidFill>
+                <a:latin typeface="Calibri" pitchFamily="34" charset="0"/>
+                <a:ea typeface="Calibri" pitchFamily="34" charset="-122"/>
+                <a:cs typeface="Calibri" pitchFamily="34" charset="-120"/>
+              </a:rPr>
+              <a:t>Latence ajoutée : aucune</a:t>
+            </a:r>
+            <a:endParaRPr lang="en-US" sz="1000" dirty="0"/>
+          </a:p>
+        </p:txBody>
+      </p:sp>
+      <p:sp>
+        <p:nvSpPr>
+          <p:cNvPr id="13" name="Shape 11"/>
+          <p:cNvSpPr/>
+          <p:nvPr/>
+        </p:nvSpPr>
+        <p:spPr>
+          <a:xfrm>
+            <a:off x="896112" y="4343400"/>
+            <a:ext cx="100584" cy="100584"/>
+          </a:xfrm>
+          <a:prstGeom prst="ellipse">
+            <a:avLst/>
+          </a:prstGeom>
+          <a:solidFill>
+            <a:srgbClr val="1F7A5C"/>
+          </a:solidFill>
+          <a:ln/>
+        </p:spPr>
+      </p:sp>
+      <p:sp>
+        <p:nvSpPr>
+          <p:cNvPr id="14" name="Text 12"/>
+          <p:cNvSpPr txBox="1"/>
+          <p:nvPr/>
+        </p:nvSpPr>
+        <p:spPr>
+          <a:xfrm>
+            <a:off x="1124712" y="4270248"/>
+            <a:ext cx="2697480" cy="530352"/>
+          </a:xfrm>
+          <a:prstGeom prst="rect">
+            <a:avLst/>
+          </a:prstGeom>
+          <a:noFill/>
+          <a:ln/>
+        </p:spPr>
+        <p:txBody>
+          <a:bodyPr wrap="square" lIns="0" tIns="0" rIns="0" bIns="0" rtlCol="0" anchor="ctr"/>
+          <a:lstStyle/>
+          <a:p>
+            <a:pPr indent="0" marL="0">
+              <a:lnSpc>
+                <a:spcPts val="1300"/>
+              </a:lnSpc>
+              <a:buNone/>
+            </a:pPr>
+            <a:r>
+              <a:rPr lang="en-US" sz="1000" dirty="0">
+                <a:solidFill>
+                  <a:srgbClr val="5B7180"/>
+                </a:solidFill>
+                <a:latin typeface="Calibri" pitchFamily="34" charset="0"/>
+                <a:ea typeface="Calibri" pitchFamily="34" charset="-122"/>
+                <a:cs typeface="Calibri" pitchFamily="34" charset="-120"/>
+              </a:rPr>
+              <a:t>Dépendance externe : aucune</a:t>
+            </a:r>
+            <a:endParaRPr lang="en-US" sz="1000" dirty="0"/>
+          </a:p>
+        </p:txBody>
+      </p:sp>
+      <p:sp>
+        <p:nvSpPr>
+          <p:cNvPr id="15" name="Shape 13"/>
+          <p:cNvSpPr/>
+          <p:nvPr/>
+        </p:nvSpPr>
+        <p:spPr>
+          <a:xfrm>
+            <a:off x="896112" y="4910328"/>
+            <a:ext cx="100584" cy="100584"/>
+          </a:xfrm>
+          <a:prstGeom prst="ellipse">
+            <a:avLst/>
+          </a:prstGeom>
+          <a:solidFill>
+            <a:srgbClr val="1F7A5C"/>
+          </a:solidFill>
+          <a:ln/>
+        </p:spPr>
+      </p:sp>
+      <p:sp>
+        <p:nvSpPr>
+          <p:cNvPr id="16" name="Text 14"/>
+          <p:cNvSpPr txBox="1"/>
+          <p:nvPr/>
+        </p:nvSpPr>
+        <p:spPr>
+          <a:xfrm>
+            <a:off x="1124712" y="4837176"/>
+            <a:ext cx="2697480" cy="530352"/>
+          </a:xfrm>
+          <a:prstGeom prst="rect">
+            <a:avLst/>
+          </a:prstGeom>
+          <a:noFill/>
+          <a:ln/>
+        </p:spPr>
+        <p:txBody>
+          <a:bodyPr wrap="square" lIns="0" tIns="0" rIns="0" bIns="0" rtlCol="0" anchor="ctr"/>
+          <a:lstStyle/>
+          <a:p>
+            <a:pPr indent="0" marL="0">
+              <a:lnSpc>
+                <a:spcPts val="1300"/>
+              </a:lnSpc>
+              <a:buNone/>
+            </a:pPr>
+            <a:r>
+              <a:rPr lang="en-US" sz="1000" dirty="0">
+                <a:solidFill>
+                  <a:srgbClr val="5B7180"/>
+                </a:solidFill>
+                <a:latin typeface="Calibri" pitchFamily="34" charset="0"/>
+                <a:ea typeface="Calibri" pitchFamily="34" charset="-122"/>
+                <a:cs typeface="Calibri" pitchFamily="34" charset="-120"/>
+              </a:rPr>
+              <a:t>Développement chez vous : probablement aucun</a:t>
+            </a:r>
+            <a:endParaRPr lang="en-US" sz="1000" dirty="0"/>
+          </a:p>
+        </p:txBody>
+      </p:sp>
+      <p:sp>
+        <p:nvSpPr>
+          <p:cNvPr id="17" name="Shape 15"/>
+          <p:cNvSpPr/>
+          <p:nvPr/>
+        </p:nvSpPr>
+        <p:spPr>
+          <a:xfrm>
+            <a:off x="4297680" y="1783080"/>
+            <a:ext cx="3383280" cy="3977640"/>
+          </a:xfrm>
+          <a:prstGeom prst="roundRect">
+            <a:avLst>
+              <a:gd name="adj" fmla="val 1622"/>
             </a:avLst>
           </a:prstGeom>
           <a:solidFill>
@@ -7684,14 +8967,34 @@
       </p:sp>
       <p:sp>
         <p:nvSpPr>
-          <p:cNvPr id="6" name="Text 4"/>
-          <p:cNvSpPr txBox="1"/>
-          <p:nvPr/>
-        </p:nvSpPr>
-        <p:spPr>
-          <a:xfrm>
-            <a:off x="822960" y="2057400"/>
-            <a:ext cx="2743200" cy="292608"/>
+          <p:cNvPr id="18" name="Shape 16"/>
+          <p:cNvSpPr/>
+          <p:nvPr/>
+        </p:nvSpPr>
+        <p:spPr>
+          <a:xfrm>
+            <a:off x="4526280" y="1993392"/>
+            <a:ext cx="402336" cy="402336"/>
+          </a:xfrm>
+          <a:prstGeom prst="ellipse">
+            <a:avLst/>
+          </a:prstGeom>
+          <a:solidFill>
+            <a:srgbClr val="5B7180"/>
+          </a:solidFill>
+          <a:ln/>
+        </p:spPr>
+      </p:sp>
+      <p:sp>
+        <p:nvSpPr>
+          <p:cNvPr id="19" name="Text 17"/>
+          <p:cNvSpPr txBox="1"/>
+          <p:nvPr/>
+        </p:nvSpPr>
+        <p:spPr>
+          <a:xfrm>
+            <a:off x="4526280" y="1993392"/>
+            <a:ext cx="402336" cy="402336"/>
           </a:xfrm>
           <a:prstGeom prst="rect">
             <a:avLst/>
@@ -7707,15 +9010,93 @@
               <a:buNone/>
             </a:pPr>
             <a:r>
+              <a:rPr lang="en-US" sz="1600" b="1" dirty="0">
+                <a:solidFill>
+                  <a:srgbClr val="FFFFFF"/>
+                </a:solidFill>
+                <a:latin typeface="Calibri" pitchFamily="34" charset="0"/>
+                <a:ea typeface="Calibri" pitchFamily="34" charset="-122"/>
+                <a:cs typeface="Calibri" pitchFamily="34" charset="-120"/>
+              </a:rPr>
+              <a:t>2</a:t>
+            </a:r>
+            <a:endParaRPr lang="en-US" sz="1600" dirty="0"/>
+          </a:p>
+        </p:txBody>
+      </p:sp>
+      <p:sp>
+        <p:nvSpPr>
+          <p:cNvPr id="20" name="Text 18"/>
+          <p:cNvSpPr txBox="1"/>
+          <p:nvPr/>
+        </p:nvSpPr>
+        <p:spPr>
+          <a:xfrm>
+            <a:off x="5029200" y="2011680"/>
+            <a:ext cx="2560320" cy="219456"/>
+          </a:xfrm>
+          <a:prstGeom prst="rect">
+            <a:avLst/>
+          </a:prstGeom>
+          <a:noFill/>
+          <a:ln/>
+        </p:spPr>
+        <p:txBody>
+          <a:bodyPr wrap="square" lIns="0" tIns="0" rIns="0" bIns="0" rtlCol="0" anchor="ctr"/>
+          <a:lstStyle/>
+          <a:p>
+            <a:pPr indent="0" marL="0">
+              <a:buNone/>
+            </a:pPr>
+            <a:r>
+              <a:rPr lang="en-US" sz="900" b="1" spc="100" kern="0" dirty="0">
+                <a:solidFill>
+                  <a:srgbClr val="5B7180"/>
+                </a:solidFill>
+                <a:latin typeface="Calibri" pitchFamily="34" charset="0"/>
+                <a:ea typeface="Calibri" pitchFamily="34" charset="-122"/>
+                <a:cs typeface="Calibri" pitchFamily="34" charset="-120"/>
+              </a:rPr>
+              <a:t>SI VOUS LE PRÉFÉREZ</a:t>
+            </a:r>
+            <a:endParaRPr lang="en-US" sz="900" dirty="0"/>
+          </a:p>
+        </p:txBody>
+      </p:sp>
+      <p:sp>
+        <p:nvSpPr>
+          <p:cNvPr id="21" name="Text 19"/>
+          <p:cNvSpPr txBox="1"/>
+          <p:nvPr/>
+        </p:nvSpPr>
+        <p:spPr>
+          <a:xfrm>
+            <a:off x="5029200" y="2212848"/>
+            <a:ext cx="2560320" cy="274320"/>
+          </a:xfrm>
+          <a:prstGeom prst="rect">
+            <a:avLst/>
+          </a:prstGeom>
+          <a:noFill/>
+          <a:ln/>
+        </p:spPr>
+        <p:txBody>
+          <a:bodyPr wrap="square" lIns="0" tIns="0" rIns="0" bIns="0" rtlCol="0" anchor="ctr"/>
+          <a:lstStyle/>
+          <a:p>
+            <a:pPr indent="0" marL="0">
+              <a:buNone/>
+            </a:pPr>
+            <a:r>
               <a:rPr lang="en-US" sz="1400" b="1" dirty="0">
                 <a:solidFill>
                   <a:srgbClr val="13212B"/>
                 </a:solidFill>
-                <a:latin typeface="Calibri" pitchFamily="34" charset="0"/>
-                <a:ea typeface="Calibri" pitchFamily="34" charset="-122"/>
-                <a:cs typeface="Calibri" pitchFamily="34" charset="-120"/>
-              </a:rPr>
-              <a:t>Call Com</a:t>
+                <a:latin typeface="Cambria" pitchFamily="34" charset="0"/>
+                <a:ea typeface="Cambria" pitchFamily="34" charset="-122"/>
+                <a:cs typeface="Cambria" pitchFamily="34" charset="-120"/>
+              </a:rPr>
+              <a:t>Consultation en temps réel</a:t>
             </a:r>
             <a:endParaRPr lang="en-US" sz="1400" dirty="0"/>
           </a:p>
@@ -7723,33 +9104,95 @@
       </p:sp>
       <p:sp>
         <p:nvSpPr>
-          <p:cNvPr id="7" name="Text 5"/>
-          <p:cNvSpPr txBox="1"/>
-          <p:nvPr/>
-        </p:nvSpPr>
-        <p:spPr>
-          <a:xfrm>
-            <a:off x="822960" y="2395728"/>
-            <a:ext cx="2743200" cy="640080"/>
-          </a:xfrm>
-          <a:prstGeom prst="rect">
-            <a:avLst/>
-          </a:prstGeom>
-          <a:noFill/>
-          <a:ln/>
-        </p:spPr>
-        <p:txBody>
-          <a:bodyPr wrap="square" lIns="0" tIns="0" rIns="0" bIns="0" rtlCol="0" anchor="ctr"/>
-          <a:lstStyle/>
-          <a:p>
-            <a:pPr algn="ctr" indent="0" marL="0">
+          <p:cNvPr id="22" name="Text 20"/>
+          <p:cNvSpPr txBox="1"/>
+          <p:nvPr/>
+        </p:nvSpPr>
+        <p:spPr>
+          <a:xfrm>
+            <a:off x="4526280" y="2606040"/>
+            <a:ext cx="2926080" cy="1005840"/>
+          </a:xfrm>
+          <a:prstGeom prst="rect">
+            <a:avLst/>
+          </a:prstGeom>
+          <a:noFill/>
+          <a:ln/>
+        </p:spPr>
+        <p:txBody>
+          <a:bodyPr wrap="square" lIns="0" tIns="0" rIns="0" bIns="0" rtlCol="0" anchor="ctr"/>
+          <a:lstStyle/>
+          <a:p>
+            <a:pPr indent="0" marL="0">
               <a:lnSpc>
-                <a:spcPts val="1600"/>
+                <a:spcPts val="1400"/>
               </a:lnSpc>
               <a:buNone/>
             </a:pPr>
             <a:r>
-              <a:rPr lang="en-US" sz="1200" dirty="0">
+              <a:rPr lang="en-US" sz="1050" dirty="0">
+                <a:solidFill>
+                  <a:srgbClr val="13212B"/>
+                </a:solidFill>
+                <a:latin typeface="Calibri" pitchFamily="34" charset="0"/>
+                <a:ea typeface="Calibri" pitchFamily="34" charset="-122"/>
+                <a:cs typeface="Calibri" pitchFamily="34" charset="-120"/>
+              </a:rPr>
+              <a:t>Vous nous interrogez pendant l'établissement de l'appel. Les fichiers restent chez vous : seule une référence circule.</a:t>
+            </a:r>
+            <a:endParaRPr lang="en-US" sz="1050" dirty="0"/>
+          </a:p>
+        </p:txBody>
+      </p:sp>
+      <p:sp>
+        <p:nvSpPr>
+          <p:cNvPr id="23" name="Shape 21"/>
+          <p:cNvSpPr/>
+          <p:nvPr/>
+        </p:nvSpPr>
+        <p:spPr>
+          <a:xfrm>
+            <a:off x="4553712" y="3776472"/>
+            <a:ext cx="100584" cy="100584"/>
+          </a:xfrm>
+          <a:prstGeom prst="ellipse">
+            <a:avLst/>
+          </a:prstGeom>
+          <a:solidFill>
+            <a:srgbClr val="5B7180"/>
+          </a:solidFill>
+          <a:ln/>
+        </p:spPr>
+      </p:sp>
+      <p:sp>
+        <p:nvSpPr>
+          <p:cNvPr id="24" name="Text 22"/>
+          <p:cNvSpPr txBox="1"/>
+          <p:nvPr/>
+        </p:nvSpPr>
+        <p:spPr>
+          <a:xfrm>
+            <a:off x="4782312" y="3703320"/>
+            <a:ext cx="2697480" cy="530352"/>
+          </a:xfrm>
+          <a:prstGeom prst="rect">
+            <a:avLst/>
+          </a:prstGeom>
+          <a:noFill/>
+          <a:ln/>
+        </p:spPr>
+        <p:txBody>
+          <a:bodyPr wrap="square" lIns="0" tIns="0" rIns="0" bIns="0" rtlCol="0" anchor="ctr"/>
+          <a:lstStyle/>
+          <a:p>
+            <a:pPr indent="0" marL="0">
+              <a:lnSpc>
+                <a:spcPts val="1300"/>
+              </a:lnSpc>
+              <a:buNone/>
+            </a:pPr>
+            <a:r>
+              <a:rPr lang="en-US" sz="1000" dirty="0">
                 <a:solidFill>
                   <a:srgbClr val="5B7180"/>
                 </a:solidFill>
@@ -7757,19 +9200,61 @@
                 <a:ea typeface="Calibri" pitchFamily="34" charset="-122"/>
                 <a:cs typeface="Calibri" pitchFamily="34" charset="-120"/>
               </a:rPr>
-              <a:t>campagnes, règles,</a:t>
-            </a:r>
-            <a:endParaRPr lang="en-US" sz="1200" dirty="0"/>
-          </a:p>
-          <a:p>
-            <a:pPr algn="ctr" indent="0" marL="0">
+              <a:t>Plus souple</a:t>
+            </a:r>
+            <a:endParaRPr lang="en-US" sz="1000" dirty="0"/>
+          </a:p>
+        </p:txBody>
+      </p:sp>
+      <p:sp>
+        <p:nvSpPr>
+          <p:cNvPr id="25" name="Shape 23"/>
+          <p:cNvSpPr/>
+          <p:nvPr/>
+        </p:nvSpPr>
+        <p:spPr>
+          <a:xfrm>
+            <a:off x="4553712" y="4343400"/>
+            <a:ext cx="100584" cy="100584"/>
+          </a:xfrm>
+          <a:prstGeom prst="ellipse">
+            <a:avLst/>
+          </a:prstGeom>
+          <a:solidFill>
+            <a:srgbClr val="5B7180"/>
+          </a:solidFill>
+          <a:ln/>
+        </p:spPr>
+      </p:sp>
+      <p:sp>
+        <p:nvSpPr>
+          <p:cNvPr id="26" name="Text 24"/>
+          <p:cNvSpPr txBox="1"/>
+          <p:nvPr/>
+        </p:nvSpPr>
+        <p:spPr>
+          <a:xfrm>
+            <a:off x="4782312" y="4270248"/>
+            <a:ext cx="2697480" cy="530352"/>
+          </a:xfrm>
+          <a:prstGeom prst="rect">
+            <a:avLst/>
+          </a:prstGeom>
+          <a:noFill/>
+          <a:ln/>
+        </p:spPr>
+        <p:txBody>
+          <a:bodyPr wrap="square" lIns="0" tIns="0" rIns="0" bIns="0" rtlCol="0" anchor="ctr"/>
+          <a:lstStyle/>
+          <a:p>
+            <a:pPr indent="0" marL="0">
               <a:lnSpc>
-                <a:spcPts val="1600"/>
+                <a:spcPts val="1300"/>
               </a:lnSpc>
               <a:buNone/>
             </a:pPr>
             <a:r>
-              <a:rPr lang="en-US" sz="1200" dirty="0">
+              <a:rPr lang="en-US" sz="1000" dirty="0">
                 <a:solidFill>
                   <a:srgbClr val="5B7180"/>
                 </a:solidFill>
@@ -7777,61 +9262,61 @@
                 <a:ea typeface="Calibri" pitchFamily="34" charset="-122"/>
                 <a:cs typeface="Calibri" pitchFamily="34" charset="-120"/>
               </a:rPr>
-              <a:t>fichiers audio</a:t>
-            </a:r>
-            <a:endParaRPr lang="en-US" sz="1200" dirty="0"/>
-          </a:p>
-        </p:txBody>
-      </p:sp>
-      <p:sp>
-        <p:nvSpPr>
-          <p:cNvPr id="8" name="Shape 6"/>
+              <a:t>Mais crée une dépendance externe</a:t>
+            </a:r>
+            <a:endParaRPr lang="en-US" sz="1000" dirty="0"/>
+          </a:p>
+        </p:txBody>
+      </p:sp>
+      <p:sp>
+        <p:nvSpPr>
+          <p:cNvPr id="27" name="Shape 25"/>
           <p:cNvSpPr/>
           <p:nvPr/>
         </p:nvSpPr>
         <p:spPr>
           <a:xfrm>
-            <a:off x="3858768" y="2450592"/>
-            <a:ext cx="457200" cy="228600"/>
-          </a:xfrm>
-          <a:prstGeom prst="rightArrow">
+            <a:off x="4553712" y="4910328"/>
+            <a:ext cx="100584" cy="100584"/>
+          </a:xfrm>
+          <a:prstGeom prst="ellipse">
             <a:avLst/>
           </a:prstGeom>
           <a:solidFill>
-            <a:srgbClr val="A8BCC9"/>
+            <a:srgbClr val="5B7180"/>
           </a:solidFill>
           <a:ln/>
         </p:spPr>
       </p:sp>
       <p:sp>
         <p:nvSpPr>
-          <p:cNvPr id="9" name="Text 7"/>
-          <p:cNvSpPr txBox="1"/>
-          <p:nvPr/>
-        </p:nvSpPr>
-        <p:spPr>
-          <a:xfrm>
-            <a:off x="3657600" y="2743200"/>
-            <a:ext cx="868680" cy="548640"/>
-          </a:xfrm>
-          <a:prstGeom prst="rect">
-            <a:avLst/>
-          </a:prstGeom>
-          <a:noFill/>
-          <a:ln/>
-        </p:spPr>
-        <p:txBody>
-          <a:bodyPr wrap="square" lIns="0" tIns="0" rIns="0" bIns="0" rtlCol="0" anchor="ctr"/>
-          <a:lstStyle/>
-          <a:p>
-            <a:pPr algn="ctr" indent="0" marL="0">
+          <p:cNvPr id="28" name="Text 26"/>
+          <p:cNvSpPr txBox="1"/>
+          <p:nvPr/>
+        </p:nvSpPr>
+        <p:spPr>
+          <a:xfrm>
+            <a:off x="4782312" y="4837176"/>
+            <a:ext cx="2697480" cy="530352"/>
+          </a:xfrm>
+          <a:prstGeom prst="rect">
+            <a:avLst/>
+          </a:prstGeom>
+          <a:noFill/>
+          <a:ln/>
+        </p:spPr>
+        <p:txBody>
+          <a:bodyPr wrap="square" lIns="0" tIns="0" rIns="0" bIns="0" rtlCol="0" anchor="ctr"/>
+          <a:lstStyle/>
+          <a:p>
+            <a:pPr indent="0" marL="0">
               <a:lnSpc>
-                <a:spcPts val="1200"/>
+                <a:spcPts val="1300"/>
               </a:lnSpc>
               <a:buNone/>
             </a:pPr>
             <a:r>
-              <a:rPr lang="en-US" sz="950" dirty="0">
+              <a:rPr lang="en-US" sz="1000" dirty="0">
                 <a:solidFill>
                   <a:srgbClr val="5B7180"/>
                 </a:solidFill>
@@ -7839,300 +9324,26 @@
                 <a:ea typeface="Calibri" pitchFamily="34" charset="-122"/>
                 <a:cs typeface="Calibri" pitchFamily="34" charset="-120"/>
               </a:rPr>
-              <a:t>① dépôt</a:t>
-            </a:r>
-            <a:endParaRPr lang="en-US" sz="950" dirty="0"/>
-          </a:p>
-          <a:p>
-            <a:pPr algn="ctr" indent="0" marL="0">
-              <a:lnSpc>
-                <a:spcPts val="1200"/>
-              </a:lnSpc>
-              <a:buNone/>
-            </a:pPr>
-            <a:r>
-              <a:rPr lang="en-US" sz="950" dirty="0">
-                <a:solidFill>
-                  <a:srgbClr val="5B7180"/>
-                </a:solidFill>
-                <a:latin typeface="Calibri" pitchFamily="34" charset="0"/>
-                <a:ea typeface="Calibri" pitchFamily="34" charset="-122"/>
-                <a:cs typeface="Calibri" pitchFamily="34" charset="-120"/>
-              </a:rPr>
-              <a:t>quotidien</a:t>
-            </a:r>
-            <a:endParaRPr lang="en-US" sz="950" dirty="0"/>
-          </a:p>
-        </p:txBody>
-      </p:sp>
-      <p:sp>
-        <p:nvSpPr>
-          <p:cNvPr id="10" name="Shape 8"/>
+              <a:t>Nous ne le demandons pas</a:t>
+            </a:r>
+            <a:endParaRPr lang="en-US" sz="1000" dirty="0"/>
+          </a:p>
+        </p:txBody>
+      </p:sp>
+      <p:sp>
+        <p:nvSpPr>
+          <p:cNvPr id="29" name="Shape 27"/>
           <p:cNvSpPr/>
           <p:nvPr/>
         </p:nvSpPr>
         <p:spPr>
           <a:xfrm>
-            <a:off x="4434840" y="1691640"/>
-            <a:ext cx="3931920" cy="1737360"/>
+            <a:off x="7955280" y="1783080"/>
+            <a:ext cx="3383280" cy="3977640"/>
           </a:xfrm>
           <a:prstGeom prst="roundRect">
             <a:avLst>
-              <a:gd name="adj" fmla="val 3158"/>
-            </a:avLst>
-          </a:prstGeom>
-          <a:solidFill>
-            <a:srgbClr val="065A82"/>
-          </a:solidFill>
-          <a:ln/>
-        </p:spPr>
-      </p:sp>
-      <p:sp>
-        <p:nvSpPr>
-          <p:cNvPr id="11" name="Text 9"/>
-          <p:cNvSpPr txBox="1"/>
-          <p:nvPr/>
-        </p:nvSpPr>
-        <p:spPr>
-          <a:xfrm>
-            <a:off x="4617720" y="1874520"/>
-            <a:ext cx="3566160" cy="292608"/>
-          </a:xfrm>
-          <a:prstGeom prst="rect">
-            <a:avLst/>
-          </a:prstGeom>
-          <a:noFill/>
-          <a:ln/>
-        </p:spPr>
-        <p:txBody>
-          <a:bodyPr wrap="square" lIns="0" tIns="0" rIns="0" bIns="0" rtlCol="0" anchor="ctr"/>
-          <a:lstStyle/>
-          <a:p>
-            <a:pPr algn="ctr" indent="0" marL="0">
-              <a:buNone/>
-            </a:pPr>
-            <a:r>
-              <a:rPr lang="en-US" sz="1300" b="1" spc="150" kern="0" dirty="0">
-                <a:solidFill>
-                  <a:srgbClr val="D9E9F0"/>
-                </a:solidFill>
-                <a:latin typeface="Calibri" pitchFamily="34" charset="0"/>
-                <a:ea typeface="Calibri" pitchFamily="34" charset="-122"/>
-                <a:cs typeface="Calibri" pitchFamily="34" charset="-120"/>
-              </a:rPr>
-              <a:t>ORANGE</a:t>
-            </a:r>
-            <a:endParaRPr lang="en-US" sz="1300" dirty="0"/>
-          </a:p>
-        </p:txBody>
-      </p:sp>
-      <p:sp>
-        <p:nvSpPr>
-          <p:cNvPr id="12" name="Text 10"/>
-          <p:cNvSpPr txBox="1"/>
-          <p:nvPr/>
-        </p:nvSpPr>
-        <p:spPr>
-          <a:xfrm>
-            <a:off x="4617720" y="2194560"/>
-            <a:ext cx="3566160" cy="1143000"/>
-          </a:xfrm>
-          <a:prstGeom prst="rect">
-            <a:avLst/>
-          </a:prstGeom>
-          <a:noFill/>
-          <a:ln/>
-        </p:spPr>
-        <p:txBody>
-          <a:bodyPr wrap="square" lIns="0" tIns="0" rIns="0" bIns="0" rtlCol="0" anchor="ctr"/>
-          <a:lstStyle/>
-          <a:p>
-            <a:pPr algn="ctr" indent="0" marL="0">
-              <a:lnSpc>
-                <a:spcPts val="1600"/>
-              </a:lnSpc>
-              <a:buNone/>
-            </a:pPr>
-            <a:r>
-              <a:rPr lang="en-US" sz="1200" dirty="0">
-                <a:solidFill>
-                  <a:srgbClr val="FFFFFF"/>
-                </a:solidFill>
-                <a:latin typeface="Calibri" pitchFamily="34" charset="0"/>
-                <a:ea typeface="Calibri" pitchFamily="34" charset="-122"/>
-                <a:cs typeface="Calibri" pitchFamily="34" charset="-120"/>
-              </a:rPr>
-              <a:t>Plateforme de tonalité</a:t>
-            </a:r>
-            <a:endParaRPr lang="en-US" sz="1200" dirty="0"/>
-          </a:p>
-          <a:p>
-            <a:pPr algn="ctr" indent="0" marL="0">
-              <a:lnSpc>
-                <a:spcPts val="1600"/>
-              </a:lnSpc>
-              <a:buNone/>
-            </a:pPr>
-            <a:r>
-              <a:rPr lang="en-US" sz="1200" dirty="0">
-                <a:solidFill>
-                  <a:srgbClr val="FFFFFF"/>
-                </a:solidFill>
-                <a:latin typeface="Calibri" pitchFamily="34" charset="0"/>
-                <a:ea typeface="Calibri" pitchFamily="34" charset="-122"/>
-                <a:cs typeface="Calibri" pitchFamily="34" charset="-120"/>
-              </a:rPr>
-              <a:t>d'attente</a:t>
-            </a:r>
-            <a:endParaRPr lang="en-US" sz="1200" dirty="0"/>
-          </a:p>
-          <a:p>
-            <a:pPr algn="ctr" indent="0" marL="0">
-              <a:lnSpc>
-                <a:spcPts val="1600"/>
-              </a:lnSpc>
-              <a:buNone/>
-            </a:pPr>
-            <a:endParaRPr lang="en-US" sz="1200" dirty="0"/>
-          </a:p>
-          <a:p>
-            <a:pPr algn="ctr" indent="0" marL="0">
-              <a:lnSpc>
-                <a:spcPts val="1600"/>
-              </a:lnSpc>
-              <a:buNone/>
-            </a:pPr>
-            <a:r>
-              <a:rPr lang="en-US" sz="1200" dirty="0">
-                <a:solidFill>
-                  <a:srgbClr val="FFFFFF"/>
-                </a:solidFill>
-                <a:latin typeface="Calibri" pitchFamily="34" charset="0"/>
-                <a:ea typeface="Calibri" pitchFamily="34" charset="-122"/>
-                <a:cs typeface="Calibri" pitchFamily="34" charset="-120"/>
-              </a:rPr>
-              <a:t>sélection LOCALE</a:t>
-            </a:r>
-            <a:endParaRPr lang="en-US" sz="1200" dirty="0"/>
-          </a:p>
-          <a:p>
-            <a:pPr algn="ctr" indent="0" marL="0">
-              <a:lnSpc>
-                <a:spcPts val="1600"/>
-              </a:lnSpc>
-              <a:buNone/>
-            </a:pPr>
-            <a:r>
-              <a:rPr lang="en-US" sz="1200" dirty="0">
-                <a:solidFill>
-                  <a:srgbClr val="FFFFFF"/>
-                </a:solidFill>
-                <a:latin typeface="Calibri" pitchFamily="34" charset="0"/>
-                <a:ea typeface="Calibri" pitchFamily="34" charset="-122"/>
-                <a:cs typeface="Calibri" pitchFamily="34" charset="-120"/>
-              </a:rPr>
-              <a:t>aucun appel externe</a:t>
-            </a:r>
-            <a:endParaRPr lang="en-US" sz="1200" dirty="0"/>
-          </a:p>
-        </p:txBody>
-      </p:sp>
-      <p:sp>
-        <p:nvSpPr>
-          <p:cNvPr id="13" name="Shape 11"/>
-          <p:cNvSpPr/>
-          <p:nvPr/>
-        </p:nvSpPr>
-        <p:spPr>
-          <a:xfrm>
-            <a:off x="8476488" y="2450592"/>
-            <a:ext cx="457200" cy="228600"/>
-          </a:xfrm>
-          <a:prstGeom prst="rightArrow">
-            <a:avLst/>
-          </a:prstGeom>
-          <a:solidFill>
-            <a:srgbClr val="A8BCC9"/>
-          </a:solidFill>
-          <a:ln/>
-        </p:spPr>
-      </p:sp>
-      <p:sp>
-        <p:nvSpPr>
-          <p:cNvPr id="14" name="Text 12"/>
-          <p:cNvSpPr txBox="1"/>
-          <p:nvPr/>
-        </p:nvSpPr>
-        <p:spPr>
-          <a:xfrm>
-            <a:off x="8229600" y="2743200"/>
-            <a:ext cx="1005840" cy="548640"/>
-          </a:xfrm>
-          <a:prstGeom prst="rect">
-            <a:avLst/>
-          </a:prstGeom>
-          <a:noFill/>
-          <a:ln/>
-        </p:spPr>
-        <p:txBody>
-          <a:bodyPr wrap="square" lIns="0" tIns="0" rIns="0" bIns="0" rtlCol="0" anchor="ctr"/>
-          <a:lstStyle/>
-          <a:p>
-            <a:pPr algn="ctr" indent="0" marL="0">
-              <a:lnSpc>
-                <a:spcPts val="1200"/>
-              </a:lnSpc>
-              <a:buNone/>
-            </a:pPr>
-            <a:r>
-              <a:rPr lang="en-US" sz="950" dirty="0">
-                <a:solidFill>
-                  <a:srgbClr val="5B7180"/>
-                </a:solidFill>
-                <a:latin typeface="Calibri" pitchFamily="34" charset="0"/>
-                <a:ea typeface="Calibri" pitchFamily="34" charset="-122"/>
-                <a:cs typeface="Calibri" pitchFamily="34" charset="-120"/>
-              </a:rPr>
-              <a:t>② appel réel</a:t>
-            </a:r>
-            <a:endParaRPr lang="en-US" sz="950" dirty="0"/>
-          </a:p>
-          <a:p>
-            <a:pPr algn="ctr" indent="0" marL="0">
-              <a:lnSpc>
-                <a:spcPts val="1200"/>
-              </a:lnSpc>
-              <a:buNone/>
-            </a:pPr>
-            <a:r>
-              <a:rPr lang="en-US" sz="950" dirty="0">
-                <a:solidFill>
-                  <a:srgbClr val="5B7180"/>
-                </a:solidFill>
-                <a:latin typeface="Calibri" pitchFamily="34" charset="0"/>
-                <a:ea typeface="Calibri" pitchFamily="34" charset="-122"/>
-                <a:cs typeface="Calibri" pitchFamily="34" charset="-120"/>
-              </a:rPr>
-              <a:t>annonce jouée</a:t>
-            </a:r>
-            <a:endParaRPr lang="en-US" sz="950" dirty="0"/>
-          </a:p>
-        </p:txBody>
-      </p:sp>
-      <p:sp>
-        <p:nvSpPr>
-          <p:cNvPr id="15" name="Shape 13"/>
-          <p:cNvSpPr/>
-          <p:nvPr/>
-        </p:nvSpPr>
-        <p:spPr>
-          <a:xfrm>
-            <a:off x="9052560" y="1874520"/>
-            <a:ext cx="2468880" cy="1371600"/>
-          </a:xfrm>
-          <a:prstGeom prst="roundRect">
-            <a:avLst>
-              <a:gd name="adj" fmla="val 4000"/>
+              <a:gd name="adj" fmla="val 1622"/>
             </a:avLst>
           </a:prstGeom>
           <a:solidFill>
@@ -8143,14 +9354,34 @@
       </p:sp>
       <p:sp>
         <p:nvSpPr>
-          <p:cNvPr id="16" name="Text 14"/>
-          <p:cNvSpPr txBox="1"/>
-          <p:nvPr/>
-        </p:nvSpPr>
-        <p:spPr>
-          <a:xfrm>
-            <a:off x="9189720" y="2057400"/>
-            <a:ext cx="2194560" cy="292608"/>
+          <p:cNvPr id="30" name="Shape 28"/>
+          <p:cNvSpPr/>
+          <p:nvPr/>
+        </p:nvSpPr>
+        <p:spPr>
+          <a:xfrm>
+            <a:off x="8183880" y="1993392"/>
+            <a:ext cx="402336" cy="402336"/>
+          </a:xfrm>
+          <a:prstGeom prst="ellipse">
+            <a:avLst/>
+          </a:prstGeom>
+          <a:solidFill>
+            <a:srgbClr val="5B7180"/>
+          </a:solidFill>
+          <a:ln/>
+        </p:spPr>
+      </p:sp>
+      <p:sp>
+        <p:nvSpPr>
+          <p:cNvPr id="31" name="Text 29"/>
+          <p:cNvSpPr txBox="1"/>
+          <p:nvPr/>
+        </p:nvSpPr>
+        <p:spPr>
+          <a:xfrm>
+            <a:off x="8183880" y="1993392"/>
+            <a:ext cx="402336" cy="402336"/>
           </a:xfrm>
           <a:prstGeom prst="rect">
             <a:avLst/>
@@ -8166,15 +9397,93 @@
               <a:buNone/>
             </a:pPr>
             <a:r>
+              <a:rPr lang="en-US" sz="1600" b="1" dirty="0">
+                <a:solidFill>
+                  <a:srgbClr val="FFFFFF"/>
+                </a:solidFill>
+                <a:latin typeface="Calibri" pitchFamily="34" charset="0"/>
+                <a:ea typeface="Calibri" pitchFamily="34" charset="-122"/>
+                <a:cs typeface="Calibri" pitchFamily="34" charset="-120"/>
+              </a:rPr>
+              <a:t>3</a:t>
+            </a:r>
+            <a:endParaRPr lang="en-US" sz="1600" dirty="0"/>
+          </a:p>
+        </p:txBody>
+      </p:sp>
+      <p:sp>
+        <p:nvSpPr>
+          <p:cNvPr id="32" name="Text 30"/>
+          <p:cNvSpPr txBox="1"/>
+          <p:nvPr/>
+        </p:nvSpPr>
+        <p:spPr>
+          <a:xfrm>
+            <a:off x="8686800" y="2011680"/>
+            <a:ext cx="2560320" cy="219456"/>
+          </a:xfrm>
+          <a:prstGeom prst="rect">
+            <a:avLst/>
+          </a:prstGeom>
+          <a:noFill/>
+          <a:ln/>
+        </p:spPr>
+        <p:txBody>
+          <a:bodyPr wrap="square" lIns="0" tIns="0" rIns="0" bIns="0" rtlCol="0" anchor="ctr"/>
+          <a:lstStyle/>
+          <a:p>
+            <a:pPr indent="0" marL="0">
+              <a:buNone/>
+            </a:pPr>
+            <a:r>
+              <a:rPr lang="en-US" sz="900" b="1" spc="100" kern="0" dirty="0">
+                <a:solidFill>
+                  <a:srgbClr val="5B7180"/>
+                </a:solidFill>
+                <a:latin typeface="Calibri" pitchFamily="34" charset="0"/>
+                <a:ea typeface="Calibri" pitchFamily="34" charset="-122"/>
+                <a:cs typeface="Calibri" pitchFamily="34" charset="-120"/>
+              </a:rPr>
+              <a:t>SI VOUS LE PRÉFÉREZ</a:t>
+            </a:r>
+            <a:endParaRPr lang="en-US" sz="900" dirty="0"/>
+          </a:p>
+        </p:txBody>
+      </p:sp>
+      <p:sp>
+        <p:nvSpPr>
+          <p:cNvPr id="33" name="Text 31"/>
+          <p:cNvSpPr txBox="1"/>
+          <p:nvPr/>
+        </p:nvSpPr>
+        <p:spPr>
+          <a:xfrm>
+            <a:off x="8686800" y="2212848"/>
+            <a:ext cx="2560320" cy="274320"/>
+          </a:xfrm>
+          <a:prstGeom prst="rect">
+            <a:avLst/>
+          </a:prstGeom>
+          <a:noFill/>
+          <a:ln/>
+        </p:spPr>
+        <p:txBody>
+          <a:bodyPr wrap="square" lIns="0" tIns="0" rIns="0" bIns="0" rtlCol="0" anchor="ctr"/>
+          <a:lstStyle/>
+          <a:p>
+            <a:pPr indent="0" marL="0">
+              <a:buNone/>
+            </a:pPr>
+            <a:r>
               <a:rPr lang="en-US" sz="1400" b="1" dirty="0">
                 <a:solidFill>
                   <a:srgbClr val="13212B"/>
                 </a:solidFill>
-                <a:latin typeface="Calibri" pitchFamily="34" charset="0"/>
-                <a:ea typeface="Calibri" pitchFamily="34" charset="-122"/>
-                <a:cs typeface="Calibri" pitchFamily="34" charset="-120"/>
-              </a:rPr>
-              <a:t>Vos abonnés</a:t>
+                <a:latin typeface="Cambria" pitchFamily="34" charset="0"/>
+                <a:ea typeface="Cambria" pitchFamily="34" charset="-122"/>
+                <a:cs typeface="Cambria" pitchFamily="34" charset="-120"/>
+              </a:rPr>
+              <a:t>Composant hébergé chez vous</a:t>
             </a:r>
             <a:endParaRPr lang="en-US" sz="1400" dirty="0"/>
           </a:p>
@@ -8182,33 +9491,95 @@
       </p:sp>
       <p:sp>
         <p:nvSpPr>
-          <p:cNvPr id="17" name="Text 15"/>
-          <p:cNvSpPr txBox="1"/>
-          <p:nvPr/>
-        </p:nvSpPr>
-        <p:spPr>
-          <a:xfrm>
-            <a:off x="9189720" y="2395728"/>
-            <a:ext cx="2194560" cy="640080"/>
-          </a:xfrm>
-          <a:prstGeom prst="rect">
-            <a:avLst/>
-          </a:prstGeom>
-          <a:noFill/>
-          <a:ln/>
-        </p:spPr>
-        <p:txBody>
-          <a:bodyPr wrap="square" lIns="0" tIns="0" rIns="0" bIns="0" rtlCol="0" anchor="ctr"/>
-          <a:lstStyle/>
-          <a:p>
-            <a:pPr algn="ctr" indent="0" marL="0">
+          <p:cNvPr id="34" name="Text 32"/>
+          <p:cNvSpPr txBox="1"/>
+          <p:nvPr/>
+        </p:nvSpPr>
+        <p:spPr>
+          <a:xfrm>
+            <a:off x="8183880" y="2606040"/>
+            <a:ext cx="2926080" cy="1005840"/>
+          </a:xfrm>
+          <a:prstGeom prst="rect">
+            <a:avLst/>
+          </a:prstGeom>
+          <a:noFill/>
+          <a:ln/>
+        </p:spPr>
+        <p:txBody>
+          <a:bodyPr wrap="square" lIns="0" tIns="0" rIns="0" bIns="0" rtlCol="0" anchor="ctr"/>
+          <a:lstStyle/>
+          <a:p>
+            <a:pPr indent="0" marL="0">
               <a:lnSpc>
-                <a:spcPts val="1600"/>
+                <a:spcPts val="1400"/>
               </a:lnSpc>
               <a:buNone/>
             </a:pPr>
             <a:r>
-              <a:rPr lang="en-US" sz="1200" dirty="0">
+              <a:rPr lang="en-US" sz="1050" dirty="0">
+                <a:solidFill>
+                  <a:srgbClr val="13212B"/>
+                </a:solidFill>
+                <a:latin typeface="Calibri" pitchFamily="34" charset="0"/>
+                <a:ea typeface="Calibri" pitchFamily="34" charset="-122"/>
+                <a:cs typeface="Calibri" pitchFamily="34" charset="-120"/>
+              </a:rPr>
+              <a:t>Nous fournissons un composant déployé dans votre périmètre. Il fonctionne même si le lien vers nous est coupé.</a:t>
+            </a:r>
+            <a:endParaRPr lang="en-US" sz="1050" dirty="0"/>
+          </a:p>
+        </p:txBody>
+      </p:sp>
+      <p:sp>
+        <p:nvSpPr>
+          <p:cNvPr id="35" name="Shape 33"/>
+          <p:cNvSpPr/>
+          <p:nvPr/>
+        </p:nvSpPr>
+        <p:spPr>
+          <a:xfrm>
+            <a:off x="8211312" y="3776472"/>
+            <a:ext cx="100584" cy="100584"/>
+          </a:xfrm>
+          <a:prstGeom prst="ellipse">
+            <a:avLst/>
+          </a:prstGeom>
+          <a:solidFill>
+            <a:srgbClr val="5B7180"/>
+          </a:solidFill>
+          <a:ln/>
+        </p:spPr>
+      </p:sp>
+      <p:sp>
+        <p:nvSpPr>
+          <p:cNvPr id="36" name="Text 34"/>
+          <p:cNvSpPr txBox="1"/>
+          <p:nvPr/>
+        </p:nvSpPr>
+        <p:spPr>
+          <a:xfrm>
+            <a:off x="8439912" y="3703320"/>
+            <a:ext cx="2697480" cy="530352"/>
+          </a:xfrm>
+          <a:prstGeom prst="rect">
+            <a:avLst/>
+          </a:prstGeom>
+          <a:noFill/>
+          <a:ln/>
+        </p:spPr>
+        <p:txBody>
+          <a:bodyPr wrap="square" lIns="0" tIns="0" rIns="0" bIns="0" rtlCol="0" anchor="ctr"/>
+          <a:lstStyle/>
+          <a:p>
+            <a:pPr indent="0" marL="0">
+              <a:lnSpc>
+                <a:spcPts val="1300"/>
+              </a:lnSpc>
+              <a:buNone/>
+            </a:pPr>
+            <a:r>
+              <a:rPr lang="en-US" sz="1000" dirty="0">
                 <a:solidFill>
                   <a:srgbClr val="5B7180"/>
                 </a:solidFill>
@@ -8216,19 +9587,61 @@
                 <a:ea typeface="Calibri" pitchFamily="34" charset="-122"/>
                 <a:cs typeface="Calibri" pitchFamily="34" charset="-120"/>
               </a:rPr>
-              <a:t>aucune application</a:t>
-            </a:r>
-            <a:endParaRPr lang="en-US" sz="1200" dirty="0"/>
-          </a:p>
-          <a:p>
-            <a:pPr algn="ctr" indent="0" marL="0">
+              <a:t>Temps réel sans dépendance</a:t>
+            </a:r>
+            <a:endParaRPr lang="en-US" sz="1000" dirty="0"/>
+          </a:p>
+        </p:txBody>
+      </p:sp>
+      <p:sp>
+        <p:nvSpPr>
+          <p:cNvPr id="37" name="Shape 35"/>
+          <p:cNvSpPr/>
+          <p:nvPr/>
+        </p:nvSpPr>
+        <p:spPr>
+          <a:xfrm>
+            <a:off x="8211312" y="4343400"/>
+            <a:ext cx="100584" cy="100584"/>
+          </a:xfrm>
+          <a:prstGeom prst="ellipse">
+            <a:avLst/>
+          </a:prstGeom>
+          <a:solidFill>
+            <a:srgbClr val="5B7180"/>
+          </a:solidFill>
+          <a:ln/>
+        </p:spPr>
+      </p:sp>
+      <p:sp>
+        <p:nvSpPr>
+          <p:cNvPr id="38" name="Text 36"/>
+          <p:cNvSpPr txBox="1"/>
+          <p:nvPr/>
+        </p:nvSpPr>
+        <p:spPr>
+          <a:xfrm>
+            <a:off x="8439912" y="4270248"/>
+            <a:ext cx="2697480" cy="530352"/>
+          </a:xfrm>
+          <a:prstGeom prst="rect">
+            <a:avLst/>
+          </a:prstGeom>
+          <a:noFill/>
+          <a:ln/>
+        </p:spPr>
+        <p:txBody>
+          <a:bodyPr wrap="square" lIns="0" tIns="0" rIns="0" bIns="0" rtlCol="0" anchor="ctr"/>
+          <a:lstStyle/>
+          <a:p>
+            <a:pPr indent="0" marL="0">
               <a:lnSpc>
-                <a:spcPts val="1600"/>
+                <a:spcPts val="1300"/>
               </a:lnSpc>
               <a:buNone/>
             </a:pPr>
             <a:r>
-              <a:rPr lang="en-US" sz="1200" dirty="0">
+              <a:rPr lang="en-US" sz="1000" dirty="0">
                 <a:solidFill>
                   <a:srgbClr val="5B7180"/>
                 </a:solidFill>
@@ -8236,44 +9649,42 @@
                 <a:ea typeface="Calibri" pitchFamily="34" charset="-122"/>
                 <a:cs typeface="Calibri" pitchFamily="34" charset="-120"/>
               </a:rPr>
-              <a:t>requise</a:t>
-            </a:r>
-            <a:endParaRPr lang="en-US" sz="1200" dirty="0"/>
-          </a:p>
-        </p:txBody>
-      </p:sp>
-      <p:sp>
-        <p:nvSpPr>
-          <p:cNvPr id="18" name="Shape 16"/>
+              <a:t>Mais validation sécurité longue</a:t>
+            </a:r>
+            <a:endParaRPr lang="en-US" sz="1000" dirty="0"/>
+          </a:p>
+        </p:txBody>
+      </p:sp>
+      <p:sp>
+        <p:nvSpPr>
+          <p:cNvPr id="39" name="Shape 37"/>
           <p:cNvSpPr/>
           <p:nvPr/>
         </p:nvSpPr>
         <p:spPr>
           <a:xfrm>
-            <a:off x="640080" y="3657600"/>
-            <a:ext cx="10881360" cy="868680"/>
-          </a:xfrm>
-          <a:prstGeom prst="roundRect">
-            <a:avLst>
-              <a:gd name="adj" fmla="val 6316"/>
-            </a:avLst>
+            <a:off x="8211312" y="4910328"/>
+            <a:ext cx="100584" cy="100584"/>
+          </a:xfrm>
+          <a:prstGeom prst="ellipse">
+            <a:avLst/>
           </a:prstGeom>
           <a:solidFill>
-            <a:srgbClr val="E1EDF3"/>
+            <a:srgbClr val="5B7180"/>
           </a:solidFill>
           <a:ln/>
         </p:spPr>
       </p:sp>
       <p:sp>
         <p:nvSpPr>
-          <p:cNvPr id="19" name="Text 17"/>
-          <p:cNvSpPr txBox="1"/>
-          <p:nvPr/>
-        </p:nvSpPr>
-        <p:spPr>
-          <a:xfrm>
-            <a:off x="914400" y="3822192"/>
-            <a:ext cx="10332720" cy="548640"/>
+          <p:cNvPr id="40" name="Text 38"/>
+          <p:cNvSpPr txBox="1"/>
+          <p:nvPr/>
+        </p:nvSpPr>
+        <p:spPr>
+          <a:xfrm>
+            <a:off x="8439912" y="4837176"/>
+            <a:ext cx="2697480" cy="530352"/>
           </a:xfrm>
           <a:prstGeom prst="rect">
             <a:avLst/>
@@ -8287,51 +9698,12 @@
           <a:p>
             <a:pPr indent="0" marL="0">
               <a:lnSpc>
-                <a:spcPts val="1800"/>
+                <a:spcPts val="1300"/>
               </a:lnSpc>
               <a:buNone/>
             </a:pPr>
             <a:r>
-              <a:rPr lang="en-US" sz="1300" dirty="0">
-                <a:solidFill>
-                  <a:srgbClr val="13212B"/>
-                </a:solidFill>
-                <a:latin typeface="Calibri" pitchFamily="34" charset="0"/>
-                <a:ea typeface="Calibri" pitchFamily="34" charset="-122"/>
-                <a:cs typeface="Calibri" pitchFamily="34" charset="-120"/>
-              </a:rPr>
-              <a:t>③ Vous nous remontez les diffusions en différé : identifiant, durée écoutée, motif d'arrêt, appel décroché ou non. Nous créditons les récompenses et facturons les annonceurs.</a:t>
-            </a:r>
-            <a:endParaRPr lang="en-US" sz="1300" dirty="0"/>
-          </a:p>
-        </p:txBody>
-      </p:sp>
-      <p:sp>
-        <p:nvSpPr>
-          <p:cNvPr id="20" name="Text 18"/>
-          <p:cNvSpPr txBox="1"/>
-          <p:nvPr/>
-        </p:nvSpPr>
-        <p:spPr>
-          <a:xfrm>
-            <a:off x="640080" y="4754880"/>
-            <a:ext cx="5669280" cy="365760"/>
-          </a:xfrm>
-          <a:prstGeom prst="rect">
-            <a:avLst/>
-          </a:prstGeom>
-          <a:noFill/>
-          <a:ln/>
-        </p:spPr>
-        <p:txBody>
-          <a:bodyPr wrap="square" lIns="0" tIns="0" rIns="0" bIns="0" rtlCol="0" anchor="ctr"/>
-          <a:lstStyle/>
-          <a:p>
-            <a:pPr indent="0" marL="0">
-              <a:buNone/>
-            </a:pPr>
-            <a:r>
-              <a:rPr lang="en-US" sz="1250" dirty="0">
+              <a:rPr lang="en-US" sz="1000" dirty="0">
                 <a:solidFill>
                   <a:srgbClr val="5B7180"/>
                 </a:solidFill>
@@ -8339,22 +9711,22 @@
                 <a:ea typeface="Calibri" pitchFamily="34" charset="-122"/>
                 <a:cs typeface="Calibri" pitchFamily="34" charset="-120"/>
               </a:rPr>
-              <a:t>Latence ajoutée dans l'appel</a:t>
-            </a:r>
-            <a:endParaRPr lang="en-US" sz="1250" dirty="0"/>
-          </a:p>
-        </p:txBody>
-      </p:sp>
-      <p:sp>
-        <p:nvSpPr>
-          <p:cNvPr id="21" name="Text 19"/>
-          <p:cNvSpPr txBox="1"/>
-          <p:nvPr/>
-        </p:nvSpPr>
-        <p:spPr>
-          <a:xfrm>
-            <a:off x="6400800" y="4754880"/>
-            <a:ext cx="5120640" cy="365760"/>
+              <a:t>À envisager plus tard</a:t>
+            </a:r>
+            <a:endParaRPr lang="en-US" sz="1000" dirty="0"/>
+          </a:p>
+        </p:txBody>
+      </p:sp>
+      <p:sp>
+        <p:nvSpPr>
+          <p:cNvPr id="41" name="Text 39"/>
+          <p:cNvSpPr txBox="1"/>
+          <p:nvPr/>
+        </p:nvSpPr>
+        <p:spPr>
+          <a:xfrm>
+            <a:off x="640080" y="5943600"/>
+            <a:ext cx="10881360" cy="365760"/>
           </a:xfrm>
           <a:prstGeom prst="rect">
             <a:avLst/>
@@ -8372,169 +9744,13 @@
             <a:r>
               <a:rPr lang="en-US" sz="1250" b="1" dirty="0">
                 <a:solidFill>
-                  <a:srgbClr val="1F7A5C"/>
-                </a:solidFill>
-                <a:latin typeface="Calibri" pitchFamily="34" charset="0"/>
-                <a:ea typeface="Calibri" pitchFamily="34" charset="-122"/>
-                <a:cs typeface="Calibri" pitchFamily="34" charset="-120"/>
-              </a:rPr>
-              <a:t>0 ms</a:t>
-            </a:r>
-            <a:endParaRPr lang="en-US" sz="1250" dirty="0"/>
-          </a:p>
-        </p:txBody>
-      </p:sp>
-      <p:sp>
-        <p:nvSpPr>
-          <p:cNvPr id="22" name="Text 20"/>
-          <p:cNvSpPr txBox="1"/>
-          <p:nvPr/>
-        </p:nvSpPr>
-        <p:spPr>
-          <a:xfrm>
-            <a:off x="640080" y="5230368"/>
-            <a:ext cx="5669280" cy="365760"/>
-          </a:xfrm>
-          <a:prstGeom prst="rect">
-            <a:avLst/>
-          </a:prstGeom>
-          <a:noFill/>
-          <a:ln/>
-        </p:spPr>
-        <p:txBody>
-          <a:bodyPr wrap="square" lIns="0" tIns="0" rIns="0" bIns="0" rtlCol="0" anchor="ctr"/>
-          <a:lstStyle/>
-          <a:p>
-            <a:pPr indent="0" marL="0">
-              <a:buNone/>
-            </a:pPr>
-            <a:r>
-              <a:rPr lang="en-US" sz="1250" dirty="0">
-                <a:solidFill>
-                  <a:srgbClr val="5B7180"/>
-                </a:solidFill>
-                <a:latin typeface="Calibri" pitchFamily="34" charset="0"/>
-                <a:ea typeface="Calibri" pitchFamily="34" charset="-122"/>
-                <a:cs typeface="Calibri" pitchFamily="34" charset="-120"/>
-              </a:rPr>
-              <a:t>Développement requis de votre côté</a:t>
-            </a:r>
-            <a:endParaRPr lang="en-US" sz="1250" dirty="0"/>
-          </a:p>
-        </p:txBody>
-      </p:sp>
-      <p:sp>
-        <p:nvSpPr>
-          <p:cNvPr id="23" name="Text 21"/>
-          <p:cNvSpPr txBox="1"/>
-          <p:nvPr/>
-        </p:nvSpPr>
-        <p:spPr>
-          <a:xfrm>
-            <a:off x="6400800" y="5230368"/>
-            <a:ext cx="5120640" cy="365760"/>
-          </a:xfrm>
-          <a:prstGeom prst="rect">
-            <a:avLst/>
-          </a:prstGeom>
-          <a:noFill/>
-          <a:ln/>
-        </p:spPr>
-        <p:txBody>
-          <a:bodyPr wrap="square" lIns="0" tIns="0" rIns="0" bIns="0" rtlCol="0" anchor="ctr"/>
-          <a:lstStyle/>
-          <a:p>
-            <a:pPr indent="0" marL="0">
-              <a:buNone/>
-            </a:pPr>
-            <a:r>
-              <a:rPr lang="en-US" sz="1250" b="1" dirty="0">
-                <a:solidFill>
-                  <a:srgbClr val="1F7A5C"/>
-                </a:solidFill>
-                <a:latin typeface="Calibri" pitchFamily="34" charset="0"/>
-                <a:ea typeface="Calibri" pitchFamily="34" charset="-122"/>
-                <a:cs typeface="Calibri" pitchFamily="34" charset="-120"/>
-              </a:rPr>
-              <a:t>aucun, si l'ingestion de contenu suffit</a:t>
-            </a:r>
-            <a:endParaRPr lang="en-US" sz="1250" dirty="0"/>
-          </a:p>
-        </p:txBody>
-      </p:sp>
-      <p:sp>
-        <p:nvSpPr>
-          <p:cNvPr id="24" name="Text 22"/>
-          <p:cNvSpPr txBox="1"/>
-          <p:nvPr/>
-        </p:nvSpPr>
-        <p:spPr>
-          <a:xfrm>
-            <a:off x="640080" y="5705856"/>
-            <a:ext cx="5669280" cy="365760"/>
-          </a:xfrm>
-          <a:prstGeom prst="rect">
-            <a:avLst/>
-          </a:prstGeom>
-          <a:noFill/>
-          <a:ln/>
-        </p:spPr>
-        <p:txBody>
-          <a:bodyPr wrap="square" lIns="0" tIns="0" rIns="0" bIns="0" rtlCol="0" anchor="ctr"/>
-          <a:lstStyle/>
-          <a:p>
-            <a:pPr indent="0" marL="0">
-              <a:buNone/>
-            </a:pPr>
-            <a:r>
-              <a:rPr lang="en-US" sz="1250" dirty="0">
-                <a:solidFill>
-                  <a:srgbClr val="5B7180"/>
-                </a:solidFill>
-                <a:latin typeface="Calibri" pitchFamily="34" charset="0"/>
-                <a:ea typeface="Calibri" pitchFamily="34" charset="-122"/>
-                <a:cs typeface="Calibri" pitchFamily="34" charset="-120"/>
-              </a:rPr>
-              <a:t>Si Call Com est indisponible</a:t>
-            </a:r>
-            <a:endParaRPr lang="en-US" sz="1250" dirty="0"/>
-          </a:p>
-        </p:txBody>
-      </p:sp>
-      <p:sp>
-        <p:nvSpPr>
-          <p:cNvPr id="25" name="Text 23"/>
-          <p:cNvSpPr txBox="1"/>
-          <p:nvPr/>
-        </p:nvSpPr>
-        <p:spPr>
-          <a:xfrm>
-            <a:off x="6400800" y="5705856"/>
-            <a:ext cx="5120640" cy="365760"/>
-          </a:xfrm>
-          <a:prstGeom prst="rect">
-            <a:avLst/>
-          </a:prstGeom>
-          <a:noFill/>
-          <a:ln/>
-        </p:spPr>
-        <p:txBody>
-          <a:bodyPr wrap="square" lIns="0" tIns="0" rIns="0" bIns="0" rtlCol="0" anchor="ctr"/>
-          <a:lstStyle/>
-          <a:p>
-            <a:pPr indent="0" marL="0">
-              <a:buNone/>
-            </a:pPr>
-            <a:r>
-              <a:rPr lang="en-US" sz="1250" b="1" dirty="0">
-                <a:solidFill>
-                  <a:srgbClr val="1F7A5C"/>
-                </a:solidFill>
-                <a:latin typeface="Calibri" pitchFamily="34" charset="0"/>
-                <a:ea typeface="Calibri" pitchFamily="34" charset="-122"/>
-                <a:cs typeface="Calibri" pitchFamily="34" charset="-120"/>
-              </a:rPr>
-              <a:t>aucun effet — les règles sont déjà chez vous</a:t>
+                  <a:srgbClr val="065A82"/>
+                </a:solidFill>
+                <a:latin typeface="Calibri" pitchFamily="34" charset="0"/>
+                <a:ea typeface="Calibri" pitchFamily="34" charset="-122"/>
+                <a:cs typeface="Calibri" pitchFamily="34" charset="-120"/>
+              </a:rPr>
+              <a:t>Dans le scénario 1, la décision de quoi diffuser reste entièrement chez vous. C'est celui que nous recommandons pour commencer.</a:t>
             </a:r>
             <a:endParaRPr lang="en-US" sz="1250" dirty="0"/>
           </a:p>
